--- a/docs/Lucida_Presentation.pptx
+++ b/docs/Lucida_Presentation.pptx
@@ -5,16 +5,19 @@
     <p:sldMasterId id="2147483648" r:id="rId1"/>
   </p:sldMasterIdLst>
   <p:sldIdLst>
-    <p:sldId id="256" r:id="rId2"/>
-    <p:sldId id="257" r:id="rId3"/>
-    <p:sldId id="258" r:id="rId4"/>
-    <p:sldId id="259" r:id="rId5"/>
-    <p:sldId id="260" r:id="rId6"/>
-    <p:sldId id="261" r:id="rId7"/>
-    <p:sldId id="262" r:id="rId8"/>
-    <p:sldId id="263" r:id="rId9"/>
+    <p:sldId id="256" r:id="rId7"/>
+    <p:sldId id="257" r:id="rId8"/>
+    <p:sldId id="258" r:id="rId9"/>
+    <p:sldId id="259" r:id="rId10"/>
+    <p:sldId id="260" r:id="rId11"/>
+    <p:sldId id="261" r:id="rId12"/>
+    <p:sldId id="262" r:id="rId13"/>
+    <p:sldId id="263" r:id="rId14"/>
+    <p:sldId id="264" r:id="rId15"/>
+    <p:sldId id="265" r:id="rId16"/>
+    <p:sldId id="266" r:id="rId17"/>
   </p:sldIdLst>
-  <p:sldSz cx="12192000" cy="6858000"/>
+  <p:sldSz cx="12191695" cy="6858000" type="screen4x3"/>
   <p:notesSz cx="6858000" cy="9144000"/>
   <p:defaultTextStyle>
     <a:defPPr>
@@ -111,22 +114,6 @@
       </a:defRPr>
     </a:lvl9pPr>
   </p:defaultTextStyle>
-  <p:extLst>
-    <p:ext uri="{EFAFB233-063F-42B5-8137-9DF3F51BA10A}">
-      <p15:sldGuideLst xmlns:p15="http://schemas.microsoft.com/office/powerpoint/2012/main">
-        <p15:guide id="1" orient="horz" pos="2160">
-          <p15:clr>
-            <a:srgbClr val="A4A3A4"/>
-          </p15:clr>
-        </p15:guide>
-        <p15:guide id="2" pos="2880">
-          <p15:clr>
-            <a:srgbClr val="A4A3A4"/>
-          </p15:clr>
-        </p15:guide>
-      </p15:sldGuideLst>
-    </p:ext>
-  </p:extLst>
 </p:presentation>
 </file>
 
@@ -168,9 +155,10 @@
           <a:lstStyle/>
           <a:p>
             <a:r>
-              <a:rPr lang="en-US"/>
+              <a:rPr lang="en-US" smtClean="0"/>
               <a:t>Click to edit Master title style</a:t>
             </a:r>
+            <a:endParaRPr lang="en-US"/>
           </a:p>
         </p:txBody>
       </p:sp>
@@ -286,9 +274,10 @@
           </a:lstStyle>
           <a:p>
             <a:r>
-              <a:rPr lang="en-US"/>
+              <a:rPr lang="en-US" smtClean="0"/>
               <a:t>Click to edit Master subtitle style</a:t>
             </a:r>
+            <a:endParaRPr lang="en-US"/>
           </a:p>
         </p:txBody>
       </p:sp>
@@ -309,7 +298,7 @@
           <a:p>
             <a:fld id="{5BCAD085-E8A6-8845-BD4E-CB4CCA059FC4}" type="datetimeFigureOut">
               <a:rPr lang="en-US" smtClean="0"/>
-              <a:t>8/30/2026</a:t>
+              <a:t>1/27/13</a:t>
             </a:fld>
             <a:endParaRPr lang="en-US"/>
           </a:p>
@@ -403,9 +392,10 @@
           <a:lstStyle/>
           <a:p>
             <a:r>
-              <a:rPr lang="en-US"/>
+              <a:rPr lang="en-US" smtClean="0"/>
               <a:t>Click to edit Master title style</a:t>
             </a:r>
+            <a:endParaRPr lang="en-US"/>
           </a:p>
         </p:txBody>
       </p:sp>
@@ -426,37 +416,38 @@
           <a:p>
             <a:pPr lvl="0"/>
             <a:r>
-              <a:rPr lang="en-US"/>
+              <a:rPr lang="en-US" smtClean="0"/>
               <a:t>Click to edit Master text styles</a:t>
             </a:r>
           </a:p>
           <a:p>
             <a:pPr lvl="1"/>
             <a:r>
-              <a:rPr lang="en-US"/>
+              <a:rPr lang="en-US" smtClean="0"/>
               <a:t>Second level</a:t>
             </a:r>
           </a:p>
           <a:p>
             <a:pPr lvl="2"/>
             <a:r>
-              <a:rPr lang="en-US"/>
+              <a:rPr lang="en-US" smtClean="0"/>
               <a:t>Third level</a:t>
             </a:r>
           </a:p>
           <a:p>
             <a:pPr lvl="3"/>
             <a:r>
-              <a:rPr lang="en-US"/>
+              <a:rPr lang="en-US" smtClean="0"/>
               <a:t>Fourth level</a:t>
             </a:r>
           </a:p>
           <a:p>
             <a:pPr lvl="4"/>
             <a:r>
-              <a:rPr lang="en-US"/>
+              <a:rPr lang="en-US" smtClean="0"/>
               <a:t>Fifth level</a:t>
             </a:r>
+            <a:endParaRPr lang="en-US"/>
           </a:p>
         </p:txBody>
       </p:sp>
@@ -477,7 +468,7 @@
           <a:p>
             <a:fld id="{5BCAD085-E8A6-8845-BD4E-CB4CCA059FC4}" type="datetimeFigureOut">
               <a:rPr lang="en-US" smtClean="0"/>
-              <a:t>8/30/2026</a:t>
+              <a:t>1/27/13</a:t>
             </a:fld>
             <a:endParaRPr lang="en-US"/>
           </a:p>
@@ -576,9 +567,10 @@
           <a:lstStyle/>
           <a:p>
             <a:r>
-              <a:rPr lang="en-US"/>
+              <a:rPr lang="en-US" smtClean="0"/>
               <a:t>Click to edit Master title style</a:t>
             </a:r>
+            <a:endParaRPr lang="en-US"/>
           </a:p>
         </p:txBody>
       </p:sp>
@@ -604,37 +596,38 @@
           <a:p>
             <a:pPr lvl="0"/>
             <a:r>
-              <a:rPr lang="en-US"/>
+              <a:rPr lang="en-US" smtClean="0"/>
               <a:t>Click to edit Master text styles</a:t>
             </a:r>
           </a:p>
           <a:p>
             <a:pPr lvl="1"/>
             <a:r>
-              <a:rPr lang="en-US"/>
+              <a:rPr lang="en-US" smtClean="0"/>
               <a:t>Second level</a:t>
             </a:r>
           </a:p>
           <a:p>
             <a:pPr lvl="2"/>
             <a:r>
-              <a:rPr lang="en-US"/>
+              <a:rPr lang="en-US" smtClean="0"/>
               <a:t>Third level</a:t>
             </a:r>
           </a:p>
           <a:p>
             <a:pPr lvl="3"/>
             <a:r>
-              <a:rPr lang="en-US"/>
+              <a:rPr lang="en-US" smtClean="0"/>
               <a:t>Fourth level</a:t>
             </a:r>
           </a:p>
           <a:p>
             <a:pPr lvl="4"/>
             <a:r>
-              <a:rPr lang="en-US"/>
+              <a:rPr lang="en-US" smtClean="0"/>
               <a:t>Fifth level</a:t>
             </a:r>
+            <a:endParaRPr lang="en-US"/>
           </a:p>
         </p:txBody>
       </p:sp>
@@ -655,7 +648,7 @@
           <a:p>
             <a:fld id="{5BCAD085-E8A6-8845-BD4E-CB4CCA059FC4}" type="datetimeFigureOut">
               <a:rPr lang="en-US" smtClean="0"/>
-              <a:t>8/30/2026</a:t>
+              <a:t>1/27/13</a:t>
             </a:fld>
             <a:endParaRPr lang="en-US"/>
           </a:p>
@@ -749,9 +742,10 @@
           <a:lstStyle/>
           <a:p>
             <a:r>
-              <a:rPr lang="en-US"/>
+              <a:rPr lang="en-US" smtClean="0"/>
               <a:t>Click to edit Master title style</a:t>
             </a:r>
+            <a:endParaRPr lang="en-US"/>
           </a:p>
         </p:txBody>
       </p:sp>
@@ -772,37 +766,38 @@
           <a:p>
             <a:pPr lvl="0"/>
             <a:r>
-              <a:rPr lang="en-US"/>
+              <a:rPr lang="en-US" smtClean="0"/>
               <a:t>Click to edit Master text styles</a:t>
             </a:r>
           </a:p>
           <a:p>
             <a:pPr lvl="1"/>
             <a:r>
-              <a:rPr lang="en-US"/>
+              <a:rPr lang="en-US" smtClean="0"/>
               <a:t>Second level</a:t>
             </a:r>
           </a:p>
           <a:p>
             <a:pPr lvl="2"/>
             <a:r>
-              <a:rPr lang="en-US"/>
+              <a:rPr lang="en-US" smtClean="0"/>
               <a:t>Third level</a:t>
             </a:r>
           </a:p>
           <a:p>
             <a:pPr lvl="3"/>
             <a:r>
-              <a:rPr lang="en-US"/>
+              <a:rPr lang="en-US" smtClean="0"/>
               <a:t>Fourth level</a:t>
             </a:r>
           </a:p>
           <a:p>
             <a:pPr lvl="4"/>
             <a:r>
-              <a:rPr lang="en-US"/>
+              <a:rPr lang="en-US" smtClean="0"/>
               <a:t>Fifth level</a:t>
             </a:r>
+            <a:endParaRPr lang="en-US"/>
           </a:p>
         </p:txBody>
       </p:sp>
@@ -823,7 +818,7 @@
           <a:p>
             <a:fld id="{5BCAD085-E8A6-8845-BD4E-CB4CCA059FC4}" type="datetimeFigureOut">
               <a:rPr lang="en-US" smtClean="0"/>
-              <a:t>8/30/2026</a:t>
+              <a:t>1/27/13</a:t>
             </a:fld>
             <a:endParaRPr lang="en-US"/>
           </a:p>
@@ -926,9 +921,10 @@
           </a:lstStyle>
           <a:p>
             <a:r>
-              <a:rPr lang="en-US"/>
+              <a:rPr lang="en-US" smtClean="0"/>
               <a:t>Click to edit Master title style</a:t>
             </a:r>
+            <a:endParaRPr lang="en-US"/>
           </a:p>
         </p:txBody>
       </p:sp>
@@ -1045,7 +1041,7 @@
           <a:p>
             <a:pPr lvl="0"/>
             <a:r>
-              <a:rPr lang="en-US"/>
+              <a:rPr lang="en-US" smtClean="0"/>
               <a:t>Click to edit Master text styles</a:t>
             </a:r>
           </a:p>
@@ -1068,7 +1064,7 @@
           <a:p>
             <a:fld id="{5BCAD085-E8A6-8845-BD4E-CB4CCA059FC4}" type="datetimeFigureOut">
               <a:rPr lang="en-US" smtClean="0"/>
-              <a:t>8/30/2026</a:t>
+              <a:t>1/27/13</a:t>
             </a:fld>
             <a:endParaRPr lang="en-US"/>
           </a:p>
@@ -1162,9 +1158,10 @@
           <a:lstStyle/>
           <a:p>
             <a:r>
-              <a:rPr lang="en-US"/>
+              <a:rPr lang="en-US" smtClean="0"/>
               <a:t>Click to edit Master title style</a:t>
             </a:r>
+            <a:endParaRPr lang="en-US"/>
           </a:p>
         </p:txBody>
       </p:sp>
@@ -1218,37 +1215,38 @@
           <a:p>
             <a:pPr lvl="0"/>
             <a:r>
-              <a:rPr lang="en-US"/>
+              <a:rPr lang="en-US" smtClean="0"/>
               <a:t>Click to edit Master text styles</a:t>
             </a:r>
           </a:p>
           <a:p>
             <a:pPr lvl="1"/>
             <a:r>
-              <a:rPr lang="en-US"/>
+              <a:rPr lang="en-US" smtClean="0"/>
               <a:t>Second level</a:t>
             </a:r>
           </a:p>
           <a:p>
             <a:pPr lvl="2"/>
             <a:r>
-              <a:rPr lang="en-US"/>
+              <a:rPr lang="en-US" smtClean="0"/>
               <a:t>Third level</a:t>
             </a:r>
           </a:p>
           <a:p>
             <a:pPr lvl="3"/>
             <a:r>
-              <a:rPr lang="en-US"/>
+              <a:rPr lang="en-US" smtClean="0"/>
               <a:t>Fourth level</a:t>
             </a:r>
           </a:p>
           <a:p>
             <a:pPr lvl="4"/>
             <a:r>
-              <a:rPr lang="en-US"/>
+              <a:rPr lang="en-US" smtClean="0"/>
               <a:t>Fifth level</a:t>
             </a:r>
+            <a:endParaRPr lang="en-US"/>
           </a:p>
         </p:txBody>
       </p:sp>
@@ -1302,37 +1300,38 @@
           <a:p>
             <a:pPr lvl="0"/>
             <a:r>
-              <a:rPr lang="en-US"/>
+              <a:rPr lang="en-US" smtClean="0"/>
               <a:t>Click to edit Master text styles</a:t>
             </a:r>
           </a:p>
           <a:p>
             <a:pPr lvl="1"/>
             <a:r>
-              <a:rPr lang="en-US"/>
+              <a:rPr lang="en-US" smtClean="0"/>
               <a:t>Second level</a:t>
             </a:r>
           </a:p>
           <a:p>
             <a:pPr lvl="2"/>
             <a:r>
-              <a:rPr lang="en-US"/>
+              <a:rPr lang="en-US" smtClean="0"/>
               <a:t>Third level</a:t>
             </a:r>
           </a:p>
           <a:p>
             <a:pPr lvl="3"/>
             <a:r>
-              <a:rPr lang="en-US"/>
+              <a:rPr lang="en-US" smtClean="0"/>
               <a:t>Fourth level</a:t>
             </a:r>
           </a:p>
           <a:p>
             <a:pPr lvl="4"/>
             <a:r>
-              <a:rPr lang="en-US"/>
+              <a:rPr lang="en-US" smtClean="0"/>
               <a:t>Fifth level</a:t>
             </a:r>
+            <a:endParaRPr lang="en-US"/>
           </a:p>
         </p:txBody>
       </p:sp>
@@ -1353,7 +1352,7 @@
           <a:p>
             <a:fld id="{5BCAD085-E8A6-8845-BD4E-CB4CCA059FC4}" type="datetimeFigureOut">
               <a:rPr lang="en-US" smtClean="0"/>
-              <a:t>8/30/2026</a:t>
+              <a:t>1/27/13</a:t>
             </a:fld>
             <a:endParaRPr lang="en-US"/>
           </a:p>
@@ -1451,9 +1450,10 @@
           </a:lstStyle>
           <a:p>
             <a:r>
-              <a:rPr lang="en-US"/>
+              <a:rPr lang="en-US" smtClean="0"/>
               <a:t>Click to edit Master title style</a:t>
             </a:r>
+            <a:endParaRPr lang="en-US"/>
           </a:p>
         </p:txBody>
       </p:sp>
@@ -1516,7 +1516,7 @@
           <a:p>
             <a:pPr lvl="0"/>
             <a:r>
-              <a:rPr lang="en-US"/>
+              <a:rPr lang="en-US" smtClean="0"/>
               <a:t>Click to edit Master text styles</a:t>
             </a:r>
           </a:p>
@@ -1572,37 +1572,38 @@
           <a:p>
             <a:pPr lvl="0"/>
             <a:r>
-              <a:rPr lang="en-US"/>
+              <a:rPr lang="en-US" smtClean="0"/>
               <a:t>Click to edit Master text styles</a:t>
             </a:r>
           </a:p>
           <a:p>
             <a:pPr lvl="1"/>
             <a:r>
-              <a:rPr lang="en-US"/>
+              <a:rPr lang="en-US" smtClean="0"/>
               <a:t>Second level</a:t>
             </a:r>
           </a:p>
           <a:p>
             <a:pPr lvl="2"/>
             <a:r>
-              <a:rPr lang="en-US"/>
+              <a:rPr lang="en-US" smtClean="0"/>
               <a:t>Third level</a:t>
             </a:r>
           </a:p>
           <a:p>
             <a:pPr lvl="3"/>
             <a:r>
-              <a:rPr lang="en-US"/>
+              <a:rPr lang="en-US" smtClean="0"/>
               <a:t>Fourth level</a:t>
             </a:r>
           </a:p>
           <a:p>
             <a:pPr lvl="4"/>
             <a:r>
-              <a:rPr lang="en-US"/>
+              <a:rPr lang="en-US" smtClean="0"/>
               <a:t>Fifth level</a:t>
             </a:r>
+            <a:endParaRPr lang="en-US"/>
           </a:p>
         </p:txBody>
       </p:sp>
@@ -1665,7 +1666,7 @@
           <a:p>
             <a:pPr lvl="0"/>
             <a:r>
-              <a:rPr lang="en-US"/>
+              <a:rPr lang="en-US" smtClean="0"/>
               <a:t>Click to edit Master text styles</a:t>
             </a:r>
           </a:p>
@@ -1721,37 +1722,38 @@
           <a:p>
             <a:pPr lvl="0"/>
             <a:r>
-              <a:rPr lang="en-US"/>
+              <a:rPr lang="en-US" smtClean="0"/>
               <a:t>Click to edit Master text styles</a:t>
             </a:r>
           </a:p>
           <a:p>
             <a:pPr lvl="1"/>
             <a:r>
-              <a:rPr lang="en-US"/>
+              <a:rPr lang="en-US" smtClean="0"/>
               <a:t>Second level</a:t>
             </a:r>
           </a:p>
           <a:p>
             <a:pPr lvl="2"/>
             <a:r>
-              <a:rPr lang="en-US"/>
+              <a:rPr lang="en-US" smtClean="0"/>
               <a:t>Third level</a:t>
             </a:r>
           </a:p>
           <a:p>
             <a:pPr lvl="3"/>
             <a:r>
-              <a:rPr lang="en-US"/>
+              <a:rPr lang="en-US" smtClean="0"/>
               <a:t>Fourth level</a:t>
             </a:r>
           </a:p>
           <a:p>
             <a:pPr lvl="4"/>
             <a:r>
-              <a:rPr lang="en-US"/>
+              <a:rPr lang="en-US" smtClean="0"/>
               <a:t>Fifth level</a:t>
             </a:r>
+            <a:endParaRPr lang="en-US"/>
           </a:p>
         </p:txBody>
       </p:sp>
@@ -1772,7 +1774,7 @@
           <a:p>
             <a:fld id="{5BCAD085-E8A6-8845-BD4E-CB4CCA059FC4}" type="datetimeFigureOut">
               <a:rPr lang="en-US" smtClean="0"/>
-              <a:t>8/30/2026</a:t>
+              <a:t>1/27/13</a:t>
             </a:fld>
             <a:endParaRPr lang="en-US"/>
           </a:p>
@@ -1866,9 +1868,10 @@
           <a:lstStyle/>
           <a:p>
             <a:r>
-              <a:rPr lang="en-US"/>
+              <a:rPr lang="en-US" smtClean="0"/>
               <a:t>Click to edit Master title style</a:t>
             </a:r>
+            <a:endParaRPr lang="en-US"/>
           </a:p>
         </p:txBody>
       </p:sp>
@@ -1889,7 +1892,7 @@
           <a:p>
             <a:fld id="{5BCAD085-E8A6-8845-BD4E-CB4CCA059FC4}" type="datetimeFigureOut">
               <a:rPr lang="en-US" smtClean="0"/>
-              <a:t>8/30/2026</a:t>
+              <a:t>1/27/13</a:t>
             </a:fld>
             <a:endParaRPr lang="en-US"/>
           </a:p>
@@ -1984,7 +1987,7 @@
           <a:p>
             <a:fld id="{5BCAD085-E8A6-8845-BD4E-CB4CCA059FC4}" type="datetimeFigureOut">
               <a:rPr lang="en-US" smtClean="0"/>
-              <a:t>8/30/2026</a:t>
+              <a:t>1/27/13</a:t>
             </a:fld>
             <a:endParaRPr lang="en-US"/>
           </a:p>
@@ -2087,9 +2090,10 @@
           </a:lstStyle>
           <a:p>
             <a:r>
-              <a:rPr lang="en-US"/>
+              <a:rPr lang="en-US" smtClean="0"/>
               <a:t>Click to edit Master title style</a:t>
             </a:r>
+            <a:endParaRPr lang="en-US"/>
           </a:p>
         </p:txBody>
       </p:sp>
@@ -2143,37 +2147,38 @@
           <a:p>
             <a:pPr lvl="0"/>
             <a:r>
-              <a:rPr lang="en-US"/>
+              <a:rPr lang="en-US" smtClean="0"/>
               <a:t>Click to edit Master text styles</a:t>
             </a:r>
           </a:p>
           <a:p>
             <a:pPr lvl="1"/>
             <a:r>
-              <a:rPr lang="en-US"/>
+              <a:rPr lang="en-US" smtClean="0"/>
               <a:t>Second level</a:t>
             </a:r>
           </a:p>
           <a:p>
             <a:pPr lvl="2"/>
             <a:r>
-              <a:rPr lang="en-US"/>
+              <a:rPr lang="en-US" smtClean="0"/>
               <a:t>Third level</a:t>
             </a:r>
           </a:p>
           <a:p>
             <a:pPr lvl="3"/>
             <a:r>
-              <a:rPr lang="en-US"/>
+              <a:rPr lang="en-US" smtClean="0"/>
               <a:t>Fourth level</a:t>
             </a:r>
           </a:p>
           <a:p>
             <a:pPr lvl="4"/>
             <a:r>
-              <a:rPr lang="en-US"/>
+              <a:rPr lang="en-US" smtClean="0"/>
               <a:t>Fifth level</a:t>
             </a:r>
+            <a:endParaRPr lang="en-US"/>
           </a:p>
         </p:txBody>
       </p:sp>
@@ -2236,7 +2241,7 @@
           <a:p>
             <a:pPr lvl="0"/>
             <a:r>
-              <a:rPr lang="en-US"/>
+              <a:rPr lang="en-US" smtClean="0"/>
               <a:t>Click to edit Master text styles</a:t>
             </a:r>
           </a:p>
@@ -2259,7 +2264,7 @@
           <a:p>
             <a:fld id="{5BCAD085-E8A6-8845-BD4E-CB4CCA059FC4}" type="datetimeFigureOut">
               <a:rPr lang="en-US" smtClean="0"/>
-              <a:t>8/30/2026</a:t>
+              <a:t>1/27/13</a:t>
             </a:fld>
             <a:endParaRPr lang="en-US"/>
           </a:p>
@@ -2362,9 +2367,10 @@
           </a:lstStyle>
           <a:p>
             <a:r>
-              <a:rPr lang="en-US"/>
+              <a:rPr lang="en-US" smtClean="0"/>
               <a:t>Click to edit Master title style</a:t>
             </a:r>
+            <a:endParaRPr lang="en-US"/>
           </a:p>
         </p:txBody>
       </p:sp>
@@ -2488,7 +2494,7 @@
           <a:p>
             <a:pPr lvl="0"/>
             <a:r>
-              <a:rPr lang="en-US"/>
+              <a:rPr lang="en-US" smtClean="0"/>
               <a:t>Click to edit Master text styles</a:t>
             </a:r>
           </a:p>
@@ -2511,7 +2517,7 @@
           <a:p>
             <a:fld id="{5BCAD085-E8A6-8845-BD4E-CB4CCA059FC4}" type="datetimeFigureOut">
               <a:rPr lang="en-US" smtClean="0"/>
-              <a:t>8/30/2026</a:t>
+              <a:t>1/27/13</a:t>
             </a:fld>
             <a:endParaRPr lang="en-US"/>
           </a:p>
@@ -2620,9 +2626,10 @@
           <a:lstStyle/>
           <a:p>
             <a:r>
-              <a:rPr lang="en-US"/>
+              <a:rPr lang="en-US" smtClean="0"/>
               <a:t>Click to edit Master title style</a:t>
             </a:r>
+            <a:endParaRPr lang="en-US"/>
           </a:p>
         </p:txBody>
       </p:sp>
@@ -2653,37 +2660,38 @@
           <a:p>
             <a:pPr lvl="0"/>
             <a:r>
-              <a:rPr lang="en-US"/>
+              <a:rPr lang="en-US" smtClean="0"/>
               <a:t>Click to edit Master text styles</a:t>
             </a:r>
           </a:p>
           <a:p>
             <a:pPr lvl="1"/>
             <a:r>
-              <a:rPr lang="en-US"/>
+              <a:rPr lang="en-US" smtClean="0"/>
               <a:t>Second level</a:t>
             </a:r>
           </a:p>
           <a:p>
             <a:pPr lvl="2"/>
             <a:r>
-              <a:rPr lang="en-US"/>
+              <a:rPr lang="en-US" smtClean="0"/>
               <a:t>Third level</a:t>
             </a:r>
           </a:p>
           <a:p>
             <a:pPr lvl="3"/>
             <a:r>
-              <a:rPr lang="en-US"/>
+              <a:rPr lang="en-US" smtClean="0"/>
               <a:t>Fourth level</a:t>
             </a:r>
           </a:p>
           <a:p>
             <a:pPr lvl="4"/>
             <a:r>
-              <a:rPr lang="en-US"/>
+              <a:rPr lang="en-US" smtClean="0"/>
               <a:t>Fifth level</a:t>
             </a:r>
+            <a:endParaRPr lang="en-US"/>
           </a:p>
         </p:txBody>
       </p:sp>
@@ -2722,7 +2730,7 @@
           <a:p>
             <a:fld id="{5BCAD085-E8A6-8845-BD4E-CB4CCA059FC4}" type="datetimeFigureOut">
               <a:rPr lang="en-US" smtClean="0"/>
-              <a:t>8/30/2026</a:t>
+              <a:t>1/27/13</a:t>
             </a:fld>
             <a:endParaRPr lang="en-US"/>
           </a:p>
@@ -3081,12 +3089,12 @@
 </file>
 
 <file path=ppt/slides/slide1.xml><?xml version="1.0" encoding="utf-8"?>
-<p:sld xmlns:a="http://schemas.openxmlformats.org/drawingml/2006/main" xmlns:r="http://schemas.openxmlformats.org/officeDocument/2006/relationships" xmlns:p="http://schemas.openxmlformats.org/presentationml/2006/main">
+<p:sld xmlns:a="http://schemas.openxmlformats.org/drawingml/2006/main" xmlns:p="http://schemas.openxmlformats.org/presentationml/2006/main" xmlns:r="http://schemas.openxmlformats.org/officeDocument/2006/relationships">
   <p:cSld>
     <p:bg>
       <p:bgPr>
         <a:solidFill>
-          <a:srgbClr val="0F172A"/>
+          <a:srgbClr val="000000"/>
         </a:solidFill>
         <a:effectLst/>
       </p:bgPr>
@@ -3097,128 +3105,120 @@
         <p:cNvGrpSpPr/>
         <p:nvPr/>
       </p:nvGrpSpPr>
-      <p:grpSpPr>
-        <a:xfrm>
-          <a:off x="0" y="0"/>
-          <a:ext cx="0" cy="0"/>
-          <a:chOff x="0" y="0"/>
-          <a:chExt cx="0" cy="0"/>
-        </a:xfrm>
-      </p:grpSpPr>
-      <p:sp>
-        <p:nvSpPr>
-          <p:cNvPr id="2" name="Rectangle 1"/>
-          <p:cNvSpPr/>
-          <p:nvPr/>
-        </p:nvSpPr>
-        <p:spPr>
-          <a:xfrm>
-            <a:off x="0" y="0"/>
-            <a:ext cx="12191695" cy="109728"/>
-          </a:xfrm>
-          <a:prstGeom prst="rect">
-            <a:avLst/>
-          </a:prstGeom>
-          <a:solidFill>
-            <a:srgbClr val="14B8A6"/>
-          </a:solidFill>
-          <a:ln>
-            <a:noFill/>
+      <p:grpSpPr/>
+      <p:sp>
+        <p:nvSpPr>
+          <p:cNvPr id="2" name="TextBox 1"/>
+          <p:cNvSpPr txBox="1"/>
+          <p:nvPr/>
+        </p:nvSpPr>
+        <p:spPr>
+          <a:xfrm>
+            <a:off x="868680" y="2148840"/>
+            <a:ext cx="7315200" cy="1097280"/>
+          </a:xfrm>
+          <a:prstGeom prst="rect">
+            <a:avLst/>
+          </a:prstGeom>
+          <a:noFill/>
+        </p:spPr>
+        <p:txBody>
+          <a:bodyPr wrap="square" lIns="0" rIns="0" tIns="0" bIns="0">
+            <a:spAutoFit/>
+          </a:bodyPr>
+          <a:lstStyle/>
+          <a:p>
+            <a:pPr algn="l">
+              <a:lnSpc>
+                <a:spcPct val="100000"/>
+              </a:lnSpc>
+              <a:defRPr sz="6400" b="1">
+                <a:solidFill>
+                  <a:srgbClr val="FFFFFF"/>
+                </a:solidFill>
+                <a:latin typeface="Segoe UI"/>
+              </a:defRPr>
+            </a:pPr>
+            <a:r>
+              <a:t>Lucida</a:t>
+            </a:r>
+          </a:p>
+        </p:txBody>
+      </p:sp>
+      <p:sp>
+        <p:nvSpPr>
+          <p:cNvPr id="3" name="TextBox 2"/>
+          <p:cNvSpPr txBox="1"/>
+          <p:nvPr/>
+        </p:nvSpPr>
+        <p:spPr>
+          <a:xfrm>
+            <a:off x="868680" y="3310128"/>
+            <a:ext cx="8229600" cy="548640"/>
+          </a:xfrm>
+          <a:prstGeom prst="rect">
+            <a:avLst/>
+          </a:prstGeom>
+          <a:noFill/>
+        </p:spPr>
+        <p:txBody>
+          <a:bodyPr wrap="square" lIns="0" rIns="0" tIns="0" bIns="0">
+            <a:spAutoFit/>
+          </a:bodyPr>
+          <a:lstStyle/>
+          <a:p>
+            <a:pPr algn="l">
+              <a:lnSpc>
+                <a:spcPct val="100000"/>
+              </a:lnSpc>
+              <a:defRPr sz="2300" b="0">
+                <a:solidFill>
+                  <a:srgbClr val="D4D4D8"/>
+                </a:solidFill>
+                <a:latin typeface="Segoe UI"/>
+              </a:defRPr>
+            </a:pPr>
+            <a:r>
+              <a:t>An AI workforce for a small shop.</a:t>
+            </a:r>
+          </a:p>
+        </p:txBody>
+      </p:sp>
+      <p:cxnSp>
+        <p:nvCxnSpPr>
+          <p:cNvPr id="4" name="Connector 3"/>
+          <p:cNvCxnSpPr/>
+          <p:nvPr/>
+        </p:nvCxnSpPr>
+        <p:spPr>
+          <a:xfrm>
+            <a:off x="868680" y="4069080"/>
+            <a:ext cx="2926080" cy="0"/>
+          </a:xfrm>
+          <a:prstGeom prst="line">
+            <a:avLst/>
+          </a:prstGeom>
+          <a:ln w="12700">
+            <a:solidFill>
+              <a:srgbClr val="7B1E22"/>
+            </a:solidFill>
           </a:ln>
         </p:spPr>
         <p:style>
-          <a:lnRef idx="1">
+          <a:lnRef idx="2">
             <a:schemeClr val="accent1"/>
           </a:lnRef>
-          <a:fillRef idx="3">
+          <a:fillRef idx="0">
             <a:schemeClr val="accent1"/>
           </a:fillRef>
-          <a:effectRef idx="2">
+          <a:effectRef idx="1">
             <a:schemeClr val="accent1"/>
           </a:effectRef>
           <a:fontRef idx="minor">
-            <a:schemeClr val="lt1"/>
+            <a:schemeClr val="tx1"/>
           </a:fontRef>
         </p:style>
-        <p:txBody>
-          <a:bodyPr rtlCol="0" anchor="ctr"/>
-          <a:lstStyle/>
-          <a:p>
-            <a:pPr algn="ctr"/>
-            <a:endParaRPr/>
-          </a:p>
-        </p:txBody>
-      </p:sp>
-      <p:sp>
-        <p:nvSpPr>
-          <p:cNvPr id="3" name="TextBox 2"/>
-          <p:cNvSpPr txBox="1"/>
-          <p:nvPr/>
-        </p:nvSpPr>
-        <p:spPr>
-          <a:xfrm>
-            <a:off x="640080" y="640080"/>
-            <a:ext cx="4572000" cy="731520"/>
-          </a:xfrm>
-          <a:prstGeom prst="rect">
-            <a:avLst/>
-          </a:prstGeom>
-          <a:noFill/>
-        </p:spPr>
-        <p:txBody>
-          <a:bodyPr wrap="none">
-            <a:spAutoFit/>
-          </a:bodyPr>
-          <a:lstStyle/>
-          <a:p>
-            <a:pPr>
-              <a:defRPr sz="3000" b="1">
-                <a:solidFill>
-                  <a:srgbClr val="FFFFFF"/>
-                </a:solidFill>
-              </a:defRPr>
-            </a:pPr>
-            <a:r>
-              <a:t>Lucida</a:t>
-            </a:r>
-          </a:p>
-        </p:txBody>
-      </p:sp>
-      <p:sp>
-        <p:nvSpPr>
-          <p:cNvPr id="4" name="TextBox 3"/>
-          <p:cNvSpPr txBox="1"/>
-          <p:nvPr/>
-        </p:nvSpPr>
-        <p:spPr>
-          <a:xfrm>
-            <a:off x="640080" y="1325880"/>
-            <a:ext cx="8229600" cy="731520"/>
-          </a:xfrm>
-          <a:prstGeom prst="rect">
-            <a:avLst/>
-          </a:prstGeom>
-          <a:noFill/>
-        </p:spPr>
-        <p:txBody>
-          <a:bodyPr wrap="none">
-            <a:spAutoFit/>
-          </a:bodyPr>
-          <a:lstStyle/>
-          <a:p>
-            <a:pPr>
-              <a:defRPr sz="2500">
-                <a:solidFill>
-                  <a:srgbClr val="FFFFFF"/>
-                </a:solidFill>
-              </a:defRPr>
-            </a:pPr>
-            <a:r>
-              <a:t>Interactive Multi-Agent AI Workforce for a Small Business</a:t>
-            </a:r>
-          </a:p>
-        </p:txBody>
-      </p:sp>
+      </p:cxnSp>
       <p:sp>
         <p:nvSpPr>
           <p:cNvPr id="5" name="TextBox 4"/>
@@ -3227,136 +3227,104 @@
         </p:nvSpPr>
         <p:spPr>
           <a:xfrm>
-            <a:off x="640080" y="2011680"/>
-            <a:ext cx="5029200" cy="2560320"/>
-          </a:xfrm>
-          <a:prstGeom prst="rect">
-            <a:avLst/>
-          </a:prstGeom>
-          <a:noFill/>
-        </p:spPr>
-        <p:txBody>
-          <a:bodyPr wrap="none">
-            <a:spAutoFit/>
-          </a:bodyPr>
-          <a:lstStyle/>
-          <a:p>
-            <a:pPr>
-              <a:defRPr sz="2000">
-                <a:solidFill>
-                  <a:srgbClr val="FFFFFF"/>
-                </a:solidFill>
-              </a:defRPr>
-            </a:pPr>
-            <a:r>
-              <a:t>• Supervisor-driven business workflow</a:t>
-            </a:r>
-          </a:p>
-          <a:p>
-            <a:pPr>
-              <a:defRPr sz="2000">
-                <a:solidFill>
-                  <a:srgbClr val="FFFFFF"/>
-                </a:solidFill>
-              </a:defRPr>
-            </a:pPr>
-            <a:r>
-              <a:t>• 8 specialist agents</a:t>
-            </a:r>
-          </a:p>
-          <a:p>
-            <a:pPr>
-              <a:defRPr sz="2000">
-                <a:solidFill>
-                  <a:srgbClr val="FFFFFF"/>
-                </a:solidFill>
-              </a:defRPr>
-            </a:pPr>
-            <a:r>
-              <a:t>• Shared memory + tool integration</a:t>
-            </a:r>
-          </a:p>
-          <a:p>
-            <a:pPr>
-              <a:defRPr sz="2000">
-                <a:solidFill>
-                  <a:srgbClr val="FFFFFF"/>
-                </a:solidFill>
-              </a:defRPr>
-            </a:pPr>
-            <a:r>
-              <a:t>• Human approval for risky actions</a:t>
-            </a:r>
-          </a:p>
-          <a:p>
-            <a:pPr>
-              <a:defRPr sz="2000">
-                <a:solidFill>
-                  <a:srgbClr val="FFFFFF"/>
-                </a:solidFill>
-              </a:defRPr>
-            </a:pPr>
-            <a:r>
-              <a:t>• Live dashboard + execution trace</a:t>
-            </a:r>
-          </a:p>
-        </p:txBody>
-      </p:sp>
-      <p:pic>
-        <p:nvPicPr>
-          <p:cNvPr id="6" name="Picture 5" descr="image1.png"/>
-          <p:cNvPicPr>
-            <a:picLocks noChangeAspect="1"/>
-          </p:cNvPicPr>
-          <p:nvPr/>
-        </p:nvPicPr>
-        <p:blipFill>
-          <a:blip r:embed="rId2"/>
-          <a:stretch>
-            <a:fillRect/>
-          </a:stretch>
-        </p:blipFill>
-        <p:spPr>
-          <a:xfrm>
-            <a:off x="6583680" y="1737360"/>
-            <a:ext cx="4754880" cy="3474720"/>
-          </a:xfrm>
-          <a:prstGeom prst="rect">
-            <a:avLst/>
-          </a:prstGeom>
-        </p:spPr>
-      </p:pic>
-      <p:sp>
-        <p:nvSpPr>
-          <p:cNvPr id="7" name="TextBox 6"/>
-          <p:cNvSpPr txBox="1"/>
-          <p:nvPr/>
-        </p:nvSpPr>
-        <p:spPr>
-          <a:xfrm>
-            <a:off x="640080" y="6217920"/>
-            <a:ext cx="7315200" cy="365760"/>
-          </a:xfrm>
-          <a:prstGeom prst="rect">
-            <a:avLst/>
-          </a:prstGeom>
-          <a:noFill/>
-        </p:spPr>
-        <p:txBody>
-          <a:bodyPr wrap="none">
-            <a:spAutoFit/>
-          </a:bodyPr>
-          <a:lstStyle/>
-          <a:p>
-            <a:pPr>
-              <a:defRPr sz="1400">
-                <a:solidFill>
-                  <a:srgbClr val="BFDBFE"/>
-                </a:solidFill>
-              </a:defRPr>
-            </a:pPr>
-            <a:r>
-              <a:t>AI Workforce | Business Intelligence | LangGraph</a:t>
+            <a:off x="868680" y="4343400"/>
+            <a:ext cx="7863840" cy="914400"/>
+          </a:xfrm>
+          <a:prstGeom prst="rect">
+            <a:avLst/>
+          </a:prstGeom>
+          <a:noFill/>
+        </p:spPr>
+        <p:txBody>
+          <a:bodyPr wrap="square" lIns="0" rIns="0" tIns="0" bIns="0">
+            <a:spAutoFit/>
+          </a:bodyPr>
+          <a:lstStyle/>
+          <a:p>
+            <a:pPr algn="l">
+              <a:lnSpc>
+                <a:spcPct val="135000"/>
+              </a:lnSpc>
+              <a:defRPr sz="1450" b="0">
+                <a:solidFill>
+                  <a:srgbClr val="9A9AA2"/>
+                </a:solidFill>
+                <a:latin typeface="Segoe UI"/>
+              </a:defRPr>
+            </a:pPr>
+            <a:r>
+              <a:t>One supervisor routes work to eight specialists. They share one</a:t>
+            </a:r>
+          </a:p>
+          <a:p>
+            <a:pPr algn="l">
+              <a:lnSpc>
+                <a:spcPct val="135000"/>
+              </a:lnSpc>
+              <a:defRPr sz="1450" b="0">
+                <a:solidFill>
+                  <a:srgbClr val="9A9AA2"/>
+                </a:solidFill>
+                <a:latin typeface="Segoe UI"/>
+              </a:defRPr>
+            </a:pPr>
+            <a:r>
+              <a:t>memory of the business, and stop for permission before spending money.</a:t>
+            </a:r>
+          </a:p>
+        </p:txBody>
+      </p:sp>
+      <p:sp>
+        <p:nvSpPr>
+          <p:cNvPr id="6" name="TextBox 5"/>
+          <p:cNvSpPr txBox="1"/>
+          <p:nvPr/>
+        </p:nvSpPr>
+        <p:spPr>
+          <a:xfrm>
+            <a:off x="868680" y="5623560"/>
+            <a:ext cx="6400800" cy="731520"/>
+          </a:xfrm>
+          <a:prstGeom prst="rect">
+            <a:avLst/>
+          </a:prstGeom>
+          <a:noFill/>
+        </p:spPr>
+        <p:txBody>
+          <a:bodyPr wrap="square" lIns="0" rIns="0" tIns="0" bIns="0">
+            <a:spAutoFit/>
+          </a:bodyPr>
+          <a:lstStyle/>
+          <a:p>
+            <a:pPr algn="l">
+              <a:lnSpc>
+                <a:spcPct val="130000"/>
+              </a:lnSpc>
+              <a:defRPr sz="1250" b="0">
+                <a:solidFill>
+                  <a:srgbClr val="7A7A82"/>
+                </a:solidFill>
+                <a:latin typeface="Segoe UI"/>
+              </a:defRPr>
+            </a:pPr>
+            <a:r>
+              <a:t>Esme Moula Chowdhury Abha   ·   26-94089-2</a:t>
+            </a:r>
+          </a:p>
+          <a:p>
+            <a:pPr algn="l">
+              <a:lnSpc>
+                <a:spcPct val="130000"/>
+              </a:lnSpc>
+              <a:defRPr sz="1250" b="0">
+                <a:solidFill>
+                  <a:srgbClr val="7A7A82"/>
+                </a:solidFill>
+                <a:latin typeface="Segoe UI"/>
+              </a:defRPr>
+            </a:pPr>
+            <a:r>
+              <a:t>Interactive Multi-Agent AI System</a:t>
             </a:r>
           </a:p>
         </p:txBody>
@@ -3369,13 +3337,13 @@
 </p:sld>
 </file>
 
-<file path=ppt/slides/slide2.xml><?xml version="1.0" encoding="utf-8"?>
-<p:sld xmlns:a="http://schemas.openxmlformats.org/drawingml/2006/main" xmlns:r="http://schemas.openxmlformats.org/officeDocument/2006/relationships" xmlns:p="http://schemas.openxmlformats.org/presentationml/2006/main">
+<file path=ppt/slides/slide10.xml><?xml version="1.0" encoding="utf-8"?>
+<p:sld xmlns:a="http://schemas.openxmlformats.org/drawingml/2006/main" xmlns:p="http://schemas.openxmlformats.org/presentationml/2006/main" xmlns:r="http://schemas.openxmlformats.org/officeDocument/2006/relationships">
   <p:cSld>
     <p:bg>
       <p:bgPr>
         <a:solidFill>
-          <a:srgbClr val="F3F4F6"/>
+          <a:srgbClr val="FFFFFF"/>
         </a:solidFill>
         <a:effectLst/>
       </p:bgPr>
@@ -3386,14 +3354,7 @@
         <p:cNvGrpSpPr/>
         <p:nvPr/>
       </p:nvGrpSpPr>
-      <p:grpSpPr>
-        <a:xfrm>
-          <a:off x="0" y="0"/>
-          <a:ext cx="0" cy="0"/>
-          <a:chOff x="0" y="0"/>
-          <a:chExt cx="0" cy="0"/>
-        </a:xfrm>
-      </p:grpSpPr>
+      <p:grpSpPr/>
       <p:sp>
         <p:nvSpPr>
           <p:cNvPr id="2" name="TextBox 1"/>
@@ -3402,29 +3363,33 @@
         </p:nvSpPr>
         <p:spPr>
           <a:xfrm>
-            <a:off x="640080" y="457200"/>
-            <a:ext cx="7315200" cy="640080"/>
-          </a:xfrm>
-          <a:prstGeom prst="rect">
-            <a:avLst/>
-          </a:prstGeom>
-          <a:noFill/>
-        </p:spPr>
-        <p:txBody>
-          <a:bodyPr wrap="none">
-            <a:spAutoFit/>
-          </a:bodyPr>
-          <a:lstStyle/>
-          <a:p>
-            <a:pPr>
-              <a:defRPr sz="2800" b="1">
-                <a:solidFill>
-                  <a:srgbClr val="0F172A"/>
-                </a:solidFill>
-              </a:defRPr>
-            </a:pPr>
-            <a:r>
-              <a:t>Problem and Motivation</a:t>
+            <a:off x="777240" y="566928"/>
+            <a:ext cx="7315200" cy="274320"/>
+          </a:xfrm>
+          <a:prstGeom prst="rect">
+            <a:avLst/>
+          </a:prstGeom>
+          <a:noFill/>
+        </p:spPr>
+        <p:txBody>
+          <a:bodyPr wrap="square" lIns="0" rIns="0" tIns="0" bIns="0">
+            <a:spAutoFit/>
+          </a:bodyPr>
+          <a:lstStyle/>
+          <a:p>
+            <a:pPr algn="l">
+              <a:lnSpc>
+                <a:spcPct val="100000"/>
+              </a:lnSpc>
+              <a:defRPr sz="1150" b="1">
+                <a:solidFill>
+                  <a:srgbClr val="7B1E22"/>
+                </a:solidFill>
+                <a:latin typeface="Segoe UI"/>
+              </a:defRPr>
+            </a:pPr>
+            <a:r>
+              <a:t>LIMITATIONS</a:t>
             </a:r>
           </a:p>
         </p:txBody>
@@ -3437,164 +3402,386 @@
         </p:nvSpPr>
         <p:spPr>
           <a:xfrm>
-            <a:off x="731520" y="1371600"/>
-            <a:ext cx="5212080" cy="3657600"/>
-          </a:xfrm>
-          <a:prstGeom prst="rect">
-            <a:avLst/>
-          </a:prstGeom>
-          <a:noFill/>
-        </p:spPr>
-        <p:txBody>
-          <a:bodyPr wrap="none">
-            <a:spAutoFit/>
-          </a:bodyPr>
-          <a:lstStyle/>
-          <a:p>
-            <a:pPr>
-              <a:spcAft>
-                <a:spcPts val="1000"/>
-              </a:spcAft>
-              <a:defRPr sz="2100">
-                <a:solidFill>
-                  <a:srgbClr val="0F172A"/>
-                </a:solidFill>
-              </a:defRPr>
-            </a:pPr>
-            <a:r>
-              <a:t>Small businesses need support for research, pricing, stock, marketing, customer communication, and delivery.</a:t>
-            </a:r>
-          </a:p>
-          <a:p>
-            <a:pPr>
-              <a:spcAft>
-                <a:spcPts val="1000"/>
-              </a:spcAft>
-              <a:defRPr sz="2100">
-                <a:solidFill>
-                  <a:srgbClr val="0F172A"/>
-                </a:solidFill>
-              </a:defRPr>
-            </a:pPr>
-            <a:r>
-              <a:t>Single-chatbot tools cannot coordinate end-to-end decisions across multiple tasks.</a:t>
-            </a:r>
-          </a:p>
-          <a:p>
-            <a:pPr>
-              <a:spcAft>
-                <a:spcPts val="1000"/>
-              </a:spcAft>
-              <a:defRPr sz="2100">
-                <a:solidFill>
-                  <a:srgbClr val="0F172A"/>
-                </a:solidFill>
-              </a:defRPr>
-            </a:pPr>
-            <a:r>
-              <a:t>A real business system must reason, act, and wait for approval before spending money or publishing content.</a:t>
-            </a:r>
-          </a:p>
-          <a:p>
-            <a:pPr>
-              <a:spcAft>
-                <a:spcPts val="1000"/>
-              </a:spcAft>
-              <a:defRPr sz="2100">
-                <a:solidFill>
-                  <a:srgbClr val="0F172A"/>
-                </a:solidFill>
-              </a:defRPr>
-            </a:pPr>
-            <a:r>
-              <a:t>The system must be explainable, traceable, and grounded in shared memory.</a:t>
-            </a:r>
-          </a:p>
-        </p:txBody>
-      </p:sp>
-      <p:sp>
-        <p:nvSpPr>
-          <p:cNvPr id="4" name="Rectangle 3"/>
-          <p:cNvSpPr/>
-          <p:nvPr/>
-        </p:nvSpPr>
-        <p:spPr>
-          <a:xfrm>
-            <a:off x="6400800" y="1828800"/>
-            <a:ext cx="4846320" cy="2560320"/>
-          </a:xfrm>
-          <a:prstGeom prst="rect">
-            <a:avLst/>
-          </a:prstGeom>
-          <a:solidFill>
-            <a:srgbClr val="E0F2FE"/>
-          </a:solidFill>
-          <a:ln w="15240">
+            <a:off x="777240" y="868680"/>
+            <a:ext cx="10607040" cy="731520"/>
+          </a:xfrm>
+          <a:prstGeom prst="rect">
+            <a:avLst/>
+          </a:prstGeom>
+          <a:noFill/>
+        </p:spPr>
+        <p:txBody>
+          <a:bodyPr wrap="square" lIns="0" rIns="0" tIns="0" bIns="0">
+            <a:spAutoFit/>
+          </a:bodyPr>
+          <a:lstStyle/>
+          <a:p>
+            <a:pPr algn="l">
+              <a:lnSpc>
+                <a:spcPct val="100000"/>
+              </a:lnSpc>
+              <a:defRPr sz="3100" b="1">
+                <a:solidFill>
+                  <a:srgbClr val="000000"/>
+                </a:solidFill>
+                <a:latin typeface="Segoe UI"/>
+              </a:defRPr>
+            </a:pPr>
+            <a:r>
+              <a:t>What is honest about the current state</a:t>
+            </a:r>
+          </a:p>
+        </p:txBody>
+      </p:sp>
+      <p:cxnSp>
+        <p:nvCxnSpPr>
+          <p:cNvPr id="4" name="Connector 3"/>
+          <p:cNvCxnSpPr/>
+          <p:nvPr/>
+        </p:nvCxnSpPr>
+        <p:spPr>
+          <a:xfrm>
+            <a:off x="777240" y="1572768"/>
+            <a:ext cx="10607040" cy="0"/>
+          </a:xfrm>
+          <a:prstGeom prst="line">
+            <a:avLst/>
+          </a:prstGeom>
+          <a:ln w="12700">
             <a:solidFill>
-              <a:srgbClr val="2563EB"/>
+              <a:srgbClr val="E4E4E7"/>
             </a:solidFill>
           </a:ln>
         </p:spPr>
         <p:style>
-          <a:lnRef idx="1">
+          <a:lnRef idx="2">
             <a:schemeClr val="accent1"/>
           </a:lnRef>
-          <a:fillRef idx="3">
+          <a:fillRef idx="0">
             <a:schemeClr val="accent1"/>
           </a:fillRef>
-          <a:effectRef idx="2">
+          <a:effectRef idx="1">
             <a:schemeClr val="accent1"/>
           </a:effectRef>
           <a:fontRef idx="minor">
-            <a:schemeClr val="lt1"/>
+            <a:schemeClr val="tx1"/>
           </a:fontRef>
         </p:style>
-        <p:txBody>
-          <a:bodyPr wrap="square" lIns="274320" rIns="274320" rtlCol="0" anchor="ctr"/>
-          <a:lstStyle/>
-          <a:p>
-            <a:pPr algn="ctr">
-              <a:spcAft>
-                <a:spcPts val="1000"/>
-              </a:spcAft>
-              <a:defRPr sz="2400" b="1">
-                <a:solidFill>
-                  <a:srgbClr val="0F172A"/>
-                </a:solidFill>
-              </a:defRPr>
-            </a:pPr>
-            <a:r>
-              <a:t>Business workflow automation</a:t>
-            </a:r>
-          </a:p>
+      </p:cxnSp>
+      <p:sp>
+        <p:nvSpPr>
+          <p:cNvPr id="5" name="TextBox 4"/>
+          <p:cNvSpPr txBox="1"/>
+          <p:nvPr/>
+        </p:nvSpPr>
+        <p:spPr>
+          <a:xfrm>
+            <a:off x="777240" y="2011680"/>
+            <a:ext cx="10607040" cy="786384"/>
+          </a:xfrm>
+          <a:prstGeom prst="rect">
+            <a:avLst/>
+          </a:prstGeom>
+          <a:noFill/>
+        </p:spPr>
+        <p:txBody>
+          <a:bodyPr wrap="square" lIns="0" tIns="0" bIns="0">
+            <a:spAutoFit/>
+          </a:bodyPr>
+          <a:lstStyle/>
           <a:p>
             <a:pPr>
-              <a:spcAft>
-                <a:spcPts val="1000"/>
-              </a:spcAft>
-              <a:defRPr sz="1800" b="0">
-                <a:solidFill>
-                  <a:srgbClr val="0F172A"/>
-                </a:solidFill>
-              </a:defRPr>
-            </a:pPr>
-            <a:r>
-              <a:t>Research → pricing → stock → marketing → delivery</a:t>
-            </a:r>
-          </a:p>
+              <a:lnSpc>
+                <a:spcPct val="125000"/>
+              </a:lnSpc>
+            </a:pPr>
+            <a:r>
+              <a:rPr sz="1400" b="1">
+                <a:solidFill>
+                  <a:srgbClr val="000000"/>
+                </a:solidFill>
+                <a:latin typeface="Segoe UI"/>
+              </a:rPr>
+              <a:t>Social publishing needs Meta App Review</a:t>
+            </a:r>
+            <a:r>
+              <a:rPr sz="1400">
+                <a:solidFill>
+                  <a:srgbClr val="3F3F46"/>
+                </a:solidFill>
+                <a:latin typeface="Segoe UI"/>
+              </a:rPr>
+              <a:t> — the code path is complete and tested; a live Page post needs permissions Meta grants slowly.</a:t>
+            </a:r>
+          </a:p>
+        </p:txBody>
+      </p:sp>
+      <p:sp>
+        <p:nvSpPr>
+          <p:cNvPr id="6" name="TextBox 5"/>
+          <p:cNvSpPr txBox="1"/>
+          <p:nvPr/>
+        </p:nvSpPr>
+        <p:spPr>
+          <a:xfrm>
+            <a:off x="777240" y="2798064"/>
+            <a:ext cx="10607040" cy="786384"/>
+          </a:xfrm>
+          <a:prstGeom prst="rect">
+            <a:avLst/>
+          </a:prstGeom>
+          <a:noFill/>
+        </p:spPr>
+        <p:txBody>
+          <a:bodyPr wrap="square" lIns="0" tIns="0" bIns="0">
+            <a:spAutoFit/>
+          </a:bodyPr>
+          <a:lstStyle/>
           <a:p>
             <a:pPr>
-              <a:spcAft>
-                <a:spcPts val="1000"/>
-              </a:spcAft>
-              <a:defRPr sz="1800" b="0">
-                <a:solidFill>
-                  <a:srgbClr val="0F172A"/>
-                </a:solidFill>
-              </a:defRPr>
-            </a:pPr>
-            <a:r>
-              <a:t>One supervisor, many specialists</a:t>
+              <a:lnSpc>
+                <a:spcPct val="125000"/>
+              </a:lnSpc>
+            </a:pPr>
+            <a:r>
+              <a:rPr sz="1400" b="1">
+                <a:solidFill>
+                  <a:srgbClr val="000000"/>
+                </a:solidFill>
+                <a:latin typeface="Segoe UI"/>
+              </a:rPr>
+              <a:t>The vector store is a small numpy index, not Chroma</a:t>
+            </a:r>
+            <a:r>
+              <a:rPr sz="1400">
+                <a:solidFill>
+                  <a:srgbClr val="3F3F46"/>
+                </a:solidFill>
+                <a:latin typeface="Segoe UI"/>
+              </a:rPr>
+              <a:t> — enough for one shop's memory, and it keeps the deployment small. Chroma is a one-line swap.</a:t>
+            </a:r>
+          </a:p>
+        </p:txBody>
+      </p:sp>
+      <p:sp>
+        <p:nvSpPr>
+          <p:cNvPr id="7" name="TextBox 6"/>
+          <p:cNvSpPr txBox="1"/>
+          <p:nvPr/>
+        </p:nvSpPr>
+        <p:spPr>
+          <a:xfrm>
+            <a:off x="777240" y="3584448"/>
+            <a:ext cx="10607040" cy="786384"/>
+          </a:xfrm>
+          <a:prstGeom prst="rect">
+            <a:avLst/>
+          </a:prstGeom>
+          <a:noFill/>
+        </p:spPr>
+        <p:txBody>
+          <a:bodyPr wrap="square" lIns="0" tIns="0" bIns="0">
+            <a:spAutoFit/>
+          </a:bodyPr>
+          <a:lstStyle/>
+          <a:p>
+            <a:pPr>
+              <a:lnSpc>
+                <a:spcPct val="125000"/>
+              </a:lnSpc>
+            </a:pPr>
+            <a:r>
+              <a:rPr sz="1400" b="1">
+                <a:solidFill>
+                  <a:srgbClr val="000000"/>
+                </a:solidFill>
+                <a:latin typeface="Segoe UI"/>
+              </a:rPr>
+              <a:t>One worker, deliberately</a:t>
+            </a:r>
+            <a:r>
+              <a:rPr sz="1400">
+                <a:solidFill>
+                  <a:srgbClr val="3F3F46"/>
+                </a:solidFill>
+                <a:latin typeface="Segoe UI"/>
+              </a:rPr>
+              <a:t> — the approval gates live in process memory, so a second worker could hand one owner two sessions.</a:t>
+            </a:r>
+          </a:p>
+        </p:txBody>
+      </p:sp>
+      <p:sp>
+        <p:nvSpPr>
+          <p:cNvPr id="8" name="TextBox 7"/>
+          <p:cNvSpPr txBox="1"/>
+          <p:nvPr/>
+        </p:nvSpPr>
+        <p:spPr>
+          <a:xfrm>
+            <a:off x="777240" y="4370832"/>
+            <a:ext cx="10607040" cy="786384"/>
+          </a:xfrm>
+          <a:prstGeom prst="rect">
+            <a:avLst/>
+          </a:prstGeom>
+          <a:noFill/>
+        </p:spPr>
+        <p:txBody>
+          <a:bodyPr wrap="square" lIns="0" tIns="0" bIns="0">
+            <a:spAutoFit/>
+          </a:bodyPr>
+          <a:lstStyle/>
+          <a:p>
+            <a:pPr>
+              <a:lnSpc>
+                <a:spcPct val="125000"/>
+              </a:lnSpc>
+            </a:pPr>
+            <a:r>
+              <a:rPr sz="1400" b="1">
+                <a:solidFill>
+                  <a:srgbClr val="000000"/>
+                </a:solidFill>
+                <a:latin typeface="Segoe UI"/>
+              </a:rPr>
+              <a:t>The free model tier has a daily cap</a:t>
+            </a:r>
+            <a:r>
+              <a:rPr sz="1400">
+                <a:solidFill>
+                  <a:srgbClr val="3F3F46"/>
+                </a:solidFill>
+                <a:latin typeface="Segoe UI"/>
+              </a:rPr>
+              <a:t> — there is a provider fallback chain, but a heavy day can exhaust it.</a:t>
+            </a:r>
+          </a:p>
+        </p:txBody>
+      </p:sp>
+      <p:sp>
+        <p:nvSpPr>
+          <p:cNvPr id="9" name="TextBox 8"/>
+          <p:cNvSpPr txBox="1"/>
+          <p:nvPr/>
+        </p:nvSpPr>
+        <p:spPr>
+          <a:xfrm>
+            <a:off x="777240" y="5157216"/>
+            <a:ext cx="10607040" cy="786384"/>
+          </a:xfrm>
+          <a:prstGeom prst="rect">
+            <a:avLst/>
+          </a:prstGeom>
+          <a:noFill/>
+        </p:spPr>
+        <p:txBody>
+          <a:bodyPr wrap="square" lIns="0" tIns="0" bIns="0">
+            <a:spAutoFit/>
+          </a:bodyPr>
+          <a:lstStyle/>
+          <a:p>
+            <a:pPr>
+              <a:lnSpc>
+                <a:spcPct val="125000"/>
+              </a:lnSpc>
+            </a:pPr>
+            <a:r>
+              <a:rPr sz="1400" b="1">
+                <a:solidFill>
+                  <a:srgbClr val="000000"/>
+                </a:solidFill>
+                <a:latin typeface="Segoe UI"/>
+              </a:rPr>
+              <a:t>Simulated where unconfigured</a:t>
+            </a:r>
+            <a:r>
+              <a:rPr sz="1400">
+                <a:solidFill>
+                  <a:srgbClr val="3F3F46"/>
+                </a:solidFill>
+                <a:latin typeface="Segoe UI"/>
+              </a:rPr>
+              <a:t> — every simulated result is labelled as one, in the UI and in the logs. Nothing pretends to be live.</a:t>
+            </a:r>
+          </a:p>
+        </p:txBody>
+      </p:sp>
+      <p:sp>
+        <p:nvSpPr>
+          <p:cNvPr id="10" name="TextBox 9"/>
+          <p:cNvSpPr txBox="1"/>
+          <p:nvPr/>
+        </p:nvSpPr>
+        <p:spPr>
+          <a:xfrm>
+            <a:off x="777240" y="6327648"/>
+            <a:ext cx="2743200" cy="274320"/>
+          </a:xfrm>
+          <a:prstGeom prst="rect">
+            <a:avLst/>
+          </a:prstGeom>
+          <a:noFill/>
+        </p:spPr>
+        <p:txBody>
+          <a:bodyPr wrap="square" lIns="0" rIns="0" tIns="0" bIns="0">
+            <a:spAutoFit/>
+          </a:bodyPr>
+          <a:lstStyle/>
+          <a:p>
+            <a:pPr algn="l">
+              <a:lnSpc>
+                <a:spcPct val="100000"/>
+              </a:lnSpc>
+              <a:defRPr sz="1050" b="0">
+                <a:solidFill>
+                  <a:srgbClr val="A1A1AA"/>
+                </a:solidFill>
+                <a:latin typeface="Segoe UI"/>
+              </a:defRPr>
+            </a:pPr>
+            <a:r>
+              <a:t>Lucida</a:t>
+            </a:r>
+          </a:p>
+        </p:txBody>
+      </p:sp>
+      <p:sp>
+        <p:nvSpPr>
+          <p:cNvPr id="11" name="TextBox 10"/>
+          <p:cNvSpPr txBox="1"/>
+          <p:nvPr/>
+        </p:nvSpPr>
+        <p:spPr>
+          <a:xfrm>
+            <a:off x="11064240" y="6327648"/>
+            <a:ext cx="365760" cy="274320"/>
+          </a:xfrm>
+          <a:prstGeom prst="rect">
+            <a:avLst/>
+          </a:prstGeom>
+          <a:noFill/>
+        </p:spPr>
+        <p:txBody>
+          <a:bodyPr wrap="square" lIns="0" rIns="0" tIns="0" bIns="0">
+            <a:spAutoFit/>
+          </a:bodyPr>
+          <a:lstStyle/>
+          <a:p>
+            <a:pPr algn="r">
+              <a:lnSpc>
+                <a:spcPct val="100000"/>
+              </a:lnSpc>
+              <a:defRPr sz="1050" b="0">
+                <a:solidFill>
+                  <a:srgbClr val="A1A1AA"/>
+                </a:solidFill>
+                <a:latin typeface="Segoe UI"/>
+              </a:defRPr>
+            </a:pPr>
+            <a:r>
+              <a:t>10</a:t>
             </a:r>
           </a:p>
         </p:txBody>
@@ -3607,13 +3794,13 @@
 </p:sld>
 </file>
 
-<file path=ppt/slides/slide3.xml><?xml version="1.0" encoding="utf-8"?>
-<p:sld xmlns:a="http://schemas.openxmlformats.org/drawingml/2006/main" xmlns:r="http://schemas.openxmlformats.org/officeDocument/2006/relationships" xmlns:p="http://schemas.openxmlformats.org/presentationml/2006/main">
+<file path=ppt/slides/slide11.xml><?xml version="1.0" encoding="utf-8"?>
+<p:sld xmlns:a="http://schemas.openxmlformats.org/drawingml/2006/main" xmlns:p="http://schemas.openxmlformats.org/presentationml/2006/main" xmlns:r="http://schemas.openxmlformats.org/officeDocument/2006/relationships">
   <p:cSld>
     <p:bg>
       <p:bgPr>
         <a:solidFill>
-          <a:srgbClr val="0F172A"/>
+          <a:srgbClr val="000000"/>
         </a:solidFill>
         <a:effectLst/>
       </p:bgPr>
@@ -3624,14 +3811,7 @@
         <p:cNvGrpSpPr/>
         <p:nvPr/>
       </p:nvGrpSpPr>
-      <p:grpSpPr>
-        <a:xfrm>
-          <a:off x="0" y="0"/>
-          <a:ext cx="0" cy="0"/>
-          <a:chOff x="0" y="0"/>
-          <a:chExt cx="0" cy="0"/>
-        </a:xfrm>
-      </p:grpSpPr>
+      <p:grpSpPr/>
       <p:sp>
         <p:nvSpPr>
           <p:cNvPr id="2" name="TextBox 1"/>
@@ -3640,193 +3820,419 @@
         </p:nvSpPr>
         <p:spPr>
           <a:xfrm>
-            <a:off x="548640" y="457200"/>
-            <a:ext cx="7315200" cy="640080"/>
-          </a:xfrm>
-          <a:prstGeom prst="rect">
-            <a:avLst/>
-          </a:prstGeom>
-          <a:noFill/>
-        </p:spPr>
-        <p:txBody>
-          <a:bodyPr wrap="none">
-            <a:spAutoFit/>
-          </a:bodyPr>
-          <a:lstStyle/>
-          <a:p>
-            <a:pPr>
-              <a:defRPr sz="2800" b="1">
+            <a:off x="868680" y="1417320"/>
+            <a:ext cx="7315200" cy="731520"/>
+          </a:xfrm>
+          <a:prstGeom prst="rect">
+            <a:avLst/>
+          </a:prstGeom>
+          <a:noFill/>
+        </p:spPr>
+        <p:txBody>
+          <a:bodyPr wrap="square" lIns="0" rIns="0" tIns="0" bIns="0">
+            <a:spAutoFit/>
+          </a:bodyPr>
+          <a:lstStyle/>
+          <a:p>
+            <a:pPr algn="l">
+              <a:lnSpc>
+                <a:spcPct val="100000"/>
+              </a:lnSpc>
+              <a:defRPr sz="3800" b="1">
                 <a:solidFill>
                   <a:srgbClr val="FFFFFF"/>
                 </a:solidFill>
-              </a:defRPr>
-            </a:pPr>
-            <a:r>
-              <a:t>System Architecture</a:t>
-            </a:r>
-          </a:p>
-        </p:txBody>
-      </p:sp>
-      <p:sp>
-        <p:nvSpPr>
-          <p:cNvPr id="3" name="Rectangle 2"/>
-          <p:cNvSpPr/>
-          <p:nvPr/>
-        </p:nvSpPr>
-        <p:spPr>
-          <a:xfrm>
-            <a:off x="822960" y="1463040"/>
-            <a:ext cx="10607040" cy="4114800"/>
-          </a:xfrm>
-          <a:prstGeom prst="rect">
-            <a:avLst/>
-          </a:prstGeom>
-          <a:solidFill>
-            <a:srgbClr val="111827"/>
-          </a:solidFill>
-          <a:ln w="15240">
+                <a:latin typeface="Segoe UI"/>
+              </a:defRPr>
+            </a:pPr>
+            <a:r>
+              <a:t>Check it yourself</a:t>
+            </a:r>
+          </a:p>
+        </p:txBody>
+      </p:sp>
+      <p:cxnSp>
+        <p:nvCxnSpPr>
+          <p:cNvPr id="3" name="Connector 2"/>
+          <p:cNvCxnSpPr/>
+          <p:nvPr/>
+        </p:nvCxnSpPr>
+        <p:spPr>
+          <a:xfrm>
+            <a:off x="868680" y="2377440"/>
+            <a:ext cx="2926080" cy="0"/>
+          </a:xfrm>
+          <a:prstGeom prst="line">
+            <a:avLst/>
+          </a:prstGeom>
+          <a:ln w="12700">
             <a:solidFill>
-              <a:srgbClr val="14B8A6"/>
+              <a:srgbClr val="7B1E22"/>
             </a:solidFill>
           </a:ln>
         </p:spPr>
         <p:style>
-          <a:lnRef idx="1">
+          <a:lnRef idx="2">
             <a:schemeClr val="accent1"/>
           </a:lnRef>
-          <a:fillRef idx="3">
+          <a:fillRef idx="0">
             <a:schemeClr val="accent1"/>
           </a:fillRef>
-          <a:effectRef idx="2">
+          <a:effectRef idx="1">
             <a:schemeClr val="accent1"/>
           </a:effectRef>
           <a:fontRef idx="minor">
-            <a:schemeClr val="lt1"/>
+            <a:schemeClr val="tx1"/>
           </a:fontRef>
         </p:style>
-        <p:txBody>
-          <a:bodyPr rtlCol="0" anchor="ctr"/>
-          <a:lstStyle/>
-          <a:p>
-            <a:pPr>
-              <a:defRPr sz="1900" b="1">
+      </p:cxnSp>
+      <p:sp>
+        <p:nvSpPr>
+          <p:cNvPr id="4" name="TextBox 3"/>
+          <p:cNvSpPr txBox="1"/>
+          <p:nvPr/>
+        </p:nvSpPr>
+        <p:spPr>
+          <a:xfrm>
+            <a:off x="868680" y="2788920"/>
+            <a:ext cx="4754880" cy="365760"/>
+          </a:xfrm>
+          <a:prstGeom prst="rect">
+            <a:avLst/>
+          </a:prstGeom>
+          <a:noFill/>
+        </p:spPr>
+        <p:txBody>
+          <a:bodyPr wrap="square" lIns="0" rIns="0" tIns="0" bIns="0">
+            <a:spAutoFit/>
+          </a:bodyPr>
+          <a:lstStyle/>
+          <a:p>
+            <a:pPr algn="l">
+              <a:lnSpc>
+                <a:spcPct val="100000"/>
+              </a:lnSpc>
+              <a:defRPr sz="1500" b="0">
                 <a:solidFill>
                   <a:srgbClr val="FFFFFF"/>
                 </a:solidFill>
-              </a:defRPr>
-            </a:pPr>
-            <a:r>
-              <a:t>Owner Request</a:t>
-            </a:r>
-          </a:p>
-          <a:p>
-            <a:pPr algn="ctr">
-              <a:defRPr sz="1500">
+                <a:latin typeface="Consolas"/>
+              </a:defRPr>
+            </a:pPr>
+            <a:r>
+              <a:t>python serve.py</a:t>
+            </a:r>
+          </a:p>
+        </p:txBody>
+      </p:sp>
+      <p:sp>
+        <p:nvSpPr>
+          <p:cNvPr id="5" name="TextBox 4"/>
+          <p:cNvSpPr txBox="1"/>
+          <p:nvPr/>
+        </p:nvSpPr>
+        <p:spPr>
+          <a:xfrm>
+            <a:off x="5943600" y="2825496"/>
+            <a:ext cx="5486400" cy="365760"/>
+          </a:xfrm>
+          <a:prstGeom prst="rect">
+            <a:avLst/>
+          </a:prstGeom>
+          <a:noFill/>
+        </p:spPr>
+        <p:txBody>
+          <a:bodyPr wrap="square" lIns="0" rIns="0" tIns="0" bIns="0">
+            <a:spAutoFit/>
+          </a:bodyPr>
+          <a:lstStyle/>
+          <a:p>
+            <a:pPr algn="l">
+              <a:lnSpc>
+                <a:spcPct val="100000"/>
+              </a:lnSpc>
+              <a:defRPr sz="1300" b="0">
+                <a:solidFill>
+                  <a:srgbClr val="8A8A92"/>
+                </a:solidFill>
+                <a:latin typeface="Segoe UI"/>
+              </a:defRPr>
+            </a:pPr>
+            <a:r>
+              <a:t>the app, at 127.0.0.1:8000</a:t>
+            </a:r>
+          </a:p>
+        </p:txBody>
+      </p:sp>
+      <p:sp>
+        <p:nvSpPr>
+          <p:cNvPr id="6" name="TextBox 5"/>
+          <p:cNvSpPr txBox="1"/>
+          <p:nvPr/>
+        </p:nvSpPr>
+        <p:spPr>
+          <a:xfrm>
+            <a:off x="868680" y="3447287"/>
+            <a:ext cx="4754880" cy="365760"/>
+          </a:xfrm>
+          <a:prstGeom prst="rect">
+            <a:avLst/>
+          </a:prstGeom>
+          <a:noFill/>
+        </p:spPr>
+        <p:txBody>
+          <a:bodyPr wrap="square" lIns="0" rIns="0" tIns="0" bIns="0">
+            <a:spAutoFit/>
+          </a:bodyPr>
+          <a:lstStyle/>
+          <a:p>
+            <a:pPr algn="l">
+              <a:lnSpc>
+                <a:spcPct val="100000"/>
+              </a:lnSpc>
+              <a:defRPr sz="1500" b="0">
                 <a:solidFill>
                   <a:srgbClr val="FFFFFF"/>
                 </a:solidFill>
-              </a:defRPr>
-            </a:pPr>
-            <a:endParaRPr/>
-          </a:p>
-          <a:p>
-            <a:pPr algn="ctr">
-              <a:defRPr sz="1500">
+                <a:latin typeface="Consolas"/>
+              </a:defRPr>
+            </a:pPr>
+            <a:r>
+              <a:t>python -m pytest tests -q</a:t>
+            </a:r>
+          </a:p>
+        </p:txBody>
+      </p:sp>
+      <p:sp>
+        <p:nvSpPr>
+          <p:cNvPr id="7" name="TextBox 6"/>
+          <p:cNvSpPr txBox="1"/>
+          <p:nvPr/>
+        </p:nvSpPr>
+        <p:spPr>
+          <a:xfrm>
+            <a:off x="5943600" y="3483863"/>
+            <a:ext cx="5486400" cy="365760"/>
+          </a:xfrm>
+          <a:prstGeom prst="rect">
+            <a:avLst/>
+          </a:prstGeom>
+          <a:noFill/>
+        </p:spPr>
+        <p:txBody>
+          <a:bodyPr wrap="square" lIns="0" rIns="0" tIns="0" bIns="0">
+            <a:spAutoFit/>
+          </a:bodyPr>
+          <a:lstStyle/>
+          <a:p>
+            <a:pPr algn="l">
+              <a:lnSpc>
+                <a:spcPct val="100000"/>
+              </a:lnSpc>
+              <a:defRPr sz="1300" b="0">
+                <a:solidFill>
+                  <a:srgbClr val="8A8A92"/>
+                </a:solidFill>
+                <a:latin typeface="Segoe UI"/>
+              </a:defRPr>
+            </a:pPr>
+            <a:r>
+              <a:t>87 passed, no API key needed</a:t>
+            </a:r>
+          </a:p>
+        </p:txBody>
+      </p:sp>
+      <p:sp>
+        <p:nvSpPr>
+          <p:cNvPr id="8" name="TextBox 7"/>
+          <p:cNvSpPr txBox="1"/>
+          <p:nvPr/>
+        </p:nvSpPr>
+        <p:spPr>
+          <a:xfrm>
+            <a:off x="868680" y="4105656"/>
+            <a:ext cx="4754880" cy="365760"/>
+          </a:xfrm>
+          <a:prstGeom prst="rect">
+            <a:avLst/>
+          </a:prstGeom>
+          <a:noFill/>
+        </p:spPr>
+        <p:txBody>
+          <a:bodyPr wrap="square" lIns="0" rIns="0" tIns="0" bIns="0">
+            <a:spAutoFit/>
+          </a:bodyPr>
+          <a:lstStyle/>
+          <a:p>
+            <a:pPr algn="l">
+              <a:lnSpc>
+                <a:spcPct val="100000"/>
+              </a:lnSpc>
+              <a:defRPr sz="1500" b="0">
                 <a:solidFill>
                   <a:srgbClr val="FFFFFF"/>
                 </a:solidFill>
-              </a:defRPr>
-            </a:pPr>
-            <a:r>
-              <a:t>Supervisor Agent</a:t>
-            </a:r>
-          </a:p>
-          <a:p>
-            <a:pPr algn="ctr">
-              <a:defRPr sz="1500">
+                <a:latin typeface="Consolas"/>
+              </a:defRPr>
+            </a:pPr>
+            <a:r>
+              <a:t>git shortlog -sn</a:t>
+            </a:r>
+          </a:p>
+        </p:txBody>
+      </p:sp>
+      <p:sp>
+        <p:nvSpPr>
+          <p:cNvPr id="9" name="TextBox 8"/>
+          <p:cNvSpPr txBox="1"/>
+          <p:nvPr/>
+        </p:nvSpPr>
+        <p:spPr>
+          <a:xfrm>
+            <a:off x="5943600" y="4142232"/>
+            <a:ext cx="5486400" cy="365760"/>
+          </a:xfrm>
+          <a:prstGeom prst="rect">
+            <a:avLst/>
+          </a:prstGeom>
+          <a:noFill/>
+        </p:spPr>
+        <p:txBody>
+          <a:bodyPr wrap="square" lIns="0" rIns="0" tIns="0" bIns="0">
+            <a:spAutoFit/>
+          </a:bodyPr>
+          <a:lstStyle/>
+          <a:p>
+            <a:pPr algn="l">
+              <a:lnSpc>
+                <a:spcPct val="100000"/>
+              </a:lnSpc>
+              <a:defRPr sz="1300" b="0">
+                <a:solidFill>
+                  <a:srgbClr val="8A8A92"/>
+                </a:solidFill>
+                <a:latin typeface="Segoe UI"/>
+              </a:defRPr>
+            </a:pPr>
+            <a:r>
+              <a:t>one author, every commit</a:t>
+            </a:r>
+          </a:p>
+        </p:txBody>
+      </p:sp>
+      <p:sp>
+        <p:nvSpPr>
+          <p:cNvPr id="10" name="TextBox 9"/>
+          <p:cNvSpPr txBox="1"/>
+          <p:nvPr/>
+        </p:nvSpPr>
+        <p:spPr>
+          <a:xfrm>
+            <a:off x="868680" y="4764024"/>
+            <a:ext cx="4754880" cy="365760"/>
+          </a:xfrm>
+          <a:prstGeom prst="rect">
+            <a:avLst/>
+          </a:prstGeom>
+          <a:noFill/>
+        </p:spPr>
+        <p:txBody>
+          <a:bodyPr wrap="square" lIns="0" rIns="0" tIns="0" bIns="0">
+            <a:spAutoFit/>
+          </a:bodyPr>
+          <a:lstStyle/>
+          <a:p>
+            <a:pPr algn="l">
+              <a:lnSpc>
+                <a:spcPct val="100000"/>
+              </a:lnSpc>
+              <a:defRPr sz="1500" b="0">
                 <a:solidFill>
                   <a:srgbClr val="FFFFFF"/>
                 </a:solidFill>
-              </a:defRPr>
-            </a:pPr>
-            <a:endParaRPr/>
-          </a:p>
-          <a:p>
-            <a:pPr algn="ctr">
-              <a:defRPr sz="1500">
-                <a:solidFill>
-                  <a:srgbClr val="FFFFFF"/>
-                </a:solidFill>
-              </a:defRPr>
-            </a:pPr>
-            <a:r>
-              <a:t>Market Research | Product Vision | Pricing | Inventory</a:t>
-            </a:r>
-          </a:p>
-          <a:p>
-            <a:pPr algn="ctr">
-              <a:defRPr sz="1500">
-                <a:solidFill>
-                  <a:srgbClr val="FFFFFF"/>
-                </a:solidFill>
-              </a:defRPr>
-            </a:pPr>
-            <a:endParaRPr/>
-          </a:p>
-          <a:p>
-            <a:pPr algn="ctr">
-              <a:defRPr sz="1500">
-                <a:solidFill>
-                  <a:srgbClr val="FFFFFF"/>
-                </a:solidFill>
-              </a:defRPr>
-            </a:pPr>
-            <a:r>
-              <a:t>Ad Creative | Customer Engagement | Delivery | Reporting</a:t>
-            </a:r>
-          </a:p>
-          <a:p>
-            <a:pPr algn="ctr">
-              <a:defRPr sz="1500">
-                <a:solidFill>
-                  <a:srgbClr val="FFFFFF"/>
-                </a:solidFill>
-              </a:defRPr>
-            </a:pPr>
-            <a:endParaRPr/>
-          </a:p>
-          <a:p>
-            <a:pPr algn="ctr">
-              <a:defRPr sz="1500">
-                <a:solidFill>
-                  <a:srgbClr val="FFFFFF"/>
-                </a:solidFill>
-              </a:defRPr>
-            </a:pPr>
-            <a:r>
-              <a:t>Shared Memory + Vector Store + SQLite + Logging</a:t>
-            </a:r>
-          </a:p>
-          <a:p>
-            <a:pPr algn="ctr">
-              <a:defRPr sz="1500">
-                <a:solidFill>
-                  <a:srgbClr val="FFFFFF"/>
-                </a:solidFill>
-              </a:defRPr>
-            </a:pPr>
-            <a:endParaRPr/>
-          </a:p>
-          <a:p>
-            <a:pPr algn="ctr">
-              <a:defRPr sz="1500">
-                <a:solidFill>
-                  <a:srgbClr val="FFFFFF"/>
-                </a:solidFill>
-              </a:defRPr>
-            </a:pPr>
-            <a:r>
-              <a:t>Final Business Recommendation</a:t>
+                <a:latin typeface="Consolas"/>
+              </a:defRPr>
+            </a:pPr>
+            <a:r>
+              <a:t>GET /api/graph</a:t>
+            </a:r>
+          </a:p>
+        </p:txBody>
+      </p:sp>
+      <p:sp>
+        <p:nvSpPr>
+          <p:cNvPr id="11" name="TextBox 10"/>
+          <p:cNvSpPr txBox="1"/>
+          <p:nvPr/>
+        </p:nvSpPr>
+        <p:spPr>
+          <a:xfrm>
+            <a:off x="5943600" y="4800600"/>
+            <a:ext cx="5486400" cy="365760"/>
+          </a:xfrm>
+          <a:prstGeom prst="rect">
+            <a:avLst/>
+          </a:prstGeom>
+          <a:noFill/>
+        </p:spPr>
+        <p:txBody>
+          <a:bodyPr wrap="square" lIns="0" rIns="0" tIns="0" bIns="0">
+            <a:spAutoFit/>
+          </a:bodyPr>
+          <a:lstStyle/>
+          <a:p>
+            <a:pPr algn="l">
+              <a:lnSpc>
+                <a:spcPct val="100000"/>
+              </a:lnSpc>
+              <a:defRPr sz="1300" b="0">
+                <a:solidFill>
+                  <a:srgbClr val="8A8A92"/>
+                </a:solidFill>
+                <a:latin typeface="Segoe UI"/>
+              </a:defRPr>
+            </a:pPr>
+            <a:r>
+              <a:t>the live topology, from the compiled graph</a:t>
+            </a:r>
+          </a:p>
+        </p:txBody>
+      </p:sp>
+      <p:sp>
+        <p:nvSpPr>
+          <p:cNvPr id="12" name="TextBox 11"/>
+          <p:cNvSpPr txBox="1"/>
+          <p:nvPr/>
+        </p:nvSpPr>
+        <p:spPr>
+          <a:xfrm>
+            <a:off x="868680" y="5806440"/>
+            <a:ext cx="10515600" cy="365760"/>
+          </a:xfrm>
+          <a:prstGeom prst="rect">
+            <a:avLst/>
+          </a:prstGeom>
+          <a:noFill/>
+        </p:spPr>
+        <p:txBody>
+          <a:bodyPr wrap="square" lIns="0" rIns="0" tIns="0" bIns="0">
+            <a:spAutoFit/>
+          </a:bodyPr>
+          <a:lstStyle/>
+          <a:p>
+            <a:pPr algn="l">
+              <a:lnSpc>
+                <a:spcPct val="100000"/>
+              </a:lnSpc>
+              <a:defRPr sz="1200" b="0">
+                <a:solidFill>
+                  <a:srgbClr val="6A6A72"/>
+                </a:solidFill>
+                <a:latin typeface="Segoe UI"/>
+              </a:defRPr>
+            </a:pPr>
+            <a:r>
+              <a:t>lucida.aipedia.blog   ·   github.com/EsmeAbha/Business_Marketing_Analysis_LLM</a:t>
             </a:r>
           </a:p>
         </p:txBody>
@@ -3839,13 +4245,13 @@
 </p:sld>
 </file>
 
-<file path=ppt/slides/slide4.xml><?xml version="1.0" encoding="utf-8"?>
-<p:sld xmlns:a="http://schemas.openxmlformats.org/drawingml/2006/main" xmlns:r="http://schemas.openxmlformats.org/officeDocument/2006/relationships" xmlns:p="http://schemas.openxmlformats.org/presentationml/2006/main">
+<file path=ppt/slides/slide2.xml><?xml version="1.0" encoding="utf-8"?>
+<p:sld xmlns:a="http://schemas.openxmlformats.org/drawingml/2006/main" xmlns:p="http://schemas.openxmlformats.org/presentationml/2006/main" xmlns:r="http://schemas.openxmlformats.org/officeDocument/2006/relationships">
   <p:cSld>
     <p:bg>
       <p:bgPr>
         <a:solidFill>
-          <a:srgbClr val="F3F4F6"/>
+          <a:srgbClr val="FFFFFF"/>
         </a:solidFill>
         <a:effectLst/>
       </p:bgPr>
@@ -3856,14 +4262,7 @@
         <p:cNvGrpSpPr/>
         <p:nvPr/>
       </p:nvGrpSpPr>
-      <p:grpSpPr>
-        <a:xfrm>
-          <a:off x="0" y="0"/>
-          <a:ext cx="0" cy="0"/>
-          <a:chOff x="0" y="0"/>
-          <a:chExt cx="0" cy="0"/>
-        </a:xfrm>
-      </p:grpSpPr>
+      <p:grpSpPr/>
       <p:sp>
         <p:nvSpPr>
           <p:cNvPr id="2" name="TextBox 1"/>
@@ -3872,557 +4271,377 @@
         </p:nvSpPr>
         <p:spPr>
           <a:xfrm>
-            <a:off x="640080" y="457200"/>
-            <a:ext cx="7315200" cy="640080"/>
-          </a:xfrm>
-          <a:prstGeom prst="rect">
-            <a:avLst/>
-          </a:prstGeom>
-          <a:noFill/>
-        </p:spPr>
-        <p:txBody>
-          <a:bodyPr wrap="none">
-            <a:spAutoFit/>
-          </a:bodyPr>
-          <a:lstStyle/>
-          <a:p>
-            <a:pPr>
-              <a:defRPr sz="2800" b="1">
-                <a:solidFill>
-                  <a:srgbClr val="0F172A"/>
-                </a:solidFill>
-              </a:defRPr>
-            </a:pPr>
-            <a:r>
-              <a:t>Specialized Agents</a:t>
-            </a:r>
-          </a:p>
-        </p:txBody>
-      </p:sp>
-      <p:sp>
-        <p:nvSpPr>
-          <p:cNvPr id="3" name="Rectangle 2"/>
-          <p:cNvSpPr/>
-          <p:nvPr/>
-        </p:nvSpPr>
-        <p:spPr>
-          <a:xfrm>
-            <a:off x="640080" y="1463040"/>
-            <a:ext cx="2468880" cy="1417320"/>
-          </a:xfrm>
-          <a:prstGeom prst="rect">
-            <a:avLst/>
-          </a:prstGeom>
-          <a:solidFill>
-            <a:srgbClr val="EFF6FF"/>
-          </a:solidFill>
-          <a:ln w="15240">
+            <a:off x="777240" y="566928"/>
+            <a:ext cx="7315200" cy="274320"/>
+          </a:xfrm>
+          <a:prstGeom prst="rect">
+            <a:avLst/>
+          </a:prstGeom>
+          <a:noFill/>
+        </p:spPr>
+        <p:txBody>
+          <a:bodyPr wrap="square" lIns="0" rIns="0" tIns="0" bIns="0">
+            <a:spAutoFit/>
+          </a:bodyPr>
+          <a:lstStyle/>
+          <a:p>
+            <a:pPr algn="l">
+              <a:lnSpc>
+                <a:spcPct val="100000"/>
+              </a:lnSpc>
+              <a:defRPr sz="1150" b="1">
+                <a:solidFill>
+                  <a:srgbClr val="7B1E22"/>
+                </a:solidFill>
+                <a:latin typeface="Segoe UI"/>
+              </a:defRPr>
+            </a:pPr>
+            <a:r>
+              <a:t>THE PROBLEM</a:t>
+            </a:r>
+          </a:p>
+        </p:txBody>
+      </p:sp>
+      <p:sp>
+        <p:nvSpPr>
+          <p:cNvPr id="3" name="TextBox 2"/>
+          <p:cNvSpPr txBox="1"/>
+          <p:nvPr/>
+        </p:nvSpPr>
+        <p:spPr>
+          <a:xfrm>
+            <a:off x="777240" y="868680"/>
+            <a:ext cx="10607040" cy="731520"/>
+          </a:xfrm>
+          <a:prstGeom prst="rect">
+            <a:avLst/>
+          </a:prstGeom>
+          <a:noFill/>
+        </p:spPr>
+        <p:txBody>
+          <a:bodyPr wrap="square" lIns="0" rIns="0" tIns="0" bIns="0">
+            <a:spAutoFit/>
+          </a:bodyPr>
+          <a:lstStyle/>
+          <a:p>
+            <a:pPr algn="l">
+              <a:lnSpc>
+                <a:spcPct val="100000"/>
+              </a:lnSpc>
+              <a:defRPr sz="3100" b="1">
+                <a:solidFill>
+                  <a:srgbClr val="000000"/>
+                </a:solidFill>
+                <a:latin typeface="Segoe UI"/>
+              </a:defRPr>
+            </a:pPr>
+            <a:r>
+              <a:t>One person doing eight jobs badly</a:t>
+            </a:r>
+          </a:p>
+        </p:txBody>
+      </p:sp>
+      <p:cxnSp>
+        <p:nvCxnSpPr>
+          <p:cNvPr id="4" name="Connector 3"/>
+          <p:cNvCxnSpPr/>
+          <p:nvPr/>
+        </p:nvCxnSpPr>
+        <p:spPr>
+          <a:xfrm>
+            <a:off x="777240" y="1572768"/>
+            <a:ext cx="10607040" cy="0"/>
+          </a:xfrm>
+          <a:prstGeom prst="line">
+            <a:avLst/>
+          </a:prstGeom>
+          <a:ln w="12700">
             <a:solidFill>
-              <a:srgbClr val="2563EB"/>
+              <a:srgbClr val="E4E4E7"/>
             </a:solidFill>
           </a:ln>
         </p:spPr>
         <p:style>
-          <a:lnRef idx="1">
+          <a:lnRef idx="2">
             <a:schemeClr val="accent1"/>
           </a:lnRef>
-          <a:fillRef idx="3">
+          <a:fillRef idx="0">
             <a:schemeClr val="accent1"/>
           </a:fillRef>
-          <a:effectRef idx="2">
+          <a:effectRef idx="1">
             <a:schemeClr val="accent1"/>
           </a:effectRef>
           <a:fontRef idx="minor">
-            <a:schemeClr val="lt1"/>
+            <a:schemeClr val="tx1"/>
           </a:fontRef>
         </p:style>
-        <p:txBody>
-          <a:bodyPr wrap="square" lIns="182880" rIns="182880" rtlCol="0" anchor="ctr"/>
-          <a:lstStyle/>
-          <a:p>
-            <a:pPr algn="ctr">
-              <a:defRPr sz="1600" b="1">
-                <a:solidFill>
-                  <a:srgbClr val="0F172A"/>
-                </a:solidFill>
-              </a:defRPr>
-            </a:pPr>
-            <a:r>
-              <a:t>Market Research</a:t>
-            </a:r>
-          </a:p>
+      </p:cxnSp>
+      <p:sp>
+        <p:nvSpPr>
+          <p:cNvPr id="5" name="TextBox 4"/>
+          <p:cNvSpPr txBox="1"/>
+          <p:nvPr/>
+        </p:nvSpPr>
+        <p:spPr>
+          <a:xfrm>
+            <a:off x="777240" y="2057400"/>
+            <a:ext cx="10607040" cy="896112"/>
+          </a:xfrm>
+          <a:prstGeom prst="rect">
+            <a:avLst/>
+          </a:prstGeom>
+          <a:noFill/>
+        </p:spPr>
+        <p:txBody>
+          <a:bodyPr wrap="square" lIns="0" tIns="0" bIns="0">
+            <a:spAutoFit/>
+          </a:bodyPr>
+          <a:lstStyle/>
           <a:p>
             <a:pPr>
-              <a:defRPr sz="1000">
-                <a:solidFill>
-                  <a:srgbClr val="6B7280"/>
-                </a:solidFill>
-              </a:defRPr>
-            </a:pPr>
-            <a:r>
-              <a:t>Demand, competition, pricing gaps</a:t>
-            </a:r>
-          </a:p>
-        </p:txBody>
-      </p:sp>
-      <p:sp>
-        <p:nvSpPr>
-          <p:cNvPr id="4" name="Rectangle 3"/>
-          <p:cNvSpPr/>
-          <p:nvPr/>
-        </p:nvSpPr>
-        <p:spPr>
-          <a:xfrm>
-            <a:off x="3474720" y="1463040"/>
-            <a:ext cx="2468880" cy="1417320"/>
-          </a:xfrm>
-          <a:prstGeom prst="rect">
-            <a:avLst/>
-          </a:prstGeom>
-          <a:solidFill>
-            <a:srgbClr val="EFF6FF"/>
-          </a:solidFill>
-          <a:ln w="15240">
-            <a:solidFill>
-              <a:srgbClr val="2563EB"/>
-            </a:solidFill>
-          </a:ln>
-        </p:spPr>
-        <p:style>
-          <a:lnRef idx="1">
-            <a:schemeClr val="accent1"/>
-          </a:lnRef>
-          <a:fillRef idx="3">
-            <a:schemeClr val="accent1"/>
-          </a:fillRef>
-          <a:effectRef idx="2">
-            <a:schemeClr val="accent1"/>
-          </a:effectRef>
-          <a:fontRef idx="minor">
-            <a:schemeClr val="lt1"/>
-          </a:fontRef>
-        </p:style>
-        <p:txBody>
-          <a:bodyPr wrap="square" lIns="182880" rIns="182880" rtlCol="0" anchor="ctr"/>
-          <a:lstStyle/>
-          <a:p>
-            <a:pPr algn="ctr">
-              <a:defRPr sz="1600" b="1">
-                <a:solidFill>
-                  <a:srgbClr val="0F172A"/>
-                </a:solidFill>
-              </a:defRPr>
-            </a:pPr>
-            <a:r>
-              <a:t>Product Vision</a:t>
-            </a:r>
-          </a:p>
+              <a:lnSpc>
+                <a:spcPct val="125000"/>
+              </a:lnSpc>
+            </a:pPr>
+            <a:r>
+              <a:rPr sz="1550" b="1">
+                <a:solidFill>
+                  <a:srgbClr val="000000"/>
+                </a:solidFill>
+                <a:latin typeface="Segoe UI"/>
+              </a:rPr>
+              <a:t>The shop is real</a:t>
+            </a:r>
+            <a:r>
+              <a:rPr sz="1550">
+                <a:solidFill>
+                  <a:srgbClr val="3F3F46"/>
+                </a:solidFill>
+                <a:latin typeface="Segoe UI"/>
+              </a:rPr>
+              <a:t> — a maker in Dhaka selling on Facebook and Instagram, taking orders in Bengali and Banglish, shipping by Pathao.</a:t>
+            </a:r>
+          </a:p>
+        </p:txBody>
+      </p:sp>
+      <p:sp>
+        <p:nvSpPr>
+          <p:cNvPr id="6" name="TextBox 5"/>
+          <p:cNvSpPr txBox="1"/>
+          <p:nvPr/>
+        </p:nvSpPr>
+        <p:spPr>
+          <a:xfrm>
+            <a:off x="777240" y="2953512"/>
+            <a:ext cx="10607040" cy="896112"/>
+          </a:xfrm>
+          <a:prstGeom prst="rect">
+            <a:avLst/>
+          </a:prstGeom>
+          <a:noFill/>
+        </p:spPr>
+        <p:txBody>
+          <a:bodyPr wrap="square" lIns="0" tIns="0" bIns="0">
+            <a:spAutoFit/>
+          </a:bodyPr>
+          <a:lstStyle/>
           <a:p>
             <a:pPr>
-              <a:defRPr sz="1000">
-                <a:solidFill>
-                  <a:srgbClr val="6B7280"/>
-                </a:solidFill>
-              </a:defRPr>
-            </a:pPr>
-            <a:r>
-              <a:t>Image analysis and product fit</a:t>
-            </a:r>
-          </a:p>
-        </p:txBody>
-      </p:sp>
-      <p:sp>
-        <p:nvSpPr>
-          <p:cNvPr id="5" name="Rectangle 4"/>
-          <p:cNvSpPr/>
-          <p:nvPr/>
-        </p:nvSpPr>
-        <p:spPr>
-          <a:xfrm>
-            <a:off x="6309360" y="1463040"/>
-            <a:ext cx="2468880" cy="1417320"/>
-          </a:xfrm>
-          <a:prstGeom prst="rect">
-            <a:avLst/>
-          </a:prstGeom>
-          <a:solidFill>
-            <a:srgbClr val="EFF6FF"/>
-          </a:solidFill>
-          <a:ln w="15240">
-            <a:solidFill>
-              <a:srgbClr val="2563EB"/>
-            </a:solidFill>
-          </a:ln>
-        </p:spPr>
-        <p:style>
-          <a:lnRef idx="1">
-            <a:schemeClr val="accent1"/>
-          </a:lnRef>
-          <a:fillRef idx="3">
-            <a:schemeClr val="accent1"/>
-          </a:fillRef>
-          <a:effectRef idx="2">
-            <a:schemeClr val="accent1"/>
-          </a:effectRef>
-          <a:fontRef idx="minor">
-            <a:schemeClr val="lt1"/>
-          </a:fontRef>
-        </p:style>
-        <p:txBody>
-          <a:bodyPr wrap="square" lIns="182880" rIns="182880" rtlCol="0" anchor="ctr"/>
-          <a:lstStyle/>
-          <a:p>
-            <a:pPr algn="ctr">
-              <a:defRPr sz="1600" b="1">
-                <a:solidFill>
-                  <a:srgbClr val="0F172A"/>
-                </a:solidFill>
-              </a:defRPr>
-            </a:pPr>
-            <a:r>
-              <a:t>Pricing</a:t>
-            </a:r>
-          </a:p>
+              <a:lnSpc>
+                <a:spcPct val="125000"/>
+              </a:lnSpc>
+            </a:pPr>
+            <a:r>
+              <a:rPr sz="1550" b="1">
+                <a:solidFill>
+                  <a:srgbClr val="000000"/>
+                </a:solidFill>
+                <a:latin typeface="Segoe UI"/>
+              </a:rPr>
+              <a:t>Eight jobs, one owner</a:t>
+            </a:r>
+            <a:r>
+              <a:rPr sz="1550">
+                <a:solidFill>
+                  <a:srgbClr val="3F3F46"/>
+                </a:solidFill>
+                <a:latin typeface="Segoe UI"/>
+              </a:rPr>
+              <a:t> — research, photography, pricing, stock, ads, customer replies, delivery, and working out whether the day made money.</a:t>
+            </a:r>
+          </a:p>
+        </p:txBody>
+      </p:sp>
+      <p:sp>
+        <p:nvSpPr>
+          <p:cNvPr id="7" name="TextBox 6"/>
+          <p:cNvSpPr txBox="1"/>
+          <p:nvPr/>
+        </p:nvSpPr>
+        <p:spPr>
+          <a:xfrm>
+            <a:off x="777240" y="3849624"/>
+            <a:ext cx="10607040" cy="896112"/>
+          </a:xfrm>
+          <a:prstGeom prst="rect">
+            <a:avLst/>
+          </a:prstGeom>
+          <a:noFill/>
+        </p:spPr>
+        <p:txBody>
+          <a:bodyPr wrap="square" lIns="0" tIns="0" bIns="0">
+            <a:spAutoFit/>
+          </a:bodyPr>
+          <a:lstStyle/>
           <a:p>
             <a:pPr>
-              <a:defRPr sz="1000">
-                <a:solidFill>
-                  <a:srgbClr val="6B7280"/>
-                </a:solidFill>
-              </a:defRPr>
-            </a:pPr>
-            <a:r>
-              <a:t>Cost, margin, break-even</a:t>
-            </a:r>
-          </a:p>
-        </p:txBody>
-      </p:sp>
-      <p:sp>
-        <p:nvSpPr>
-          <p:cNvPr id="6" name="Rectangle 5"/>
-          <p:cNvSpPr/>
-          <p:nvPr/>
-        </p:nvSpPr>
-        <p:spPr>
-          <a:xfrm>
-            <a:off x="9144000" y="1463040"/>
-            <a:ext cx="2468880" cy="1417320"/>
-          </a:xfrm>
-          <a:prstGeom prst="rect">
-            <a:avLst/>
-          </a:prstGeom>
-          <a:solidFill>
-            <a:srgbClr val="EFF6FF"/>
-          </a:solidFill>
-          <a:ln w="15240">
-            <a:solidFill>
-              <a:srgbClr val="2563EB"/>
-            </a:solidFill>
-          </a:ln>
-        </p:spPr>
-        <p:style>
-          <a:lnRef idx="1">
-            <a:schemeClr val="accent1"/>
-          </a:lnRef>
-          <a:fillRef idx="3">
-            <a:schemeClr val="accent1"/>
-          </a:fillRef>
-          <a:effectRef idx="2">
-            <a:schemeClr val="accent1"/>
-          </a:effectRef>
-          <a:fontRef idx="minor">
-            <a:schemeClr val="lt1"/>
-          </a:fontRef>
-        </p:style>
-        <p:txBody>
-          <a:bodyPr wrap="square" lIns="182880" rIns="182880" rtlCol="0" anchor="ctr"/>
-          <a:lstStyle/>
-          <a:p>
-            <a:pPr algn="ctr">
-              <a:defRPr sz="1600" b="1">
-                <a:solidFill>
-                  <a:srgbClr val="0F172A"/>
-                </a:solidFill>
-              </a:defRPr>
-            </a:pPr>
-            <a:r>
-              <a:t>Inventory</a:t>
-            </a:r>
-          </a:p>
+              <a:lnSpc>
+                <a:spcPct val="125000"/>
+              </a:lnSpc>
+            </a:pPr>
+            <a:r>
+              <a:rPr sz="1550" b="1">
+                <a:solidFill>
+                  <a:srgbClr val="000000"/>
+                </a:solidFill>
+                <a:latin typeface="Segoe UI"/>
+              </a:rPr>
+              <a:t>A chatbot does not help</a:t>
+            </a:r>
+            <a:r>
+              <a:rPr sz="1550">
+                <a:solidFill>
+                  <a:srgbClr val="3F3F46"/>
+                </a:solidFill>
+                <a:latin typeface="Segoe UI"/>
+              </a:rPr>
+              <a:t> — advice is not the bottleneck. The work is, and it needs doing in the owner's own numbers.</a:t>
+            </a:r>
+          </a:p>
+        </p:txBody>
+      </p:sp>
+      <p:sp>
+        <p:nvSpPr>
+          <p:cNvPr id="8" name="TextBox 7"/>
+          <p:cNvSpPr txBox="1"/>
+          <p:nvPr/>
+        </p:nvSpPr>
+        <p:spPr>
+          <a:xfrm>
+            <a:off x="777240" y="4745736"/>
+            <a:ext cx="10607040" cy="896112"/>
+          </a:xfrm>
+          <a:prstGeom prst="rect">
+            <a:avLst/>
+          </a:prstGeom>
+          <a:noFill/>
+        </p:spPr>
+        <p:txBody>
+          <a:bodyPr wrap="square" lIns="0" tIns="0" bIns="0">
+            <a:spAutoFit/>
+          </a:bodyPr>
+          <a:lstStyle/>
           <a:p>
             <a:pPr>
-              <a:defRPr sz="1000">
-                <a:solidFill>
-                  <a:srgbClr val="6B7280"/>
-                </a:solidFill>
-              </a:defRPr>
-            </a:pPr>
-            <a:r>
-              <a:t>Stock tracking and reorder alerts</a:t>
-            </a:r>
-          </a:p>
-        </p:txBody>
-      </p:sp>
-      <p:sp>
-        <p:nvSpPr>
-          <p:cNvPr id="7" name="Rectangle 6"/>
-          <p:cNvSpPr/>
-          <p:nvPr/>
-        </p:nvSpPr>
-        <p:spPr>
-          <a:xfrm>
-            <a:off x="640080" y="3429000"/>
-            <a:ext cx="2468880" cy="1417320"/>
-          </a:xfrm>
-          <a:prstGeom prst="rect">
-            <a:avLst/>
-          </a:prstGeom>
-          <a:solidFill>
-            <a:srgbClr val="EFF6FF"/>
-          </a:solidFill>
-          <a:ln w="15240">
-            <a:solidFill>
-              <a:srgbClr val="2563EB"/>
-            </a:solidFill>
-          </a:ln>
-        </p:spPr>
-        <p:style>
-          <a:lnRef idx="1">
-            <a:schemeClr val="accent1"/>
-          </a:lnRef>
-          <a:fillRef idx="3">
-            <a:schemeClr val="accent1"/>
-          </a:fillRef>
-          <a:effectRef idx="2">
-            <a:schemeClr val="accent1"/>
-          </a:effectRef>
-          <a:fontRef idx="minor">
-            <a:schemeClr val="lt1"/>
-          </a:fontRef>
-        </p:style>
-        <p:txBody>
-          <a:bodyPr wrap="square" lIns="182880" rIns="182880" rtlCol="0" anchor="ctr"/>
-          <a:lstStyle/>
-          <a:p>
-            <a:pPr algn="ctr">
-              <a:defRPr sz="1600" b="1">
-                <a:solidFill>
-                  <a:srgbClr val="0F172A"/>
-                </a:solidFill>
-              </a:defRPr>
-            </a:pPr>
-            <a:r>
-              <a:t>Ad Creative</a:t>
-            </a:r>
-          </a:p>
-          <a:p>
-            <a:pPr>
-              <a:defRPr sz="1000">
-                <a:solidFill>
-                  <a:srgbClr val="6B7280"/>
-                </a:solidFill>
-              </a:defRPr>
-            </a:pPr>
-            <a:r>
-              <a:t>Campaign copy and ad generation</a:t>
-            </a:r>
-          </a:p>
-        </p:txBody>
-      </p:sp>
-      <p:sp>
-        <p:nvSpPr>
-          <p:cNvPr id="8" name="Rectangle 7"/>
-          <p:cNvSpPr/>
-          <p:nvPr/>
-        </p:nvSpPr>
-        <p:spPr>
-          <a:xfrm>
-            <a:off x="3474720" y="3429000"/>
-            <a:ext cx="2468880" cy="1417320"/>
-          </a:xfrm>
-          <a:prstGeom prst="rect">
-            <a:avLst/>
-          </a:prstGeom>
-          <a:solidFill>
-            <a:srgbClr val="EFF6FF"/>
-          </a:solidFill>
-          <a:ln w="15240">
-            <a:solidFill>
-              <a:srgbClr val="2563EB"/>
-            </a:solidFill>
-          </a:ln>
-        </p:spPr>
-        <p:style>
-          <a:lnRef idx="1">
-            <a:schemeClr val="accent1"/>
-          </a:lnRef>
-          <a:fillRef idx="3">
-            <a:schemeClr val="accent1"/>
-          </a:fillRef>
-          <a:effectRef idx="2">
-            <a:schemeClr val="accent1"/>
-          </a:effectRef>
-          <a:fontRef idx="minor">
-            <a:schemeClr val="lt1"/>
-          </a:fontRef>
-        </p:style>
-        <p:txBody>
-          <a:bodyPr wrap="square" lIns="182880" rIns="182880" rtlCol="0" anchor="ctr"/>
-          <a:lstStyle/>
-          <a:p>
-            <a:pPr algn="ctr">
-              <a:defRPr sz="1600" b="1">
-                <a:solidFill>
-                  <a:srgbClr val="0F172A"/>
-                </a:solidFill>
-              </a:defRPr>
-            </a:pPr>
-            <a:r>
-              <a:t>Customer Engagement</a:t>
-            </a:r>
-          </a:p>
-          <a:p>
-            <a:pPr>
-              <a:defRPr sz="1000">
-                <a:solidFill>
-                  <a:srgbClr val="6B7280"/>
-                </a:solidFill>
-              </a:defRPr>
-            </a:pPr>
-            <a:r>
-              <a:t>Message analysis and sentiment</a:t>
-            </a:r>
-          </a:p>
-        </p:txBody>
-      </p:sp>
-      <p:sp>
-        <p:nvSpPr>
-          <p:cNvPr id="9" name="Rectangle 8"/>
-          <p:cNvSpPr/>
-          <p:nvPr/>
-        </p:nvSpPr>
-        <p:spPr>
-          <a:xfrm>
-            <a:off x="6309360" y="3429000"/>
-            <a:ext cx="2468880" cy="1417320"/>
-          </a:xfrm>
-          <a:prstGeom prst="rect">
-            <a:avLst/>
-          </a:prstGeom>
-          <a:solidFill>
-            <a:srgbClr val="EFF6FF"/>
-          </a:solidFill>
-          <a:ln w="15240">
-            <a:solidFill>
-              <a:srgbClr val="2563EB"/>
-            </a:solidFill>
-          </a:ln>
-        </p:spPr>
-        <p:style>
-          <a:lnRef idx="1">
-            <a:schemeClr val="accent1"/>
-          </a:lnRef>
-          <a:fillRef idx="3">
-            <a:schemeClr val="accent1"/>
-          </a:fillRef>
-          <a:effectRef idx="2">
-            <a:schemeClr val="accent1"/>
-          </a:effectRef>
-          <a:fontRef idx="minor">
-            <a:schemeClr val="lt1"/>
-          </a:fontRef>
-        </p:style>
-        <p:txBody>
-          <a:bodyPr wrap="square" lIns="182880" rIns="182880" rtlCol="0" anchor="ctr"/>
-          <a:lstStyle/>
-          <a:p>
-            <a:pPr algn="ctr">
-              <a:defRPr sz="1600" b="1">
-                <a:solidFill>
-                  <a:srgbClr val="0F172A"/>
-                </a:solidFill>
-              </a:defRPr>
-            </a:pPr>
-            <a:r>
-              <a:t>Delivery</a:t>
-            </a:r>
-          </a:p>
-          <a:p>
-            <a:pPr>
-              <a:defRPr sz="1000">
-                <a:solidFill>
-                  <a:srgbClr val="6B7280"/>
-                </a:solidFill>
-              </a:defRPr>
-            </a:pPr>
-            <a:r>
-              <a:t>Courier quotes and bookings</a:t>
-            </a:r>
-          </a:p>
-        </p:txBody>
-      </p:sp>
-      <p:sp>
-        <p:nvSpPr>
-          <p:cNvPr id="10" name="Rectangle 9"/>
-          <p:cNvSpPr/>
-          <p:nvPr/>
-        </p:nvSpPr>
-        <p:spPr>
-          <a:xfrm>
-            <a:off x="9144000" y="3429000"/>
-            <a:ext cx="2468880" cy="1417320"/>
-          </a:xfrm>
-          <a:prstGeom prst="rect">
-            <a:avLst/>
-          </a:prstGeom>
-          <a:solidFill>
-            <a:srgbClr val="EFF6FF"/>
-          </a:solidFill>
-          <a:ln w="15240">
-            <a:solidFill>
-              <a:srgbClr val="2563EB"/>
-            </a:solidFill>
-          </a:ln>
-        </p:spPr>
-        <p:style>
-          <a:lnRef idx="1">
-            <a:schemeClr val="accent1"/>
-          </a:lnRef>
-          <a:fillRef idx="3">
-            <a:schemeClr val="accent1"/>
-          </a:fillRef>
-          <a:effectRef idx="2">
-            <a:schemeClr val="accent1"/>
-          </a:effectRef>
-          <a:fontRef idx="minor">
-            <a:schemeClr val="lt1"/>
-          </a:fontRef>
-        </p:style>
-        <p:txBody>
-          <a:bodyPr wrap="square" lIns="182880" rIns="182880" rtlCol="0" anchor="ctr"/>
-          <a:lstStyle/>
-          <a:p>
-            <a:pPr algn="ctr">
-              <a:defRPr sz="1600" b="1">
-                <a:solidFill>
-                  <a:srgbClr val="0F172A"/>
-                </a:solidFill>
-              </a:defRPr>
-            </a:pPr>
-            <a:r>
-              <a:t>Reporting</a:t>
-            </a:r>
-          </a:p>
-          <a:p>
-            <a:pPr>
-              <a:defRPr sz="1000">
-                <a:solidFill>
-                  <a:srgbClr val="6B7280"/>
-                </a:solidFill>
-              </a:defRPr>
-            </a:pPr>
-            <a:r>
-              <a:t>Summaries and recommendations</a:t>
+              <a:lnSpc>
+                <a:spcPct val="125000"/>
+              </a:lnSpc>
+            </a:pPr>
+            <a:r>
+              <a:rPr sz="1550" b="1">
+                <a:solidFill>
+                  <a:srgbClr val="000000"/>
+                </a:solidFill>
+                <a:latin typeface="Segoe UI"/>
+              </a:rPr>
+              <a:t>So: a workforce</a:t>
+            </a:r>
+            <a:r>
+              <a:rPr sz="1550">
+                <a:solidFill>
+                  <a:srgbClr val="3F3F46"/>
+                </a:solidFill>
+                <a:latin typeface="Segoe UI"/>
+              </a:rPr>
+              <a:t> — specialists that each own one job, share what they learn, and hand the irreversible decisions back to the owner.</a:t>
+            </a:r>
+          </a:p>
+        </p:txBody>
+      </p:sp>
+      <p:sp>
+        <p:nvSpPr>
+          <p:cNvPr id="9" name="TextBox 8"/>
+          <p:cNvSpPr txBox="1"/>
+          <p:nvPr/>
+        </p:nvSpPr>
+        <p:spPr>
+          <a:xfrm>
+            <a:off x="777240" y="6327648"/>
+            <a:ext cx="2743200" cy="274320"/>
+          </a:xfrm>
+          <a:prstGeom prst="rect">
+            <a:avLst/>
+          </a:prstGeom>
+          <a:noFill/>
+        </p:spPr>
+        <p:txBody>
+          <a:bodyPr wrap="square" lIns="0" rIns="0" tIns="0" bIns="0">
+            <a:spAutoFit/>
+          </a:bodyPr>
+          <a:lstStyle/>
+          <a:p>
+            <a:pPr algn="l">
+              <a:lnSpc>
+                <a:spcPct val="100000"/>
+              </a:lnSpc>
+              <a:defRPr sz="1050" b="0">
+                <a:solidFill>
+                  <a:srgbClr val="A1A1AA"/>
+                </a:solidFill>
+                <a:latin typeface="Segoe UI"/>
+              </a:defRPr>
+            </a:pPr>
+            <a:r>
+              <a:t>Lucida</a:t>
+            </a:r>
+          </a:p>
+        </p:txBody>
+      </p:sp>
+      <p:sp>
+        <p:nvSpPr>
+          <p:cNvPr id="10" name="TextBox 9"/>
+          <p:cNvSpPr txBox="1"/>
+          <p:nvPr/>
+        </p:nvSpPr>
+        <p:spPr>
+          <a:xfrm>
+            <a:off x="11064240" y="6327648"/>
+            <a:ext cx="365760" cy="274320"/>
+          </a:xfrm>
+          <a:prstGeom prst="rect">
+            <a:avLst/>
+          </a:prstGeom>
+          <a:noFill/>
+        </p:spPr>
+        <p:txBody>
+          <a:bodyPr wrap="square" lIns="0" rIns="0" tIns="0" bIns="0">
+            <a:spAutoFit/>
+          </a:bodyPr>
+          <a:lstStyle/>
+          <a:p>
+            <a:pPr algn="r">
+              <a:lnSpc>
+                <a:spcPct val="100000"/>
+              </a:lnSpc>
+              <a:defRPr sz="1050" b="0">
+                <a:solidFill>
+                  <a:srgbClr val="A1A1AA"/>
+                </a:solidFill>
+                <a:latin typeface="Segoe UI"/>
+              </a:defRPr>
+            </a:pPr>
+            <a:r>
+              <a:t>2</a:t>
             </a:r>
           </a:p>
         </p:txBody>
@@ -4435,13 +4654,13 @@
 </p:sld>
 </file>
 
-<file path=ppt/slides/slide5.xml><?xml version="1.0" encoding="utf-8"?>
-<p:sld xmlns:a="http://schemas.openxmlformats.org/drawingml/2006/main" xmlns:r="http://schemas.openxmlformats.org/officeDocument/2006/relationships" xmlns:p="http://schemas.openxmlformats.org/presentationml/2006/main">
+<file path=ppt/slides/slide3.xml><?xml version="1.0" encoding="utf-8"?>
+<p:sld xmlns:a="http://schemas.openxmlformats.org/drawingml/2006/main" xmlns:p="http://schemas.openxmlformats.org/presentationml/2006/main" xmlns:r="http://schemas.openxmlformats.org/officeDocument/2006/relationships">
   <p:cSld>
     <p:bg>
       <p:bgPr>
         <a:solidFill>
-          <a:srgbClr val="0F172A"/>
+          <a:srgbClr val="FFFFFF"/>
         </a:solidFill>
         <a:effectLst/>
       </p:bgPr>
@@ -4452,14 +4671,7 @@
         <p:cNvGrpSpPr/>
         <p:nvPr/>
       </p:nvGrpSpPr>
-      <p:grpSpPr>
-        <a:xfrm>
-          <a:off x="0" y="0"/>
-          <a:ext cx="0" cy="0"/>
-          <a:chOff x="0" y="0"/>
-          <a:chExt cx="0" cy="0"/>
-        </a:xfrm>
-      </p:grpSpPr>
+      <p:grpSpPr/>
       <p:sp>
         <p:nvSpPr>
           <p:cNvPr id="2" name="TextBox 1"/>
@@ -4468,170 +4680,1132 @@
         </p:nvSpPr>
         <p:spPr>
           <a:xfrm>
-            <a:off x="548640" y="457200"/>
-            <a:ext cx="7315200" cy="640080"/>
-          </a:xfrm>
-          <a:prstGeom prst="rect">
-            <a:avLst/>
-          </a:prstGeom>
-          <a:noFill/>
-        </p:spPr>
-        <p:txBody>
-          <a:bodyPr wrap="none">
-            <a:spAutoFit/>
-          </a:bodyPr>
-          <a:lstStyle/>
-          <a:p>
-            <a:pPr>
-              <a:defRPr sz="2800" b="1">
+            <a:off x="777240" y="566928"/>
+            <a:ext cx="7315200" cy="274320"/>
+          </a:xfrm>
+          <a:prstGeom prst="rect">
+            <a:avLst/>
+          </a:prstGeom>
+          <a:noFill/>
+        </p:spPr>
+        <p:txBody>
+          <a:bodyPr wrap="square" lIns="0" rIns="0" tIns="0" bIns="0">
+            <a:spAutoFit/>
+          </a:bodyPr>
+          <a:lstStyle/>
+          <a:p>
+            <a:pPr algn="l">
+              <a:lnSpc>
+                <a:spcPct val="100000"/>
+              </a:lnSpc>
+              <a:defRPr sz="1150" b="1">
+                <a:solidFill>
+                  <a:srgbClr val="7B1E22"/>
+                </a:solidFill>
+                <a:latin typeface="Segoe UI"/>
+              </a:defRPr>
+            </a:pPr>
+            <a:r>
+              <a:t>ARCHITECTURE</a:t>
+            </a:r>
+          </a:p>
+        </p:txBody>
+      </p:sp>
+      <p:sp>
+        <p:nvSpPr>
+          <p:cNvPr id="3" name="TextBox 2"/>
+          <p:cNvSpPr txBox="1"/>
+          <p:nvPr/>
+        </p:nvSpPr>
+        <p:spPr>
+          <a:xfrm>
+            <a:off x="777240" y="868680"/>
+            <a:ext cx="10607040" cy="731520"/>
+          </a:xfrm>
+          <a:prstGeom prst="rect">
+            <a:avLst/>
+          </a:prstGeom>
+          <a:noFill/>
+        </p:spPr>
+        <p:txBody>
+          <a:bodyPr wrap="square" lIns="0" rIns="0" tIns="0" bIns="0">
+            <a:spAutoFit/>
+          </a:bodyPr>
+          <a:lstStyle/>
+          <a:p>
+            <a:pPr algn="l">
+              <a:lnSpc>
+                <a:spcPct val="100000"/>
+              </a:lnSpc>
+              <a:defRPr sz="3100" b="1">
+                <a:solidFill>
+                  <a:srgbClr val="000000"/>
+                </a:solidFill>
+                <a:latin typeface="Segoe UI"/>
+              </a:defRPr>
+            </a:pPr>
+            <a:r>
+              <a:t>A star, not a pipeline</a:t>
+            </a:r>
+          </a:p>
+        </p:txBody>
+      </p:sp>
+      <p:cxnSp>
+        <p:nvCxnSpPr>
+          <p:cNvPr id="4" name="Connector 3"/>
+          <p:cNvCxnSpPr/>
+          <p:nvPr/>
+        </p:nvCxnSpPr>
+        <p:spPr>
+          <a:xfrm>
+            <a:off x="777240" y="1572768"/>
+            <a:ext cx="10607040" cy="0"/>
+          </a:xfrm>
+          <a:prstGeom prst="line">
+            <a:avLst/>
+          </a:prstGeom>
+          <a:ln w="12700">
+            <a:solidFill>
+              <a:srgbClr val="E4E4E7"/>
+            </a:solidFill>
+          </a:ln>
+        </p:spPr>
+        <p:style>
+          <a:lnRef idx="2">
+            <a:schemeClr val="accent1"/>
+          </a:lnRef>
+          <a:fillRef idx="0">
+            <a:schemeClr val="accent1"/>
+          </a:fillRef>
+          <a:effectRef idx="1">
+            <a:schemeClr val="accent1"/>
+          </a:effectRef>
+          <a:fontRef idx="minor">
+            <a:schemeClr val="tx1"/>
+          </a:fontRef>
+        </p:style>
+      </p:cxnSp>
+      <p:sp>
+        <p:nvSpPr>
+          <p:cNvPr id="5" name="TextBox 4"/>
+          <p:cNvSpPr txBox="1"/>
+          <p:nvPr/>
+        </p:nvSpPr>
+        <p:spPr>
+          <a:xfrm>
+            <a:off x="777240" y="1965960"/>
+            <a:ext cx="3383280" cy="1828800"/>
+          </a:xfrm>
+          <a:prstGeom prst="rect">
+            <a:avLst/>
+          </a:prstGeom>
+          <a:noFill/>
+        </p:spPr>
+        <p:txBody>
+          <a:bodyPr wrap="square" lIns="0" rIns="0" tIns="0" bIns="0">
+            <a:spAutoFit/>
+          </a:bodyPr>
+          <a:lstStyle/>
+          <a:p>
+            <a:pPr algn="l">
+              <a:lnSpc>
+                <a:spcPct val="140000"/>
+              </a:lnSpc>
+              <a:defRPr sz="1350" b="0">
+                <a:solidFill>
+                  <a:srgbClr val="3F3F46"/>
+                </a:solidFill>
+                <a:latin typeface="Segoe UI"/>
+              </a:defRPr>
+            </a:pPr>
+            <a:r>
+              <a:t>Every request enters at the supervisor, which reads it, picks one specialist, and re-decides when that specialist returns. A question about stock does not drag six agents along with it.</a:t>
+            </a:r>
+          </a:p>
+        </p:txBody>
+      </p:sp>
+      <p:sp>
+        <p:nvSpPr>
+          <p:cNvPr id="6" name="TextBox 5"/>
+          <p:cNvSpPr txBox="1"/>
+          <p:nvPr/>
+        </p:nvSpPr>
+        <p:spPr>
+          <a:xfrm>
+            <a:off x="777240" y="3931920"/>
+            <a:ext cx="3383280" cy="822960"/>
+          </a:xfrm>
+          <a:prstGeom prst="rect">
+            <a:avLst/>
+          </a:prstGeom>
+          <a:noFill/>
+        </p:spPr>
+        <p:txBody>
+          <a:bodyPr wrap="square" lIns="0" rIns="0" tIns="0" bIns="0">
+            <a:spAutoFit/>
+          </a:bodyPr>
+          <a:lstStyle/>
+          <a:p>
+            <a:pPr algn="l">
+              <a:lnSpc>
+                <a:spcPct val="135000"/>
+              </a:lnSpc>
+              <a:defRPr sz="1300" b="1">
+                <a:solidFill>
+                  <a:srgbClr val="7B1E22"/>
+                </a:solidFill>
+                <a:latin typeface="Segoe UI"/>
+              </a:defRPr>
+            </a:pPr>
+            <a:r>
+              <a:t>12 nodes · 19 edges</a:t>
+            </a:r>
+          </a:p>
+          <a:p>
+            <a:pPr algn="l">
+              <a:lnSpc>
+                <a:spcPct val="135000"/>
+              </a:lnSpc>
+              <a:defRPr sz="1300" b="1">
+                <a:solidFill>
+                  <a:srgbClr val="7B1E22"/>
+                </a:solidFill>
+                <a:latin typeface="Segoe UI"/>
+              </a:defRPr>
+            </a:pPr>
+            <a:r>
+              <a:t>9 conditional</a:t>
+            </a:r>
+          </a:p>
+        </p:txBody>
+      </p:sp>
+      <p:sp>
+        <p:nvSpPr>
+          <p:cNvPr id="7" name="TextBox 6"/>
+          <p:cNvSpPr txBox="1"/>
+          <p:nvPr/>
+        </p:nvSpPr>
+        <p:spPr>
+          <a:xfrm>
+            <a:off x="777240" y="4892040"/>
+            <a:ext cx="3383280" cy="1097280"/>
+          </a:xfrm>
+          <a:prstGeom prst="rect">
+            <a:avLst/>
+          </a:prstGeom>
+          <a:noFill/>
+        </p:spPr>
+        <p:txBody>
+          <a:bodyPr wrap="square" lIns="0" rIns="0" tIns="0" bIns="0">
+            <a:spAutoFit/>
+          </a:bodyPr>
+          <a:lstStyle/>
+          <a:p>
+            <a:pPr algn="l">
+              <a:lnSpc>
+                <a:spcPct val="135000"/>
+              </a:lnSpc>
+              <a:defRPr sz="1150" b="0">
+                <a:solidFill>
+                  <a:srgbClr val="71717A"/>
+                </a:solidFill>
+                <a:latin typeface="Segoe UI"/>
+              </a:defRPr>
+            </a:pPr>
+            <a:r>
+              <a:t>Dashed edges are the supervisor choosing. Read from the compiled LangGraph at build time, so this picture cannot drift from the code.</a:t>
+            </a:r>
+          </a:p>
+        </p:txBody>
+      </p:sp>
+      <p:cxnSp>
+        <p:nvCxnSpPr>
+          <p:cNvPr id="8" name="Connector 7"/>
+          <p:cNvCxnSpPr/>
+          <p:nvPr/>
+        </p:nvCxnSpPr>
+        <p:spPr>
+          <a:xfrm flipV="1">
+            <a:off x="7973568" y="2148839"/>
+            <a:ext cx="0" cy="1783081"/>
+          </a:xfrm>
+          <a:prstGeom prst="line">
+            <a:avLst/>
+          </a:prstGeom>
+          <a:ln w="12700">
+            <a:solidFill>
+              <a:srgbClr val="D8D8DC"/>
+            </a:solidFill>
+            <a:prstDash val="dash"/>
+          </a:ln>
+        </p:spPr>
+        <p:style>
+          <a:lnRef idx="2">
+            <a:schemeClr val="accent1"/>
+          </a:lnRef>
+          <a:fillRef idx="0">
+            <a:schemeClr val="accent1"/>
+          </a:fillRef>
+          <a:effectRef idx="1">
+            <a:schemeClr val="accent1"/>
+          </a:effectRef>
+          <a:fontRef idx="minor">
+            <a:schemeClr val="tx1"/>
+          </a:fontRef>
+        </p:style>
+      </p:cxnSp>
+      <p:cxnSp>
+        <p:nvCxnSpPr>
+          <p:cNvPr id="9" name="Connector 8"/>
+          <p:cNvCxnSpPr/>
+          <p:nvPr/>
+        </p:nvCxnSpPr>
+        <p:spPr>
+          <a:xfrm flipV="1">
+            <a:off x="7973568" y="2671092"/>
+            <a:ext cx="1639076" cy="1260828"/>
+          </a:xfrm>
+          <a:prstGeom prst="line">
+            <a:avLst/>
+          </a:prstGeom>
+          <a:ln w="12700">
+            <a:solidFill>
+              <a:srgbClr val="D8D8DC"/>
+            </a:solidFill>
+            <a:prstDash val="dash"/>
+          </a:ln>
+        </p:spPr>
+        <p:style>
+          <a:lnRef idx="2">
+            <a:schemeClr val="accent1"/>
+          </a:lnRef>
+          <a:fillRef idx="0">
+            <a:schemeClr val="accent1"/>
+          </a:fillRef>
+          <a:effectRef idx="1">
+            <a:schemeClr val="accent1"/>
+          </a:effectRef>
+          <a:fontRef idx="minor">
+            <a:schemeClr val="tx1"/>
+          </a:fontRef>
+        </p:style>
+      </p:cxnSp>
+      <p:cxnSp>
+        <p:nvCxnSpPr>
+          <p:cNvPr id="10" name="Connector 9"/>
+          <p:cNvCxnSpPr/>
+          <p:nvPr/>
+        </p:nvCxnSpPr>
+        <p:spPr>
+          <a:xfrm>
+            <a:off x="7973568" y="3931920"/>
+            <a:ext cx="2318004" cy="0"/>
+          </a:xfrm>
+          <a:prstGeom prst="line">
+            <a:avLst/>
+          </a:prstGeom>
+          <a:ln w="12700">
+            <a:solidFill>
+              <a:srgbClr val="D8D8DC"/>
+            </a:solidFill>
+            <a:prstDash val="dash"/>
+          </a:ln>
+        </p:spPr>
+        <p:style>
+          <a:lnRef idx="2">
+            <a:schemeClr val="accent1"/>
+          </a:lnRef>
+          <a:fillRef idx="0">
+            <a:schemeClr val="accent1"/>
+          </a:fillRef>
+          <a:effectRef idx="1">
+            <a:schemeClr val="accent1"/>
+          </a:effectRef>
+          <a:fontRef idx="minor">
+            <a:schemeClr val="tx1"/>
+          </a:fontRef>
+        </p:style>
+      </p:cxnSp>
+      <p:cxnSp>
+        <p:nvCxnSpPr>
+          <p:cNvPr id="11" name="Connector 10"/>
+          <p:cNvCxnSpPr/>
+          <p:nvPr/>
+        </p:nvCxnSpPr>
+        <p:spPr>
+          <a:xfrm>
+            <a:off x="7973568" y="3931920"/>
+            <a:ext cx="1639076" cy="1260827"/>
+          </a:xfrm>
+          <a:prstGeom prst="line">
+            <a:avLst/>
+          </a:prstGeom>
+          <a:ln w="12700">
+            <a:solidFill>
+              <a:srgbClr val="D8D8DC"/>
+            </a:solidFill>
+            <a:prstDash val="dash"/>
+          </a:ln>
+        </p:spPr>
+        <p:style>
+          <a:lnRef idx="2">
+            <a:schemeClr val="accent1"/>
+          </a:lnRef>
+          <a:fillRef idx="0">
+            <a:schemeClr val="accent1"/>
+          </a:fillRef>
+          <a:effectRef idx="1">
+            <a:schemeClr val="accent1"/>
+          </a:effectRef>
+          <a:fontRef idx="minor">
+            <a:schemeClr val="tx1"/>
+          </a:fontRef>
+        </p:style>
+      </p:cxnSp>
+      <p:cxnSp>
+        <p:nvCxnSpPr>
+          <p:cNvPr id="12" name="Connector 11"/>
+          <p:cNvCxnSpPr/>
+          <p:nvPr/>
+        </p:nvCxnSpPr>
+        <p:spPr>
+          <a:xfrm>
+            <a:off x="7973568" y="3931920"/>
+            <a:ext cx="0" cy="1783080"/>
+          </a:xfrm>
+          <a:prstGeom prst="line">
+            <a:avLst/>
+          </a:prstGeom>
+          <a:ln w="12700">
+            <a:solidFill>
+              <a:srgbClr val="D8D8DC"/>
+            </a:solidFill>
+            <a:prstDash val="dash"/>
+          </a:ln>
+        </p:spPr>
+        <p:style>
+          <a:lnRef idx="2">
+            <a:schemeClr val="accent1"/>
+          </a:lnRef>
+          <a:fillRef idx="0">
+            <a:schemeClr val="accent1"/>
+          </a:fillRef>
+          <a:effectRef idx="1">
+            <a:schemeClr val="accent1"/>
+          </a:effectRef>
+          <a:fontRef idx="minor">
+            <a:schemeClr val="tx1"/>
+          </a:fontRef>
+        </p:style>
+      </p:cxnSp>
+      <p:cxnSp>
+        <p:nvCxnSpPr>
+          <p:cNvPr id="13" name="Connector 12"/>
+          <p:cNvCxnSpPr/>
+          <p:nvPr/>
+        </p:nvCxnSpPr>
+        <p:spPr>
+          <a:xfrm flipH="1">
+            <a:off x="6334491" y="3931920"/>
+            <a:ext cx="1639077" cy="1260827"/>
+          </a:xfrm>
+          <a:prstGeom prst="line">
+            <a:avLst/>
+          </a:prstGeom>
+          <a:ln w="12700">
+            <a:solidFill>
+              <a:srgbClr val="D8D8DC"/>
+            </a:solidFill>
+            <a:prstDash val="dash"/>
+          </a:ln>
+        </p:spPr>
+        <p:style>
+          <a:lnRef idx="2">
+            <a:schemeClr val="accent1"/>
+          </a:lnRef>
+          <a:fillRef idx="0">
+            <a:schemeClr val="accent1"/>
+          </a:fillRef>
+          <a:effectRef idx="1">
+            <a:schemeClr val="accent1"/>
+          </a:effectRef>
+          <a:fontRef idx="minor">
+            <a:schemeClr val="tx1"/>
+          </a:fontRef>
+        </p:style>
+      </p:cxnSp>
+      <p:cxnSp>
+        <p:nvCxnSpPr>
+          <p:cNvPr id="14" name="Connector 13"/>
+          <p:cNvCxnSpPr/>
+          <p:nvPr/>
+        </p:nvCxnSpPr>
+        <p:spPr>
+          <a:xfrm flipH="1">
+            <a:off x="5655564" y="3931920"/>
+            <a:ext cx="2318004" cy="0"/>
+          </a:xfrm>
+          <a:prstGeom prst="line">
+            <a:avLst/>
+          </a:prstGeom>
+          <a:ln w="12700">
+            <a:solidFill>
+              <a:srgbClr val="D8D8DC"/>
+            </a:solidFill>
+            <a:prstDash val="dash"/>
+          </a:ln>
+        </p:spPr>
+        <p:style>
+          <a:lnRef idx="2">
+            <a:schemeClr val="accent1"/>
+          </a:lnRef>
+          <a:fillRef idx="0">
+            <a:schemeClr val="accent1"/>
+          </a:fillRef>
+          <a:effectRef idx="1">
+            <a:schemeClr val="accent1"/>
+          </a:effectRef>
+          <a:fontRef idx="minor">
+            <a:schemeClr val="tx1"/>
+          </a:fontRef>
+        </p:style>
+      </p:cxnSp>
+      <p:cxnSp>
+        <p:nvCxnSpPr>
+          <p:cNvPr id="15" name="Connector 14"/>
+          <p:cNvCxnSpPr/>
+          <p:nvPr/>
+        </p:nvCxnSpPr>
+        <p:spPr>
+          <a:xfrm flipH="1" flipV="1">
+            <a:off x="6334491" y="2671092"/>
+            <a:ext cx="1639077" cy="1260828"/>
+          </a:xfrm>
+          <a:prstGeom prst="line">
+            <a:avLst/>
+          </a:prstGeom>
+          <a:ln w="12700">
+            <a:solidFill>
+              <a:srgbClr val="D8D8DC"/>
+            </a:solidFill>
+            <a:prstDash val="dash"/>
+          </a:ln>
+        </p:spPr>
+        <p:style>
+          <a:lnRef idx="2">
+            <a:schemeClr val="accent1"/>
+          </a:lnRef>
+          <a:fillRef idx="0">
+            <a:schemeClr val="accent1"/>
+          </a:fillRef>
+          <a:effectRef idx="1">
+            <a:schemeClr val="accent1"/>
+          </a:effectRef>
+          <a:fontRef idx="minor">
+            <a:schemeClr val="tx1"/>
+          </a:fontRef>
+        </p:style>
+      </p:cxnSp>
+      <p:sp>
+        <p:nvSpPr>
+          <p:cNvPr id="16" name="Rounded Rectangle 15"/>
+          <p:cNvSpPr/>
+          <p:nvPr/>
+        </p:nvSpPr>
+        <p:spPr>
+          <a:xfrm>
+            <a:off x="7095744" y="1911095"/>
+            <a:ext cx="1755648" cy="475488"/>
+          </a:xfrm>
+          <a:prstGeom prst="roundRect">
+            <a:avLst>
+              <a:gd name="adj" fmla="val 8000"/>
+            </a:avLst>
+          </a:prstGeom>
+          <a:solidFill>
+            <a:srgbClr val="FFFFFF"/>
+          </a:solidFill>
+          <a:ln w="12700">
+            <a:solidFill>
+              <a:srgbClr val="E4E4E7"/>
+            </a:solidFill>
+          </a:ln>
+          <a:effectLst/>
+        </p:spPr>
+        <p:style>
+          <a:lnRef idx="1">
+            <a:schemeClr val="accent1"/>
+          </a:lnRef>
+          <a:fillRef idx="3">
+            <a:schemeClr val="accent1"/>
+          </a:fillRef>
+          <a:effectRef idx="2">
+            <a:schemeClr val="accent1"/>
+          </a:effectRef>
+          <a:fontRef idx="minor">
+            <a:schemeClr val="lt1"/>
+          </a:fontRef>
+        </p:style>
+        <p:txBody>
+          <a:bodyPr rtlCol="0" anchor="ctr"/>
+          <a:lstStyle/>
+          <a:p>
+            <a:pPr algn="ctr">
+              <a:defRPr sz="1100">
+                <a:solidFill>
+                  <a:srgbClr val="000000"/>
+                </a:solidFill>
+                <a:latin typeface="Segoe UI"/>
+              </a:defRPr>
+            </a:pPr>
+            <a:r>
+              <a:t>Ad Creation &amp; Publishing</a:t>
+            </a:r>
+          </a:p>
+        </p:txBody>
+      </p:sp>
+      <p:sp>
+        <p:nvSpPr>
+          <p:cNvPr id="17" name="Rounded Rectangle 16"/>
+          <p:cNvSpPr/>
+          <p:nvPr/>
+        </p:nvSpPr>
+        <p:spPr>
+          <a:xfrm>
+            <a:off x="8734820" y="2433348"/>
+            <a:ext cx="1755648" cy="475488"/>
+          </a:xfrm>
+          <a:prstGeom prst="roundRect">
+            <a:avLst>
+              <a:gd name="adj" fmla="val 8000"/>
+            </a:avLst>
+          </a:prstGeom>
+          <a:solidFill>
+            <a:srgbClr val="FFFFFF"/>
+          </a:solidFill>
+          <a:ln w="12700">
+            <a:solidFill>
+              <a:srgbClr val="E4E4E7"/>
+            </a:solidFill>
+          </a:ln>
+          <a:effectLst/>
+        </p:spPr>
+        <p:style>
+          <a:lnRef idx="1">
+            <a:schemeClr val="accent1"/>
+          </a:lnRef>
+          <a:fillRef idx="3">
+            <a:schemeClr val="accent1"/>
+          </a:fillRef>
+          <a:effectRef idx="2">
+            <a:schemeClr val="accent1"/>
+          </a:effectRef>
+          <a:fontRef idx="minor">
+            <a:schemeClr val="lt1"/>
+          </a:fontRef>
+        </p:style>
+        <p:txBody>
+          <a:bodyPr rtlCol="0" anchor="ctr"/>
+          <a:lstStyle/>
+          <a:p>
+            <a:pPr algn="ctr">
+              <a:defRPr sz="1100">
+                <a:solidFill>
+                  <a:srgbClr val="000000"/>
+                </a:solidFill>
+                <a:latin typeface="Segoe UI"/>
+              </a:defRPr>
+            </a:pPr>
+            <a:r>
+              <a:t>Delivery &amp; Logistics</a:t>
+            </a:r>
+          </a:p>
+        </p:txBody>
+      </p:sp>
+      <p:sp>
+        <p:nvSpPr>
+          <p:cNvPr id="18" name="Rounded Rectangle 17"/>
+          <p:cNvSpPr/>
+          <p:nvPr/>
+        </p:nvSpPr>
+        <p:spPr>
+          <a:xfrm>
+            <a:off x="9413748" y="3694176"/>
+            <a:ext cx="1755648" cy="475488"/>
+          </a:xfrm>
+          <a:prstGeom prst="roundRect">
+            <a:avLst>
+              <a:gd name="adj" fmla="val 8000"/>
+            </a:avLst>
+          </a:prstGeom>
+          <a:solidFill>
+            <a:srgbClr val="FFFFFF"/>
+          </a:solidFill>
+          <a:ln w="12700">
+            <a:solidFill>
+              <a:srgbClr val="E4E4E7"/>
+            </a:solidFill>
+          </a:ln>
+          <a:effectLst/>
+        </p:spPr>
+        <p:style>
+          <a:lnRef idx="1">
+            <a:schemeClr val="accent1"/>
+          </a:lnRef>
+          <a:fillRef idx="3">
+            <a:schemeClr val="accent1"/>
+          </a:fillRef>
+          <a:effectRef idx="2">
+            <a:schemeClr val="accent1"/>
+          </a:effectRef>
+          <a:fontRef idx="minor">
+            <a:schemeClr val="lt1"/>
+          </a:fontRef>
+        </p:style>
+        <p:txBody>
+          <a:bodyPr rtlCol="0" anchor="ctr"/>
+          <a:lstStyle/>
+          <a:p>
+            <a:pPr algn="ctr">
+              <a:defRPr sz="1100">
+                <a:solidFill>
+                  <a:srgbClr val="000000"/>
+                </a:solidFill>
+                <a:latin typeface="Segoe UI"/>
+              </a:defRPr>
+            </a:pPr>
+            <a:r>
+              <a:t>Customer Engagement</a:t>
+            </a:r>
+          </a:p>
+        </p:txBody>
+      </p:sp>
+      <p:sp>
+        <p:nvSpPr>
+          <p:cNvPr id="19" name="Rounded Rectangle 18"/>
+          <p:cNvSpPr/>
+          <p:nvPr/>
+        </p:nvSpPr>
+        <p:spPr>
+          <a:xfrm>
+            <a:off x="8734820" y="4955003"/>
+            <a:ext cx="1755648" cy="475488"/>
+          </a:xfrm>
+          <a:prstGeom prst="roundRect">
+            <a:avLst>
+              <a:gd name="adj" fmla="val 8000"/>
+            </a:avLst>
+          </a:prstGeom>
+          <a:solidFill>
+            <a:srgbClr val="FFFFFF"/>
+          </a:solidFill>
+          <a:ln w="12700">
+            <a:solidFill>
+              <a:srgbClr val="E4E4E7"/>
+            </a:solidFill>
+          </a:ln>
+          <a:effectLst/>
+        </p:spPr>
+        <p:style>
+          <a:lnRef idx="1">
+            <a:schemeClr val="accent1"/>
+          </a:lnRef>
+          <a:fillRef idx="3">
+            <a:schemeClr val="accent1"/>
+          </a:fillRef>
+          <a:effectRef idx="2">
+            <a:schemeClr val="accent1"/>
+          </a:effectRef>
+          <a:fontRef idx="minor">
+            <a:schemeClr val="lt1"/>
+          </a:fontRef>
+        </p:style>
+        <p:txBody>
+          <a:bodyPr rtlCol="0" anchor="ctr"/>
+          <a:lstStyle/>
+          <a:p>
+            <a:pPr algn="ctr">
+              <a:defRPr sz="1100">
+                <a:solidFill>
+                  <a:srgbClr val="000000"/>
+                </a:solidFill>
+                <a:latin typeface="Segoe UI"/>
+              </a:defRPr>
+            </a:pPr>
+            <a:r>
+              <a:t>Inventory</a:t>
+            </a:r>
+          </a:p>
+        </p:txBody>
+      </p:sp>
+      <p:sp>
+        <p:nvSpPr>
+          <p:cNvPr id="20" name="Rounded Rectangle 19"/>
+          <p:cNvSpPr/>
+          <p:nvPr/>
+        </p:nvSpPr>
+        <p:spPr>
+          <a:xfrm>
+            <a:off x="7095744" y="5477256"/>
+            <a:ext cx="1755648" cy="475488"/>
+          </a:xfrm>
+          <a:prstGeom prst="roundRect">
+            <a:avLst>
+              <a:gd name="adj" fmla="val 8000"/>
+            </a:avLst>
+          </a:prstGeom>
+          <a:solidFill>
+            <a:srgbClr val="FFFFFF"/>
+          </a:solidFill>
+          <a:ln w="12700">
+            <a:solidFill>
+              <a:srgbClr val="E4E4E7"/>
+            </a:solidFill>
+          </a:ln>
+          <a:effectLst/>
+        </p:spPr>
+        <p:style>
+          <a:lnRef idx="1">
+            <a:schemeClr val="accent1"/>
+          </a:lnRef>
+          <a:fillRef idx="3">
+            <a:schemeClr val="accent1"/>
+          </a:fillRef>
+          <a:effectRef idx="2">
+            <a:schemeClr val="accent1"/>
+          </a:effectRef>
+          <a:fontRef idx="minor">
+            <a:schemeClr val="lt1"/>
+          </a:fontRef>
+        </p:style>
+        <p:txBody>
+          <a:bodyPr rtlCol="0" anchor="ctr"/>
+          <a:lstStyle/>
+          <a:p>
+            <a:pPr algn="ctr">
+              <a:defRPr sz="1100">
+                <a:solidFill>
+                  <a:srgbClr val="000000"/>
+                </a:solidFill>
+                <a:latin typeface="Segoe UI"/>
+              </a:defRPr>
+            </a:pPr>
+            <a:r>
+              <a:t>Market Research</a:t>
+            </a:r>
+          </a:p>
+        </p:txBody>
+      </p:sp>
+      <p:sp>
+        <p:nvSpPr>
+          <p:cNvPr id="21" name="Rounded Rectangle 20"/>
+          <p:cNvSpPr/>
+          <p:nvPr/>
+        </p:nvSpPr>
+        <p:spPr>
+          <a:xfrm>
+            <a:off x="5456667" y="4955003"/>
+            <a:ext cx="1755648" cy="475488"/>
+          </a:xfrm>
+          <a:prstGeom prst="roundRect">
+            <a:avLst>
+              <a:gd name="adj" fmla="val 8000"/>
+            </a:avLst>
+          </a:prstGeom>
+          <a:solidFill>
+            <a:srgbClr val="FFFFFF"/>
+          </a:solidFill>
+          <a:ln w="12700">
+            <a:solidFill>
+              <a:srgbClr val="E4E4E7"/>
+            </a:solidFill>
+          </a:ln>
+          <a:effectLst/>
+        </p:spPr>
+        <p:style>
+          <a:lnRef idx="1">
+            <a:schemeClr val="accent1"/>
+          </a:lnRef>
+          <a:fillRef idx="3">
+            <a:schemeClr val="accent1"/>
+          </a:fillRef>
+          <a:effectRef idx="2">
+            <a:schemeClr val="accent1"/>
+          </a:effectRef>
+          <a:fontRef idx="minor">
+            <a:schemeClr val="lt1"/>
+          </a:fontRef>
+        </p:style>
+        <p:txBody>
+          <a:bodyPr rtlCol="0" anchor="ctr"/>
+          <a:lstStyle/>
+          <a:p>
+            <a:pPr algn="ctr">
+              <a:defRPr sz="1100">
+                <a:solidFill>
+                  <a:srgbClr val="000000"/>
+                </a:solidFill>
+                <a:latin typeface="Segoe UI"/>
+              </a:defRPr>
+            </a:pPr>
+            <a:r>
+              <a:t>Pricing &amp; Cost</a:t>
+            </a:r>
+          </a:p>
+        </p:txBody>
+      </p:sp>
+      <p:sp>
+        <p:nvSpPr>
+          <p:cNvPr id="22" name="Rounded Rectangle 21"/>
+          <p:cNvSpPr/>
+          <p:nvPr/>
+        </p:nvSpPr>
+        <p:spPr>
+          <a:xfrm>
+            <a:off x="4777740" y="3694176"/>
+            <a:ext cx="1755648" cy="475488"/>
+          </a:xfrm>
+          <a:prstGeom prst="roundRect">
+            <a:avLst>
+              <a:gd name="adj" fmla="val 8000"/>
+            </a:avLst>
+          </a:prstGeom>
+          <a:solidFill>
+            <a:srgbClr val="FFFFFF"/>
+          </a:solidFill>
+          <a:ln w="12700">
+            <a:solidFill>
+              <a:srgbClr val="E4E4E7"/>
+            </a:solidFill>
+          </a:ln>
+          <a:effectLst/>
+        </p:spPr>
+        <p:style>
+          <a:lnRef idx="1">
+            <a:schemeClr val="accent1"/>
+          </a:lnRef>
+          <a:fillRef idx="3">
+            <a:schemeClr val="accent1"/>
+          </a:fillRef>
+          <a:effectRef idx="2">
+            <a:schemeClr val="accent1"/>
+          </a:effectRef>
+          <a:fontRef idx="minor">
+            <a:schemeClr val="lt1"/>
+          </a:fontRef>
+        </p:style>
+        <p:txBody>
+          <a:bodyPr rtlCol="0" anchor="ctr"/>
+          <a:lstStyle/>
+          <a:p>
+            <a:pPr algn="ctr">
+              <a:defRPr sz="1100">
+                <a:solidFill>
+                  <a:srgbClr val="000000"/>
+                </a:solidFill>
+                <a:latin typeface="Segoe UI"/>
+              </a:defRPr>
+            </a:pPr>
+            <a:r>
+              <a:t>Product Vision</a:t>
+            </a:r>
+          </a:p>
+        </p:txBody>
+      </p:sp>
+      <p:sp>
+        <p:nvSpPr>
+          <p:cNvPr id="23" name="Rounded Rectangle 22"/>
+          <p:cNvSpPr/>
+          <p:nvPr/>
+        </p:nvSpPr>
+        <p:spPr>
+          <a:xfrm>
+            <a:off x="5456667" y="2433348"/>
+            <a:ext cx="1755648" cy="475488"/>
+          </a:xfrm>
+          <a:prstGeom prst="roundRect">
+            <a:avLst>
+              <a:gd name="adj" fmla="val 8000"/>
+            </a:avLst>
+          </a:prstGeom>
+          <a:solidFill>
+            <a:srgbClr val="FFFFFF"/>
+          </a:solidFill>
+          <a:ln w="12700">
+            <a:solidFill>
+              <a:srgbClr val="E4E4E7"/>
+            </a:solidFill>
+          </a:ln>
+          <a:effectLst/>
+        </p:spPr>
+        <p:style>
+          <a:lnRef idx="1">
+            <a:schemeClr val="accent1"/>
+          </a:lnRef>
+          <a:fillRef idx="3">
+            <a:schemeClr val="accent1"/>
+          </a:fillRef>
+          <a:effectRef idx="2">
+            <a:schemeClr val="accent1"/>
+          </a:effectRef>
+          <a:fontRef idx="minor">
+            <a:schemeClr val="lt1"/>
+          </a:fontRef>
+        </p:style>
+        <p:txBody>
+          <a:bodyPr rtlCol="0" anchor="ctr"/>
+          <a:lstStyle/>
+          <a:p>
+            <a:pPr algn="ctr">
+              <a:defRPr sz="1100">
+                <a:solidFill>
+                  <a:srgbClr val="000000"/>
+                </a:solidFill>
+                <a:latin typeface="Segoe UI"/>
+              </a:defRPr>
+            </a:pPr>
+            <a:r>
+              <a:t>Reporting</a:t>
+            </a:r>
+          </a:p>
+        </p:txBody>
+      </p:sp>
+      <p:sp>
+        <p:nvSpPr>
+          <p:cNvPr id="24" name="Rounded Rectangle 23"/>
+          <p:cNvSpPr/>
+          <p:nvPr/>
+        </p:nvSpPr>
+        <p:spPr>
+          <a:xfrm>
+            <a:off x="6949440" y="3602736"/>
+            <a:ext cx="2048256" cy="658368"/>
+          </a:xfrm>
+          <a:prstGeom prst="roundRect">
+            <a:avLst>
+              <a:gd name="adj" fmla="val 8000"/>
+            </a:avLst>
+          </a:prstGeom>
+          <a:solidFill>
+            <a:srgbClr val="7B1E22"/>
+          </a:solidFill>
+          <a:ln w="12700">
+            <a:solidFill>
+              <a:srgbClr val="7B1E22"/>
+            </a:solidFill>
+          </a:ln>
+          <a:effectLst/>
+        </p:spPr>
+        <p:style>
+          <a:lnRef idx="1">
+            <a:schemeClr val="accent1"/>
+          </a:lnRef>
+          <a:fillRef idx="3">
+            <a:schemeClr val="accent1"/>
+          </a:fillRef>
+          <a:effectRef idx="2">
+            <a:schemeClr val="accent1"/>
+          </a:effectRef>
+          <a:fontRef idx="minor">
+            <a:schemeClr val="lt1"/>
+          </a:fontRef>
+        </p:style>
+        <p:txBody>
+          <a:bodyPr rtlCol="0" anchor="ctr"/>
+          <a:lstStyle/>
+          <a:p>
+            <a:pPr algn="ctr">
+              <a:defRPr sz="1300" b="1">
                 <a:solidFill>
                   <a:srgbClr val="FFFFFF"/>
                 </a:solidFill>
-              </a:defRPr>
-            </a:pPr>
-            <a:r>
-              <a:t>Workflow and Decision Flow</a:t>
-            </a:r>
-          </a:p>
-        </p:txBody>
-      </p:sp>
-      <p:sp>
-        <p:nvSpPr>
-          <p:cNvPr id="3" name="TextBox 2"/>
-          <p:cNvSpPr txBox="1"/>
-          <p:nvPr/>
-        </p:nvSpPr>
-        <p:spPr>
-          <a:xfrm>
-            <a:off x="731520" y="1371600"/>
-            <a:ext cx="7772400" cy="3840480"/>
-          </a:xfrm>
-          <a:prstGeom prst="rect">
-            <a:avLst/>
-          </a:prstGeom>
-          <a:noFill/>
-        </p:spPr>
-        <p:txBody>
-          <a:bodyPr wrap="none">
-            <a:spAutoFit/>
-          </a:bodyPr>
-          <a:lstStyle/>
-          <a:p>
-            <a:pPr>
-              <a:spcAft>
-                <a:spcPts val="1000"/>
-              </a:spcAft>
-              <a:defRPr sz="1900">
-                <a:solidFill>
-                  <a:srgbClr val="FFFFFF"/>
-                </a:solidFill>
-              </a:defRPr>
-            </a:pPr>
-            <a:r>
-              <a:t>1. User sends a request or uploads a product image</a:t>
-            </a:r>
-          </a:p>
-          <a:p>
-            <a:pPr>
-              <a:spcAft>
-                <a:spcPts val="1000"/>
-              </a:spcAft>
-              <a:defRPr sz="1900">
-                <a:solidFill>
-                  <a:srgbClr val="FFFFFF"/>
-                </a:solidFill>
-              </a:defRPr>
-            </a:pPr>
-            <a:r>
-              <a:t>2. Supervisor interprets intent and chooses the next agent</a:t>
-            </a:r>
-          </a:p>
-          <a:p>
-            <a:pPr>
-              <a:spcAft>
-                <a:spcPts val="1000"/>
-              </a:spcAft>
-              <a:defRPr sz="1900">
-                <a:solidFill>
-                  <a:srgbClr val="FFFFFF"/>
-                </a:solidFill>
-              </a:defRPr>
-            </a:pPr>
-            <a:r>
-              <a:t>3. Specialist performs the task and writes the result to shared memory</a:t>
-            </a:r>
-          </a:p>
-          <a:p>
-            <a:pPr>
-              <a:spcAft>
-                <a:spcPts val="1000"/>
-              </a:spcAft>
-              <a:defRPr sz="1900">
-                <a:solidFill>
-                  <a:srgbClr val="FFFFFF"/>
-                </a:solidFill>
-              </a:defRPr>
-            </a:pPr>
-            <a:r>
-              <a:t>4. Supervisor revisits routing until the goal is complete</a:t>
-            </a:r>
-          </a:p>
-          <a:p>
-            <a:pPr>
-              <a:spcAft>
-                <a:spcPts val="1000"/>
-              </a:spcAft>
-              <a:defRPr sz="1900">
-                <a:solidFill>
-                  <a:srgbClr val="FFFFFF"/>
-                </a:solidFill>
-              </a:defRPr>
-            </a:pPr>
-            <a:r>
-              <a:t>5. Risky operations pause for human approval</a:t>
-            </a:r>
-          </a:p>
-          <a:p>
-            <a:pPr>
-              <a:spcAft>
-                <a:spcPts val="1000"/>
-              </a:spcAft>
-              <a:defRPr sz="1900">
-                <a:solidFill>
-                  <a:srgbClr val="FFFFFF"/>
-                </a:solidFill>
-              </a:defRPr>
-            </a:pPr>
-            <a:r>
-              <a:t>6. Final answer is generated with evidence and numbers</a:t>
-            </a:r>
-          </a:p>
-        </p:txBody>
-      </p:sp>
-      <p:pic>
-        <p:nvPicPr>
-          <p:cNvPr id="4" name="Picture 3" descr="image2.png"/>
-          <p:cNvPicPr>
-            <a:picLocks noChangeAspect="1"/>
-          </p:cNvPicPr>
-          <p:nvPr/>
-        </p:nvPicPr>
-        <p:blipFill>
-          <a:blip r:embed="rId2"/>
-          <a:stretch>
-            <a:fillRect/>
-          </a:stretch>
-        </p:blipFill>
-        <p:spPr>
-          <a:xfrm>
-            <a:off x="8412480" y="1645920"/>
-            <a:ext cx="3017520" cy="2286000"/>
-          </a:xfrm>
-          <a:prstGeom prst="rect">
-            <a:avLst/>
-          </a:prstGeom>
-        </p:spPr>
-      </p:pic>
+                <a:latin typeface="Segoe UI"/>
+              </a:defRPr>
+            </a:pPr>
+            <a:r>
+              <a:t>SUPERVISOR</a:t>
+            </a:r>
+          </a:p>
+        </p:txBody>
+      </p:sp>
+      <p:sp>
+        <p:nvSpPr>
+          <p:cNvPr id="25" name="TextBox 24"/>
+          <p:cNvSpPr txBox="1"/>
+          <p:nvPr/>
+        </p:nvSpPr>
+        <p:spPr>
+          <a:xfrm>
+            <a:off x="777240" y="6327648"/>
+            <a:ext cx="2743200" cy="274320"/>
+          </a:xfrm>
+          <a:prstGeom prst="rect">
+            <a:avLst/>
+          </a:prstGeom>
+          <a:noFill/>
+        </p:spPr>
+        <p:txBody>
+          <a:bodyPr wrap="square" lIns="0" rIns="0" tIns="0" bIns="0">
+            <a:spAutoFit/>
+          </a:bodyPr>
+          <a:lstStyle/>
+          <a:p>
+            <a:pPr algn="l">
+              <a:lnSpc>
+                <a:spcPct val="100000"/>
+              </a:lnSpc>
+              <a:defRPr sz="1050" b="0">
+                <a:solidFill>
+                  <a:srgbClr val="A1A1AA"/>
+                </a:solidFill>
+                <a:latin typeface="Segoe UI"/>
+              </a:defRPr>
+            </a:pPr>
+            <a:r>
+              <a:t>Lucida</a:t>
+            </a:r>
+          </a:p>
+        </p:txBody>
+      </p:sp>
+      <p:sp>
+        <p:nvSpPr>
+          <p:cNvPr id="26" name="TextBox 25"/>
+          <p:cNvSpPr txBox="1"/>
+          <p:nvPr/>
+        </p:nvSpPr>
+        <p:spPr>
+          <a:xfrm>
+            <a:off x="11064240" y="6327648"/>
+            <a:ext cx="365760" cy="274320"/>
+          </a:xfrm>
+          <a:prstGeom prst="rect">
+            <a:avLst/>
+          </a:prstGeom>
+          <a:noFill/>
+        </p:spPr>
+        <p:txBody>
+          <a:bodyPr wrap="square" lIns="0" rIns="0" tIns="0" bIns="0">
+            <a:spAutoFit/>
+          </a:bodyPr>
+          <a:lstStyle/>
+          <a:p>
+            <a:pPr algn="r">
+              <a:lnSpc>
+                <a:spcPct val="100000"/>
+              </a:lnSpc>
+              <a:defRPr sz="1050" b="0">
+                <a:solidFill>
+                  <a:srgbClr val="A1A1AA"/>
+                </a:solidFill>
+                <a:latin typeface="Segoe UI"/>
+              </a:defRPr>
+            </a:pPr>
+            <a:r>
+              <a:t>3</a:t>
+            </a:r>
+          </a:p>
+        </p:txBody>
+      </p:sp>
     </p:spTree>
   </p:cSld>
   <p:clrMapOvr>
@@ -4640,13 +5814,13 @@
 </p:sld>
 </file>
 
-<file path=ppt/slides/slide6.xml><?xml version="1.0" encoding="utf-8"?>
-<p:sld xmlns:a="http://schemas.openxmlformats.org/drawingml/2006/main" xmlns:r="http://schemas.openxmlformats.org/officeDocument/2006/relationships" xmlns:p="http://schemas.openxmlformats.org/presentationml/2006/main">
+<file path=ppt/slides/slide4.xml><?xml version="1.0" encoding="utf-8"?>
+<p:sld xmlns:a="http://schemas.openxmlformats.org/drawingml/2006/main" xmlns:p="http://schemas.openxmlformats.org/presentationml/2006/main" xmlns:r="http://schemas.openxmlformats.org/officeDocument/2006/relationships">
   <p:cSld>
     <p:bg>
       <p:bgPr>
         <a:solidFill>
-          <a:srgbClr val="F3F4F6"/>
+          <a:srgbClr val="FFFFFF"/>
         </a:solidFill>
         <a:effectLst/>
       </p:bgPr>
@@ -4657,14 +5831,7 @@
         <p:cNvGrpSpPr/>
         <p:nvPr/>
       </p:nvGrpSpPr>
-      <p:grpSpPr>
-        <a:xfrm>
-          <a:off x="0" y="0"/>
-          <a:ext cx="0" cy="0"/>
-          <a:chOff x="0" y="0"/>
-          <a:chExt cx="0" cy="0"/>
-        </a:xfrm>
-      </p:grpSpPr>
+      <p:grpSpPr/>
       <p:sp>
         <p:nvSpPr>
           <p:cNvPr id="2" name="TextBox 1"/>
@@ -4673,29 +5840,33 @@
         </p:nvSpPr>
         <p:spPr>
           <a:xfrm>
-            <a:off x="640080" y="457200"/>
-            <a:ext cx="7315200" cy="640080"/>
-          </a:xfrm>
-          <a:prstGeom prst="rect">
-            <a:avLst/>
-          </a:prstGeom>
-          <a:noFill/>
-        </p:spPr>
-        <p:txBody>
-          <a:bodyPr wrap="none">
-            <a:spAutoFit/>
-          </a:bodyPr>
-          <a:lstStyle/>
-          <a:p>
-            <a:pPr>
-              <a:defRPr sz="2800" b="1">
-                <a:solidFill>
-                  <a:srgbClr val="0F172A"/>
-                </a:solidFill>
-              </a:defRPr>
-            </a:pPr>
-            <a:r>
-              <a:t>Interactive Dashboard and UI</a:t>
+            <a:off x="777240" y="566928"/>
+            <a:ext cx="7315200" cy="274320"/>
+          </a:xfrm>
+          <a:prstGeom prst="rect">
+            <a:avLst/>
+          </a:prstGeom>
+          <a:noFill/>
+        </p:spPr>
+        <p:txBody>
+          <a:bodyPr wrap="square" lIns="0" rIns="0" tIns="0" bIns="0">
+            <a:spAutoFit/>
+          </a:bodyPr>
+          <a:lstStyle/>
+          <a:p>
+            <a:pPr algn="l">
+              <a:lnSpc>
+                <a:spcPct val="100000"/>
+              </a:lnSpc>
+              <a:defRPr sz="1150" b="1">
+                <a:solidFill>
+                  <a:srgbClr val="7B1E22"/>
+                </a:solidFill>
+                <a:latin typeface="Segoe UI"/>
+              </a:defRPr>
+            </a:pPr>
+            <a:r>
+              <a:t>WHO DOES WHAT</a:t>
             </a:r>
           </a:p>
         </p:txBody>
@@ -4708,165 +5879,1142 @@
         </p:nvSpPr>
         <p:spPr>
           <a:xfrm>
-            <a:off x="731520" y="1463040"/>
-            <a:ext cx="5212080" cy="3840480"/>
-          </a:xfrm>
-          <a:prstGeom prst="rect">
-            <a:avLst/>
-          </a:prstGeom>
-          <a:noFill/>
-        </p:spPr>
-        <p:txBody>
-          <a:bodyPr wrap="none">
-            <a:spAutoFit/>
-          </a:bodyPr>
-          <a:lstStyle/>
-          <a:p>
-            <a:pPr>
-              <a:spcAft>
-                <a:spcPts val="800"/>
-              </a:spcAft>
-              <a:defRPr sz="1900">
-                <a:solidFill>
-                  <a:srgbClr val="0F172A"/>
-                </a:solidFill>
-              </a:defRPr>
-            </a:pPr>
-            <a:r>
-              <a:t>• Dashboard of active agents and workflow</a:t>
-            </a:r>
-          </a:p>
-          <a:p>
-            <a:pPr>
-              <a:spcAft>
-                <a:spcPts val="800"/>
-              </a:spcAft>
-              <a:defRPr sz="1900">
-                <a:solidFill>
-                  <a:srgbClr val="0F172A"/>
-                </a:solidFill>
-              </a:defRPr>
-            </a:pPr>
-            <a:r>
-              <a:t>• Live execution trace and event feed</a:t>
-            </a:r>
-          </a:p>
-          <a:p>
-            <a:pPr>
-              <a:spcAft>
-                <a:spcPts val="800"/>
-              </a:spcAft>
-              <a:defRPr sz="1900">
-                <a:solidFill>
-                  <a:srgbClr val="0F172A"/>
-                </a:solidFill>
-              </a:defRPr>
-            </a:pPr>
-            <a:r>
-              <a:t>• Agent communication history</a:t>
-            </a:r>
-          </a:p>
-          <a:p>
-            <a:pPr>
-              <a:spcAft>
-                <a:spcPts val="800"/>
-              </a:spcAft>
-              <a:defRPr sz="1900">
-                <a:solidFill>
-                  <a:srgbClr val="0F172A"/>
-                </a:solidFill>
-              </a:defRPr>
-            </a:pPr>
-            <a:r>
-              <a:t>• Execution graph visualisation</a:t>
-            </a:r>
-          </a:p>
-          <a:p>
-            <a:pPr>
-              <a:spcAft>
-                <a:spcPts val="800"/>
-              </a:spcAft>
-              <a:defRPr sz="1900">
-                <a:solidFill>
-                  <a:srgbClr val="0F172A"/>
-                </a:solidFill>
-              </a:defRPr>
-            </a:pPr>
-            <a:r>
-              <a:t>• Token usage and API cost estimation</a:t>
-            </a:r>
-          </a:p>
-          <a:p>
-            <a:pPr>
-              <a:spcAft>
-                <a:spcPts val="800"/>
-              </a:spcAft>
-              <a:defRPr sz="1900">
-                <a:solidFill>
-                  <a:srgbClr val="0F172A"/>
-                </a:solidFill>
-              </a:defRPr>
-            </a:pPr>
-            <a:r>
-              <a:t>• Logs, errors, and memory viewer</a:t>
-            </a:r>
-          </a:p>
-          <a:p>
-            <a:pPr>
-              <a:spcAft>
-                <a:spcPts val="800"/>
-              </a:spcAft>
-              <a:defRPr sz="1900">
-                <a:solidFill>
-                  <a:srgbClr val="0F172A"/>
-                </a:solidFill>
-              </a:defRPr>
-            </a:pPr>
-            <a:r>
-              <a:t>• Human-in-the-loop controls: pause, resume, approve, retry</a:t>
-            </a:r>
-          </a:p>
-          <a:p>
-            <a:pPr>
-              <a:spcAft>
-                <a:spcPts val="800"/>
-              </a:spcAft>
-              <a:defRPr sz="1900">
-                <a:solidFill>
-                  <a:srgbClr val="0F172A"/>
-                </a:solidFill>
-              </a:defRPr>
-            </a:pPr>
-            <a:r>
-              <a:t>• Final report and output viewer</a:t>
-            </a:r>
-          </a:p>
-        </p:txBody>
-      </p:sp>
-      <p:pic>
-        <p:nvPicPr>
-          <p:cNvPr id="4" name="Picture 3" descr="image3.png"/>
-          <p:cNvPicPr>
-            <a:picLocks noChangeAspect="1"/>
-          </p:cNvPicPr>
-          <p:nvPr/>
-        </p:nvPicPr>
-        <p:blipFill>
-          <a:blip r:embed="rId2"/>
-          <a:stretch>
-            <a:fillRect/>
-          </a:stretch>
-        </p:blipFill>
-        <p:spPr>
-          <a:xfrm>
-            <a:off x="6583680" y="1554480"/>
-            <a:ext cx="4846320" cy="3200400"/>
-          </a:xfrm>
-          <a:prstGeom prst="rect">
-            <a:avLst/>
-          </a:prstGeom>
-        </p:spPr>
-      </p:pic>
+            <a:off x="777240" y="868680"/>
+            <a:ext cx="10607040" cy="731520"/>
+          </a:xfrm>
+          <a:prstGeom prst="rect">
+            <a:avLst/>
+          </a:prstGeom>
+          <a:noFill/>
+        </p:spPr>
+        <p:txBody>
+          <a:bodyPr wrap="square" lIns="0" rIns="0" tIns="0" bIns="0">
+            <a:spAutoFit/>
+          </a:bodyPr>
+          <a:lstStyle/>
+          <a:p>
+            <a:pPr algn="l">
+              <a:lnSpc>
+                <a:spcPct val="100000"/>
+              </a:lnSpc>
+              <a:defRPr sz="3100" b="1">
+                <a:solidFill>
+                  <a:srgbClr val="000000"/>
+                </a:solidFill>
+                <a:latin typeface="Segoe UI"/>
+              </a:defRPr>
+            </a:pPr>
+            <a:r>
+              <a:t>The 8 specialists</a:t>
+            </a:r>
+          </a:p>
+        </p:txBody>
+      </p:sp>
+      <p:cxnSp>
+        <p:nvCxnSpPr>
+          <p:cNvPr id="4" name="Connector 3"/>
+          <p:cNvCxnSpPr/>
+          <p:nvPr/>
+        </p:nvCxnSpPr>
+        <p:spPr>
+          <a:xfrm>
+            <a:off x="777240" y="1572768"/>
+            <a:ext cx="10607040" cy="0"/>
+          </a:xfrm>
+          <a:prstGeom prst="line">
+            <a:avLst/>
+          </a:prstGeom>
+          <a:ln w="12700">
+            <a:solidFill>
+              <a:srgbClr val="E4E4E7"/>
+            </a:solidFill>
+          </a:ln>
+        </p:spPr>
+        <p:style>
+          <a:lnRef idx="2">
+            <a:schemeClr val="accent1"/>
+          </a:lnRef>
+          <a:fillRef idx="0">
+            <a:schemeClr val="accent1"/>
+          </a:fillRef>
+          <a:effectRef idx="1">
+            <a:schemeClr val="accent1"/>
+          </a:effectRef>
+          <a:fontRef idx="minor">
+            <a:schemeClr val="tx1"/>
+          </a:fontRef>
+        </p:style>
+      </p:cxnSp>
+      <p:sp>
+        <p:nvSpPr>
+          <p:cNvPr id="5" name="Rounded Rectangle 4"/>
+          <p:cNvSpPr/>
+          <p:nvPr/>
+        </p:nvSpPr>
+        <p:spPr>
+          <a:xfrm>
+            <a:off x="777240" y="2057400"/>
+            <a:ext cx="5029200" cy="841248"/>
+          </a:xfrm>
+          <a:prstGeom prst="roundRect">
+            <a:avLst>
+              <a:gd name="adj" fmla="val 8000"/>
+            </a:avLst>
+          </a:prstGeom>
+          <a:solidFill>
+            <a:srgbClr val="F4F4F5"/>
+          </a:solidFill>
+          <a:ln w="12700">
+            <a:solidFill>
+              <a:srgbClr val="E4E4E7"/>
+            </a:solidFill>
+          </a:ln>
+          <a:effectLst/>
+        </p:spPr>
+        <p:style>
+          <a:lnRef idx="1">
+            <a:schemeClr val="accent1"/>
+          </a:lnRef>
+          <a:fillRef idx="3">
+            <a:schemeClr val="accent1"/>
+          </a:fillRef>
+          <a:effectRef idx="2">
+            <a:schemeClr val="accent1"/>
+          </a:effectRef>
+          <a:fontRef idx="minor">
+            <a:schemeClr val="lt1"/>
+          </a:fontRef>
+        </p:style>
+        <p:txBody>
+          <a:bodyPr rtlCol="0" anchor="ctr"/>
+          <a:lstStyle/>
+          <a:p/>
+        </p:txBody>
+      </p:sp>
+      <p:sp>
+        <p:nvSpPr>
+          <p:cNvPr id="6" name="TextBox 5"/>
+          <p:cNvSpPr txBox="1"/>
+          <p:nvPr/>
+        </p:nvSpPr>
+        <p:spPr>
+          <a:xfrm>
+            <a:off x="1033271" y="2203704"/>
+            <a:ext cx="4572000" cy="274320"/>
+          </a:xfrm>
+          <a:prstGeom prst="rect">
+            <a:avLst/>
+          </a:prstGeom>
+          <a:noFill/>
+        </p:spPr>
+        <p:txBody>
+          <a:bodyPr wrap="square" lIns="0" rIns="0" tIns="0" bIns="0">
+            <a:spAutoFit/>
+          </a:bodyPr>
+          <a:lstStyle/>
+          <a:p>
+            <a:pPr algn="l">
+              <a:lnSpc>
+                <a:spcPct val="100000"/>
+              </a:lnSpc>
+              <a:defRPr sz="1350" b="1">
+                <a:solidFill>
+                  <a:srgbClr val="000000"/>
+                </a:solidFill>
+                <a:latin typeface="Segoe UI"/>
+              </a:defRPr>
+            </a:pPr>
+            <a:r>
+              <a:t>Ad Creation &amp; Publishing</a:t>
+            </a:r>
+          </a:p>
+        </p:txBody>
+      </p:sp>
+      <p:sp>
+        <p:nvSpPr>
+          <p:cNvPr id="7" name="TextBox 6"/>
+          <p:cNvSpPr txBox="1"/>
+          <p:nvPr/>
+        </p:nvSpPr>
+        <p:spPr>
+          <a:xfrm>
+            <a:off x="1033271" y="2496312"/>
+            <a:ext cx="4572000" cy="274320"/>
+          </a:xfrm>
+          <a:prstGeom prst="rect">
+            <a:avLst/>
+          </a:prstGeom>
+          <a:noFill/>
+        </p:spPr>
+        <p:txBody>
+          <a:bodyPr wrap="square" lIns="0" rIns="0" tIns="0" bIns="0">
+            <a:spAutoFit/>
+          </a:bodyPr>
+          <a:lstStyle/>
+          <a:p>
+            <a:pPr algn="l">
+              <a:lnSpc>
+                <a:spcPct val="100000"/>
+              </a:lnSpc>
+              <a:defRPr sz="1150" b="0">
+                <a:solidFill>
+                  <a:srgbClr val="71717A"/>
+                </a:solidFill>
+                <a:latin typeface="Segoe UI"/>
+              </a:defRPr>
+            </a:pPr>
+            <a:r>
+              <a:t>Platform-specific copy, published after approval</a:t>
+            </a:r>
+          </a:p>
+        </p:txBody>
+      </p:sp>
+      <p:sp>
+        <p:nvSpPr>
+          <p:cNvPr id="8" name="Rounded Rectangle 7"/>
+          <p:cNvSpPr/>
+          <p:nvPr/>
+        </p:nvSpPr>
+        <p:spPr>
+          <a:xfrm>
+            <a:off x="6217920" y="2057400"/>
+            <a:ext cx="5029200" cy="841248"/>
+          </a:xfrm>
+          <a:prstGeom prst="roundRect">
+            <a:avLst>
+              <a:gd name="adj" fmla="val 8000"/>
+            </a:avLst>
+          </a:prstGeom>
+          <a:solidFill>
+            <a:srgbClr val="F4F4F5"/>
+          </a:solidFill>
+          <a:ln w="12700">
+            <a:solidFill>
+              <a:srgbClr val="E4E4E7"/>
+            </a:solidFill>
+          </a:ln>
+          <a:effectLst/>
+        </p:spPr>
+        <p:style>
+          <a:lnRef idx="1">
+            <a:schemeClr val="accent1"/>
+          </a:lnRef>
+          <a:fillRef idx="3">
+            <a:schemeClr val="accent1"/>
+          </a:fillRef>
+          <a:effectRef idx="2">
+            <a:schemeClr val="accent1"/>
+          </a:effectRef>
+          <a:fontRef idx="minor">
+            <a:schemeClr val="lt1"/>
+          </a:fontRef>
+        </p:style>
+        <p:txBody>
+          <a:bodyPr rtlCol="0" anchor="ctr"/>
+          <a:lstStyle/>
+          <a:p/>
+        </p:txBody>
+      </p:sp>
+      <p:sp>
+        <p:nvSpPr>
+          <p:cNvPr id="9" name="TextBox 8"/>
+          <p:cNvSpPr txBox="1"/>
+          <p:nvPr/>
+        </p:nvSpPr>
+        <p:spPr>
+          <a:xfrm>
+            <a:off x="6473952" y="2203704"/>
+            <a:ext cx="4572000" cy="274320"/>
+          </a:xfrm>
+          <a:prstGeom prst="rect">
+            <a:avLst/>
+          </a:prstGeom>
+          <a:noFill/>
+        </p:spPr>
+        <p:txBody>
+          <a:bodyPr wrap="square" lIns="0" rIns="0" tIns="0" bIns="0">
+            <a:spAutoFit/>
+          </a:bodyPr>
+          <a:lstStyle/>
+          <a:p>
+            <a:pPr algn="l">
+              <a:lnSpc>
+                <a:spcPct val="100000"/>
+              </a:lnSpc>
+              <a:defRPr sz="1350" b="1">
+                <a:solidFill>
+                  <a:srgbClr val="000000"/>
+                </a:solidFill>
+                <a:latin typeface="Segoe UI"/>
+              </a:defRPr>
+            </a:pPr>
+            <a:r>
+              <a:t>Delivery &amp; Logistics</a:t>
+            </a:r>
+          </a:p>
+        </p:txBody>
+      </p:sp>
+      <p:sp>
+        <p:nvSpPr>
+          <p:cNvPr id="10" name="TextBox 9"/>
+          <p:cNvSpPr txBox="1"/>
+          <p:nvPr/>
+        </p:nvSpPr>
+        <p:spPr>
+          <a:xfrm>
+            <a:off x="6473952" y="2496312"/>
+            <a:ext cx="4572000" cy="274320"/>
+          </a:xfrm>
+          <a:prstGeom prst="rect">
+            <a:avLst/>
+          </a:prstGeom>
+          <a:noFill/>
+        </p:spPr>
+        <p:txBody>
+          <a:bodyPr wrap="square" lIns="0" rIns="0" tIns="0" bIns="0">
+            <a:spAutoFit/>
+          </a:bodyPr>
+          <a:lstStyle/>
+          <a:p>
+            <a:pPr algn="l">
+              <a:lnSpc>
+                <a:spcPct val="100000"/>
+              </a:lnSpc>
+              <a:defRPr sz="1150" b="0">
+                <a:solidFill>
+                  <a:srgbClr val="71717A"/>
+                </a:solidFill>
+                <a:latin typeface="Segoe UI"/>
+              </a:defRPr>
+            </a:pPr>
+            <a:r>
+              <a:t>Quotes a parcel and books the courier, after approval</a:t>
+            </a:r>
+          </a:p>
+        </p:txBody>
+      </p:sp>
+      <p:sp>
+        <p:nvSpPr>
+          <p:cNvPr id="11" name="Rounded Rectangle 10"/>
+          <p:cNvSpPr/>
+          <p:nvPr/>
+        </p:nvSpPr>
+        <p:spPr>
+          <a:xfrm>
+            <a:off x="777240" y="3081528"/>
+            <a:ext cx="5029200" cy="841248"/>
+          </a:xfrm>
+          <a:prstGeom prst="roundRect">
+            <a:avLst>
+              <a:gd name="adj" fmla="val 8000"/>
+            </a:avLst>
+          </a:prstGeom>
+          <a:solidFill>
+            <a:srgbClr val="F4F4F5"/>
+          </a:solidFill>
+          <a:ln w="12700">
+            <a:solidFill>
+              <a:srgbClr val="E4E4E7"/>
+            </a:solidFill>
+          </a:ln>
+          <a:effectLst/>
+        </p:spPr>
+        <p:style>
+          <a:lnRef idx="1">
+            <a:schemeClr val="accent1"/>
+          </a:lnRef>
+          <a:fillRef idx="3">
+            <a:schemeClr val="accent1"/>
+          </a:fillRef>
+          <a:effectRef idx="2">
+            <a:schemeClr val="accent1"/>
+          </a:effectRef>
+          <a:fontRef idx="minor">
+            <a:schemeClr val="lt1"/>
+          </a:fontRef>
+        </p:style>
+        <p:txBody>
+          <a:bodyPr rtlCol="0" anchor="ctr"/>
+          <a:lstStyle/>
+          <a:p/>
+        </p:txBody>
+      </p:sp>
+      <p:sp>
+        <p:nvSpPr>
+          <p:cNvPr id="12" name="TextBox 11"/>
+          <p:cNvSpPr txBox="1"/>
+          <p:nvPr/>
+        </p:nvSpPr>
+        <p:spPr>
+          <a:xfrm>
+            <a:off x="1033271" y="3227832"/>
+            <a:ext cx="4572000" cy="274320"/>
+          </a:xfrm>
+          <a:prstGeom prst="rect">
+            <a:avLst/>
+          </a:prstGeom>
+          <a:noFill/>
+        </p:spPr>
+        <p:txBody>
+          <a:bodyPr wrap="square" lIns="0" rIns="0" tIns="0" bIns="0">
+            <a:spAutoFit/>
+          </a:bodyPr>
+          <a:lstStyle/>
+          <a:p>
+            <a:pPr algn="l">
+              <a:lnSpc>
+                <a:spcPct val="100000"/>
+              </a:lnSpc>
+              <a:defRPr sz="1350" b="1">
+                <a:solidFill>
+                  <a:srgbClr val="000000"/>
+                </a:solidFill>
+                <a:latin typeface="Segoe UI"/>
+              </a:defRPr>
+            </a:pPr>
+            <a:r>
+              <a:t>Customer Engagement</a:t>
+            </a:r>
+          </a:p>
+        </p:txBody>
+      </p:sp>
+      <p:sp>
+        <p:nvSpPr>
+          <p:cNvPr id="13" name="TextBox 12"/>
+          <p:cNvSpPr txBox="1"/>
+          <p:nvPr/>
+        </p:nvSpPr>
+        <p:spPr>
+          <a:xfrm>
+            <a:off x="1033271" y="3520440"/>
+            <a:ext cx="4572000" cy="274320"/>
+          </a:xfrm>
+          <a:prstGeom prst="rect">
+            <a:avLst/>
+          </a:prstGeom>
+          <a:noFill/>
+        </p:spPr>
+        <p:txBody>
+          <a:bodyPr wrap="square" lIns="0" rIns="0" tIns="0" bIns="0">
+            <a:spAutoFit/>
+          </a:bodyPr>
+          <a:lstStyle/>
+          <a:p>
+            <a:pPr algn="l">
+              <a:lnSpc>
+                <a:spcPct val="100000"/>
+              </a:lnSpc>
+              <a:defRPr sz="1150" b="0">
+                <a:solidFill>
+                  <a:srgbClr val="71717A"/>
+                </a:solidFill>
+                <a:latin typeface="Segoe UI"/>
+              </a:defRPr>
+            </a:pPr>
+            <a:r>
+              <a:t>Reads DMs and comments, drafts the replies</a:t>
+            </a:r>
+          </a:p>
+        </p:txBody>
+      </p:sp>
+      <p:sp>
+        <p:nvSpPr>
+          <p:cNvPr id="14" name="Rounded Rectangle 13"/>
+          <p:cNvSpPr/>
+          <p:nvPr/>
+        </p:nvSpPr>
+        <p:spPr>
+          <a:xfrm>
+            <a:off x="6217920" y="3081528"/>
+            <a:ext cx="5029200" cy="841248"/>
+          </a:xfrm>
+          <a:prstGeom prst="roundRect">
+            <a:avLst>
+              <a:gd name="adj" fmla="val 8000"/>
+            </a:avLst>
+          </a:prstGeom>
+          <a:solidFill>
+            <a:srgbClr val="F4F4F5"/>
+          </a:solidFill>
+          <a:ln w="12700">
+            <a:solidFill>
+              <a:srgbClr val="E4E4E7"/>
+            </a:solidFill>
+          </a:ln>
+          <a:effectLst/>
+        </p:spPr>
+        <p:style>
+          <a:lnRef idx="1">
+            <a:schemeClr val="accent1"/>
+          </a:lnRef>
+          <a:fillRef idx="3">
+            <a:schemeClr val="accent1"/>
+          </a:fillRef>
+          <a:effectRef idx="2">
+            <a:schemeClr val="accent1"/>
+          </a:effectRef>
+          <a:fontRef idx="minor">
+            <a:schemeClr val="lt1"/>
+          </a:fontRef>
+        </p:style>
+        <p:txBody>
+          <a:bodyPr rtlCol="0" anchor="ctr"/>
+          <a:lstStyle/>
+          <a:p/>
+        </p:txBody>
+      </p:sp>
+      <p:sp>
+        <p:nvSpPr>
+          <p:cNvPr id="15" name="TextBox 14"/>
+          <p:cNvSpPr txBox="1"/>
+          <p:nvPr/>
+        </p:nvSpPr>
+        <p:spPr>
+          <a:xfrm>
+            <a:off x="6473952" y="3227832"/>
+            <a:ext cx="4572000" cy="274320"/>
+          </a:xfrm>
+          <a:prstGeom prst="rect">
+            <a:avLst/>
+          </a:prstGeom>
+          <a:noFill/>
+        </p:spPr>
+        <p:txBody>
+          <a:bodyPr wrap="square" lIns="0" rIns="0" tIns="0" bIns="0">
+            <a:spAutoFit/>
+          </a:bodyPr>
+          <a:lstStyle/>
+          <a:p>
+            <a:pPr algn="l">
+              <a:lnSpc>
+                <a:spcPct val="100000"/>
+              </a:lnSpc>
+              <a:defRPr sz="1350" b="1">
+                <a:solidFill>
+                  <a:srgbClr val="000000"/>
+                </a:solidFill>
+                <a:latin typeface="Segoe UI"/>
+              </a:defRPr>
+            </a:pPr>
+            <a:r>
+              <a:t>Inventory</a:t>
+            </a:r>
+          </a:p>
+        </p:txBody>
+      </p:sp>
+      <p:sp>
+        <p:nvSpPr>
+          <p:cNvPr id="16" name="TextBox 15"/>
+          <p:cNvSpPr txBox="1"/>
+          <p:nvPr/>
+        </p:nvSpPr>
+        <p:spPr>
+          <a:xfrm>
+            <a:off x="6473952" y="3520440"/>
+            <a:ext cx="4572000" cy="274320"/>
+          </a:xfrm>
+          <a:prstGeom prst="rect">
+            <a:avLst/>
+          </a:prstGeom>
+          <a:noFill/>
+        </p:spPr>
+        <p:txBody>
+          <a:bodyPr wrap="square" lIns="0" rIns="0" tIns="0" bIns="0">
+            <a:spAutoFit/>
+          </a:bodyPr>
+          <a:lstStyle/>
+          <a:p>
+            <a:pPr algn="l">
+              <a:lnSpc>
+                <a:spcPct val="100000"/>
+              </a:lnSpc>
+              <a:defRPr sz="1150" b="0">
+                <a:solidFill>
+                  <a:srgbClr val="71717A"/>
+                </a:solidFill>
+                <a:latin typeface="Segoe UI"/>
+              </a:defRPr>
+            </a:pPr>
+            <a:r>
+              <a:t>Quantities, reorder levels, what runs out first</a:t>
+            </a:r>
+          </a:p>
+        </p:txBody>
+      </p:sp>
+      <p:sp>
+        <p:nvSpPr>
+          <p:cNvPr id="17" name="Rounded Rectangle 16"/>
+          <p:cNvSpPr/>
+          <p:nvPr/>
+        </p:nvSpPr>
+        <p:spPr>
+          <a:xfrm>
+            <a:off x="777240" y="4105656"/>
+            <a:ext cx="5029200" cy="841248"/>
+          </a:xfrm>
+          <a:prstGeom prst="roundRect">
+            <a:avLst>
+              <a:gd name="adj" fmla="val 8000"/>
+            </a:avLst>
+          </a:prstGeom>
+          <a:solidFill>
+            <a:srgbClr val="F4F4F5"/>
+          </a:solidFill>
+          <a:ln w="12700">
+            <a:solidFill>
+              <a:srgbClr val="E4E4E7"/>
+            </a:solidFill>
+          </a:ln>
+          <a:effectLst/>
+        </p:spPr>
+        <p:style>
+          <a:lnRef idx="1">
+            <a:schemeClr val="accent1"/>
+          </a:lnRef>
+          <a:fillRef idx="3">
+            <a:schemeClr val="accent1"/>
+          </a:fillRef>
+          <a:effectRef idx="2">
+            <a:schemeClr val="accent1"/>
+          </a:effectRef>
+          <a:fontRef idx="minor">
+            <a:schemeClr val="lt1"/>
+          </a:fontRef>
+        </p:style>
+        <p:txBody>
+          <a:bodyPr rtlCol="0" anchor="ctr"/>
+          <a:lstStyle/>
+          <a:p/>
+        </p:txBody>
+      </p:sp>
+      <p:sp>
+        <p:nvSpPr>
+          <p:cNvPr id="18" name="TextBox 17"/>
+          <p:cNvSpPr txBox="1"/>
+          <p:nvPr/>
+        </p:nvSpPr>
+        <p:spPr>
+          <a:xfrm>
+            <a:off x="1033271" y="4251960"/>
+            <a:ext cx="4572000" cy="274320"/>
+          </a:xfrm>
+          <a:prstGeom prst="rect">
+            <a:avLst/>
+          </a:prstGeom>
+          <a:noFill/>
+        </p:spPr>
+        <p:txBody>
+          <a:bodyPr wrap="square" lIns="0" rIns="0" tIns="0" bIns="0">
+            <a:spAutoFit/>
+          </a:bodyPr>
+          <a:lstStyle/>
+          <a:p>
+            <a:pPr algn="l">
+              <a:lnSpc>
+                <a:spcPct val="100000"/>
+              </a:lnSpc>
+              <a:defRPr sz="1350" b="1">
+                <a:solidFill>
+                  <a:srgbClr val="000000"/>
+                </a:solidFill>
+                <a:latin typeface="Segoe UI"/>
+              </a:defRPr>
+            </a:pPr>
+            <a:r>
+              <a:t>Market Research</a:t>
+            </a:r>
+          </a:p>
+        </p:txBody>
+      </p:sp>
+      <p:sp>
+        <p:nvSpPr>
+          <p:cNvPr id="19" name="TextBox 18"/>
+          <p:cNvSpPr txBox="1"/>
+          <p:nvPr/>
+        </p:nvSpPr>
+        <p:spPr>
+          <a:xfrm>
+            <a:off x="1033271" y="4544568"/>
+            <a:ext cx="4572000" cy="274320"/>
+          </a:xfrm>
+          <a:prstGeom prst="rect">
+            <a:avLst/>
+          </a:prstGeom>
+          <a:noFill/>
+        </p:spPr>
+        <p:txBody>
+          <a:bodyPr wrap="square" lIns="0" rIns="0" tIns="0" bIns="0">
+            <a:spAutoFit/>
+          </a:bodyPr>
+          <a:lstStyle/>
+          <a:p>
+            <a:pPr algn="l">
+              <a:lnSpc>
+                <a:spcPct val="100000"/>
+              </a:lnSpc>
+              <a:defRPr sz="1150" b="0">
+                <a:solidFill>
+                  <a:srgbClr val="71717A"/>
+                </a:solidFill>
+                <a:latin typeface="Segoe UI"/>
+              </a:defRPr>
+            </a:pPr>
+            <a:r>
+              <a:t>What sells, what rivals charge, what people ask for</a:t>
+            </a:r>
+          </a:p>
+        </p:txBody>
+      </p:sp>
+      <p:sp>
+        <p:nvSpPr>
+          <p:cNvPr id="20" name="Rounded Rectangle 19"/>
+          <p:cNvSpPr/>
+          <p:nvPr/>
+        </p:nvSpPr>
+        <p:spPr>
+          <a:xfrm>
+            <a:off x="6217920" y="4105656"/>
+            <a:ext cx="5029200" cy="841248"/>
+          </a:xfrm>
+          <a:prstGeom prst="roundRect">
+            <a:avLst>
+              <a:gd name="adj" fmla="val 8000"/>
+            </a:avLst>
+          </a:prstGeom>
+          <a:solidFill>
+            <a:srgbClr val="F4F4F5"/>
+          </a:solidFill>
+          <a:ln w="12700">
+            <a:solidFill>
+              <a:srgbClr val="E4E4E7"/>
+            </a:solidFill>
+          </a:ln>
+          <a:effectLst/>
+        </p:spPr>
+        <p:style>
+          <a:lnRef idx="1">
+            <a:schemeClr val="accent1"/>
+          </a:lnRef>
+          <a:fillRef idx="3">
+            <a:schemeClr val="accent1"/>
+          </a:fillRef>
+          <a:effectRef idx="2">
+            <a:schemeClr val="accent1"/>
+          </a:effectRef>
+          <a:fontRef idx="minor">
+            <a:schemeClr val="lt1"/>
+          </a:fontRef>
+        </p:style>
+        <p:txBody>
+          <a:bodyPr rtlCol="0" anchor="ctr"/>
+          <a:lstStyle/>
+          <a:p/>
+        </p:txBody>
+      </p:sp>
+      <p:sp>
+        <p:nvSpPr>
+          <p:cNvPr id="21" name="TextBox 20"/>
+          <p:cNvSpPr txBox="1"/>
+          <p:nvPr/>
+        </p:nvSpPr>
+        <p:spPr>
+          <a:xfrm>
+            <a:off x="6473952" y="4251960"/>
+            <a:ext cx="4572000" cy="274320"/>
+          </a:xfrm>
+          <a:prstGeom prst="rect">
+            <a:avLst/>
+          </a:prstGeom>
+          <a:noFill/>
+        </p:spPr>
+        <p:txBody>
+          <a:bodyPr wrap="square" lIns="0" rIns="0" tIns="0" bIns="0">
+            <a:spAutoFit/>
+          </a:bodyPr>
+          <a:lstStyle/>
+          <a:p>
+            <a:pPr algn="l">
+              <a:lnSpc>
+                <a:spcPct val="100000"/>
+              </a:lnSpc>
+              <a:defRPr sz="1350" b="1">
+                <a:solidFill>
+                  <a:srgbClr val="000000"/>
+                </a:solidFill>
+                <a:latin typeface="Segoe UI"/>
+              </a:defRPr>
+            </a:pPr>
+            <a:r>
+              <a:t>Pricing &amp; Cost</a:t>
+            </a:r>
+          </a:p>
+        </p:txBody>
+      </p:sp>
+      <p:sp>
+        <p:nvSpPr>
+          <p:cNvPr id="22" name="TextBox 21"/>
+          <p:cNvSpPr txBox="1"/>
+          <p:nvPr/>
+        </p:nvSpPr>
+        <p:spPr>
+          <a:xfrm>
+            <a:off x="6473952" y="4544568"/>
+            <a:ext cx="4572000" cy="274320"/>
+          </a:xfrm>
+          <a:prstGeom prst="rect">
+            <a:avLst/>
+          </a:prstGeom>
+          <a:noFill/>
+        </p:spPr>
+        <p:txBody>
+          <a:bodyPr wrap="square" lIns="0" rIns="0" tIns="0" bIns="0">
+            <a:spAutoFit/>
+          </a:bodyPr>
+          <a:lstStyle/>
+          <a:p>
+            <a:pPr algn="l">
+              <a:lnSpc>
+                <a:spcPct val="100000"/>
+              </a:lnSpc>
+              <a:defRPr sz="1150" b="0">
+                <a:solidFill>
+                  <a:srgbClr val="71717A"/>
+                </a:solidFill>
+                <a:latin typeface="Segoe UI"/>
+              </a:defRPr>
+            </a:pPr>
+            <a:r>
+              <a:t>Unit cost, price, margin, break-even</a:t>
+            </a:r>
+          </a:p>
+        </p:txBody>
+      </p:sp>
+      <p:sp>
+        <p:nvSpPr>
+          <p:cNvPr id="23" name="Rounded Rectangle 22"/>
+          <p:cNvSpPr/>
+          <p:nvPr/>
+        </p:nvSpPr>
+        <p:spPr>
+          <a:xfrm>
+            <a:off x="777240" y="5129784"/>
+            <a:ext cx="5029200" cy="841248"/>
+          </a:xfrm>
+          <a:prstGeom prst="roundRect">
+            <a:avLst>
+              <a:gd name="adj" fmla="val 8000"/>
+            </a:avLst>
+          </a:prstGeom>
+          <a:solidFill>
+            <a:srgbClr val="F4F4F5"/>
+          </a:solidFill>
+          <a:ln w="12700">
+            <a:solidFill>
+              <a:srgbClr val="E4E4E7"/>
+            </a:solidFill>
+          </a:ln>
+          <a:effectLst/>
+        </p:spPr>
+        <p:style>
+          <a:lnRef idx="1">
+            <a:schemeClr val="accent1"/>
+          </a:lnRef>
+          <a:fillRef idx="3">
+            <a:schemeClr val="accent1"/>
+          </a:fillRef>
+          <a:effectRef idx="2">
+            <a:schemeClr val="accent1"/>
+          </a:effectRef>
+          <a:fontRef idx="minor">
+            <a:schemeClr val="lt1"/>
+          </a:fontRef>
+        </p:style>
+        <p:txBody>
+          <a:bodyPr rtlCol="0" anchor="ctr"/>
+          <a:lstStyle/>
+          <a:p/>
+        </p:txBody>
+      </p:sp>
+      <p:sp>
+        <p:nvSpPr>
+          <p:cNvPr id="24" name="TextBox 23"/>
+          <p:cNvSpPr txBox="1"/>
+          <p:nvPr/>
+        </p:nvSpPr>
+        <p:spPr>
+          <a:xfrm>
+            <a:off x="1033271" y="5276088"/>
+            <a:ext cx="4572000" cy="274320"/>
+          </a:xfrm>
+          <a:prstGeom prst="rect">
+            <a:avLst/>
+          </a:prstGeom>
+          <a:noFill/>
+        </p:spPr>
+        <p:txBody>
+          <a:bodyPr wrap="square" lIns="0" rIns="0" tIns="0" bIns="0">
+            <a:spAutoFit/>
+          </a:bodyPr>
+          <a:lstStyle/>
+          <a:p>
+            <a:pPr algn="l">
+              <a:lnSpc>
+                <a:spcPct val="100000"/>
+              </a:lnSpc>
+              <a:defRPr sz="1350" b="1">
+                <a:solidFill>
+                  <a:srgbClr val="000000"/>
+                </a:solidFill>
+                <a:latin typeface="Segoe UI"/>
+              </a:defRPr>
+            </a:pPr>
+            <a:r>
+              <a:t>Product Vision</a:t>
+            </a:r>
+          </a:p>
+        </p:txBody>
+      </p:sp>
+      <p:sp>
+        <p:nvSpPr>
+          <p:cNvPr id="25" name="TextBox 24"/>
+          <p:cNvSpPr txBox="1"/>
+          <p:nvPr/>
+        </p:nvSpPr>
+        <p:spPr>
+          <a:xfrm>
+            <a:off x="1033271" y="5568696"/>
+            <a:ext cx="4572000" cy="274320"/>
+          </a:xfrm>
+          <a:prstGeom prst="rect">
+            <a:avLst/>
+          </a:prstGeom>
+          <a:noFill/>
+        </p:spPr>
+        <p:txBody>
+          <a:bodyPr wrap="square" lIns="0" rIns="0" tIns="0" bIns="0">
+            <a:spAutoFit/>
+          </a:bodyPr>
+          <a:lstStyle/>
+          <a:p>
+            <a:pPr algn="l">
+              <a:lnSpc>
+                <a:spcPct val="100000"/>
+              </a:lnSpc>
+              <a:defRPr sz="1150" b="0">
+                <a:solidFill>
+                  <a:srgbClr val="71717A"/>
+                </a:solidFill>
+                <a:latin typeface="Segoe UI"/>
+              </a:defRPr>
+            </a:pPr>
+            <a:r>
+              <a:t>Reads a photo and says what it is and whether it sells</a:t>
+            </a:r>
+          </a:p>
+        </p:txBody>
+      </p:sp>
+      <p:sp>
+        <p:nvSpPr>
+          <p:cNvPr id="26" name="Rounded Rectangle 25"/>
+          <p:cNvSpPr/>
+          <p:nvPr/>
+        </p:nvSpPr>
+        <p:spPr>
+          <a:xfrm>
+            <a:off x="6217920" y="5129784"/>
+            <a:ext cx="5029200" cy="841248"/>
+          </a:xfrm>
+          <a:prstGeom prst="roundRect">
+            <a:avLst>
+              <a:gd name="adj" fmla="val 8000"/>
+            </a:avLst>
+          </a:prstGeom>
+          <a:solidFill>
+            <a:srgbClr val="F4F4F5"/>
+          </a:solidFill>
+          <a:ln w="12700">
+            <a:solidFill>
+              <a:srgbClr val="E4E4E7"/>
+            </a:solidFill>
+          </a:ln>
+          <a:effectLst/>
+        </p:spPr>
+        <p:style>
+          <a:lnRef idx="1">
+            <a:schemeClr val="accent1"/>
+          </a:lnRef>
+          <a:fillRef idx="3">
+            <a:schemeClr val="accent1"/>
+          </a:fillRef>
+          <a:effectRef idx="2">
+            <a:schemeClr val="accent1"/>
+          </a:effectRef>
+          <a:fontRef idx="minor">
+            <a:schemeClr val="lt1"/>
+          </a:fontRef>
+        </p:style>
+        <p:txBody>
+          <a:bodyPr rtlCol="0" anchor="ctr"/>
+          <a:lstStyle/>
+          <a:p/>
+        </p:txBody>
+      </p:sp>
+      <p:sp>
+        <p:nvSpPr>
+          <p:cNvPr id="27" name="TextBox 26"/>
+          <p:cNvSpPr txBox="1"/>
+          <p:nvPr/>
+        </p:nvSpPr>
+        <p:spPr>
+          <a:xfrm>
+            <a:off x="6473952" y="5276088"/>
+            <a:ext cx="4572000" cy="274320"/>
+          </a:xfrm>
+          <a:prstGeom prst="rect">
+            <a:avLst/>
+          </a:prstGeom>
+          <a:noFill/>
+        </p:spPr>
+        <p:txBody>
+          <a:bodyPr wrap="square" lIns="0" rIns="0" tIns="0" bIns="0">
+            <a:spAutoFit/>
+          </a:bodyPr>
+          <a:lstStyle/>
+          <a:p>
+            <a:pPr algn="l">
+              <a:lnSpc>
+                <a:spcPct val="100000"/>
+              </a:lnSpc>
+              <a:defRPr sz="1350" b="1">
+                <a:solidFill>
+                  <a:srgbClr val="000000"/>
+                </a:solidFill>
+                <a:latin typeface="Segoe UI"/>
+              </a:defRPr>
+            </a:pPr>
+            <a:r>
+              <a:t>Reporting</a:t>
+            </a:r>
+          </a:p>
+        </p:txBody>
+      </p:sp>
+      <p:sp>
+        <p:nvSpPr>
+          <p:cNvPr id="28" name="TextBox 27"/>
+          <p:cNvSpPr txBox="1"/>
+          <p:nvPr/>
+        </p:nvSpPr>
+        <p:spPr>
+          <a:xfrm>
+            <a:off x="6473952" y="5568696"/>
+            <a:ext cx="4572000" cy="274320"/>
+          </a:xfrm>
+          <a:prstGeom prst="rect">
+            <a:avLst/>
+          </a:prstGeom>
+          <a:noFill/>
+        </p:spPr>
+        <p:txBody>
+          <a:bodyPr wrap="square" lIns="0" rIns="0" tIns="0" bIns="0">
+            <a:spAutoFit/>
+          </a:bodyPr>
+          <a:lstStyle/>
+          <a:p>
+            <a:pPr algn="l">
+              <a:lnSpc>
+                <a:spcPct val="100000"/>
+              </a:lnSpc>
+              <a:defRPr sz="1150" b="0">
+                <a:solidFill>
+                  <a:srgbClr val="71717A"/>
+                </a:solidFill>
+                <a:latin typeface="Segoe UI"/>
+              </a:defRPr>
+            </a:pPr>
+            <a:r>
+              <a:t>Writes the day up in the owner's own numbers</a:t>
+            </a:r>
+          </a:p>
+        </p:txBody>
+      </p:sp>
+      <p:sp>
+        <p:nvSpPr>
+          <p:cNvPr id="29" name="TextBox 28"/>
+          <p:cNvSpPr txBox="1"/>
+          <p:nvPr/>
+        </p:nvSpPr>
+        <p:spPr>
+          <a:xfrm>
+            <a:off x="777240" y="6327648"/>
+            <a:ext cx="2743200" cy="274320"/>
+          </a:xfrm>
+          <a:prstGeom prst="rect">
+            <a:avLst/>
+          </a:prstGeom>
+          <a:noFill/>
+        </p:spPr>
+        <p:txBody>
+          <a:bodyPr wrap="square" lIns="0" rIns="0" tIns="0" bIns="0">
+            <a:spAutoFit/>
+          </a:bodyPr>
+          <a:lstStyle/>
+          <a:p>
+            <a:pPr algn="l">
+              <a:lnSpc>
+                <a:spcPct val="100000"/>
+              </a:lnSpc>
+              <a:defRPr sz="1050" b="0">
+                <a:solidFill>
+                  <a:srgbClr val="A1A1AA"/>
+                </a:solidFill>
+                <a:latin typeface="Segoe UI"/>
+              </a:defRPr>
+            </a:pPr>
+            <a:r>
+              <a:t>Lucida</a:t>
+            </a:r>
+          </a:p>
+        </p:txBody>
+      </p:sp>
+      <p:sp>
+        <p:nvSpPr>
+          <p:cNvPr id="30" name="TextBox 29"/>
+          <p:cNvSpPr txBox="1"/>
+          <p:nvPr/>
+        </p:nvSpPr>
+        <p:spPr>
+          <a:xfrm>
+            <a:off x="11064240" y="6327648"/>
+            <a:ext cx="365760" cy="274320"/>
+          </a:xfrm>
+          <a:prstGeom prst="rect">
+            <a:avLst/>
+          </a:prstGeom>
+          <a:noFill/>
+        </p:spPr>
+        <p:txBody>
+          <a:bodyPr wrap="square" lIns="0" rIns="0" tIns="0" bIns="0">
+            <a:spAutoFit/>
+          </a:bodyPr>
+          <a:lstStyle/>
+          <a:p>
+            <a:pPr algn="r">
+              <a:lnSpc>
+                <a:spcPct val="100000"/>
+              </a:lnSpc>
+              <a:defRPr sz="1050" b="0">
+                <a:solidFill>
+                  <a:srgbClr val="A1A1AA"/>
+                </a:solidFill>
+                <a:latin typeface="Segoe UI"/>
+              </a:defRPr>
+            </a:pPr>
+            <a:r>
+              <a:t>4</a:t>
+            </a:r>
+          </a:p>
+        </p:txBody>
+      </p:sp>
     </p:spTree>
   </p:cSld>
   <p:clrMapOvr>
@@ -4875,13 +7023,13 @@
 </p:sld>
 </file>
 
-<file path=ppt/slides/slide7.xml><?xml version="1.0" encoding="utf-8"?>
-<p:sld xmlns:a="http://schemas.openxmlformats.org/drawingml/2006/main" xmlns:r="http://schemas.openxmlformats.org/officeDocument/2006/relationships" xmlns:p="http://schemas.openxmlformats.org/presentationml/2006/main">
+<file path=ppt/slides/slide5.xml><?xml version="1.0" encoding="utf-8"?>
+<p:sld xmlns:a="http://schemas.openxmlformats.org/drawingml/2006/main" xmlns:p="http://schemas.openxmlformats.org/presentationml/2006/main" xmlns:r="http://schemas.openxmlformats.org/officeDocument/2006/relationships">
   <p:cSld>
     <p:bg>
       <p:bgPr>
         <a:solidFill>
-          <a:srgbClr val="0F172A"/>
+          <a:srgbClr val="FFFFFF"/>
         </a:solidFill>
         <a:effectLst/>
       </p:bgPr>
@@ -4892,14 +7040,7 @@
         <p:cNvGrpSpPr/>
         <p:nvPr/>
       </p:nvGrpSpPr>
-      <p:grpSpPr>
-        <a:xfrm>
-          <a:off x="0" y="0"/>
-          <a:ext cx="0" cy="0"/>
-          <a:chOff x="0" y="0"/>
-          <a:chExt cx="0" cy="0"/>
-        </a:xfrm>
-      </p:grpSpPr>
+      <p:grpSpPr/>
       <p:sp>
         <p:nvSpPr>
           <p:cNvPr id="2" name="TextBox 1"/>
@@ -4908,29 +7049,33 @@
         </p:nvSpPr>
         <p:spPr>
           <a:xfrm>
-            <a:off x="640080" y="457200"/>
-            <a:ext cx="7772400" cy="640080"/>
-          </a:xfrm>
-          <a:prstGeom prst="rect">
-            <a:avLst/>
-          </a:prstGeom>
-          <a:noFill/>
-        </p:spPr>
-        <p:txBody>
-          <a:bodyPr wrap="none">
-            <a:spAutoFit/>
-          </a:bodyPr>
-          <a:lstStyle/>
-          <a:p>
-            <a:pPr>
-              <a:defRPr sz="2800" b="1">
-                <a:solidFill>
-                  <a:srgbClr val="FFFFFF"/>
-                </a:solidFill>
-              </a:defRPr>
-            </a:pPr>
-            <a:r>
-              <a:t>Tools, Memory, and Reliability</a:t>
+            <a:off x="777240" y="566928"/>
+            <a:ext cx="7315200" cy="274320"/>
+          </a:xfrm>
+          <a:prstGeom prst="rect">
+            <a:avLst/>
+          </a:prstGeom>
+          <a:noFill/>
+        </p:spPr>
+        <p:txBody>
+          <a:bodyPr wrap="square" lIns="0" rIns="0" tIns="0" bIns="0">
+            <a:spAutoFit/>
+          </a:bodyPr>
+          <a:lstStyle/>
+          <a:p>
+            <a:pPr algn="l">
+              <a:lnSpc>
+                <a:spcPct val="100000"/>
+              </a:lnSpc>
+              <a:defRPr sz="1150" b="1">
+                <a:solidFill>
+                  <a:srgbClr val="7B1E22"/>
+                </a:solidFill>
+                <a:latin typeface="Segoe UI"/>
+              </a:defRPr>
+            </a:pPr>
+            <a:r>
+              <a:t>AGENT COLLABORATION</a:t>
             </a:r>
           </a:p>
         </p:txBody>
@@ -4943,209 +7088,809 @@
         </p:nvSpPr>
         <p:spPr>
           <a:xfrm>
-            <a:off x="731520" y="1371600"/>
-            <a:ext cx="5120640" cy="3474720"/>
-          </a:xfrm>
-          <a:prstGeom prst="rect">
-            <a:avLst/>
-          </a:prstGeom>
-          <a:noFill/>
-        </p:spPr>
-        <p:txBody>
-          <a:bodyPr wrap="none">
-            <a:spAutoFit/>
-          </a:bodyPr>
-          <a:lstStyle/>
-          <a:p>
-            <a:pPr>
-              <a:spcAft>
-                <a:spcPts val="900"/>
-              </a:spcAft>
-              <a:defRPr sz="1900">
-                <a:solidFill>
-                  <a:srgbClr val="FFFFFF"/>
-                </a:solidFill>
-              </a:defRPr>
-            </a:pPr>
-            <a:r>
-              <a:t>• Web search and local fallback search</a:t>
-            </a:r>
-          </a:p>
-          <a:p>
-            <a:pPr>
-              <a:spcAft>
-                <a:spcPts val="900"/>
-              </a:spcAft>
-              <a:defRPr sz="1900">
-                <a:solidFill>
-                  <a:srgbClr val="FFFFFF"/>
-                </a:solidFill>
-              </a:defRPr>
-            </a:pPr>
-            <a:r>
-              <a:t>• External business APIs</a:t>
-            </a:r>
-          </a:p>
-          <a:p>
-            <a:pPr>
-              <a:spcAft>
-                <a:spcPts val="900"/>
-              </a:spcAft>
-              <a:defRPr sz="1900">
-                <a:solidFill>
-                  <a:srgbClr val="FFFFFF"/>
-                </a:solidFill>
-              </a:defRPr>
-            </a:pPr>
-            <a:r>
-              <a:t>• Python code execution sandbox</a:t>
-            </a:r>
-          </a:p>
-          <a:p>
-            <a:pPr>
-              <a:spcAft>
-                <a:spcPts val="900"/>
-              </a:spcAft>
-              <a:defRPr sz="1900">
-                <a:solidFill>
-                  <a:srgbClr val="FFFFFF"/>
-                </a:solidFill>
-              </a:defRPr>
-            </a:pPr>
-            <a:r>
-              <a:t>• RAG and vector memory retrieval</a:t>
-            </a:r>
-          </a:p>
-          <a:p>
-            <a:pPr>
-              <a:spcAft>
-                <a:spcPts val="900"/>
-              </a:spcAft>
-              <a:defRPr sz="1900">
-                <a:solidFill>
-                  <a:srgbClr val="FFFFFF"/>
-                </a:solidFill>
-              </a:defRPr>
-            </a:pPr>
-            <a:r>
-              <a:t>• SQLite persistence and graph state</a:t>
-            </a:r>
-          </a:p>
-          <a:p>
-            <a:pPr>
-              <a:spcAft>
-                <a:spcPts val="900"/>
-              </a:spcAft>
-              <a:defRPr sz="1900">
-                <a:solidFill>
-                  <a:srgbClr val="FFFFFF"/>
-                </a:solidFill>
-              </a:defRPr>
-            </a:pPr>
-            <a:r>
-              <a:t>• Logging and error containment</a:t>
-            </a:r>
-          </a:p>
-          <a:p>
-            <a:pPr>
-              <a:spcAft>
-                <a:spcPts val="900"/>
-              </a:spcAft>
-              <a:defRPr sz="1900">
-                <a:solidFill>
-                  <a:srgbClr val="FFFFFF"/>
-                </a:solidFill>
-              </a:defRPr>
-            </a:pPr>
-            <a:r>
-              <a:t>• Owner approval gates before irreversible actions</a:t>
-            </a:r>
-          </a:p>
-        </p:txBody>
-      </p:sp>
-      <p:sp>
-        <p:nvSpPr>
-          <p:cNvPr id="4" name="Rectangle 3"/>
-          <p:cNvSpPr/>
-          <p:nvPr/>
-        </p:nvSpPr>
-        <p:spPr>
-          <a:xfrm>
-            <a:off x="6675120" y="1920240"/>
-            <a:ext cx="4389120" cy="2468880"/>
-          </a:xfrm>
-          <a:prstGeom prst="rect">
-            <a:avLst/>
-          </a:prstGeom>
-          <a:solidFill>
-            <a:srgbClr val="0F766E"/>
-          </a:solidFill>
-          <a:ln w="15240">
+            <a:off x="777240" y="868680"/>
+            <a:ext cx="10607040" cy="731520"/>
+          </a:xfrm>
+          <a:prstGeom prst="rect">
+            <a:avLst/>
+          </a:prstGeom>
+          <a:noFill/>
+        </p:spPr>
+        <p:txBody>
+          <a:bodyPr wrap="square" lIns="0" rIns="0" tIns="0" bIns="0">
+            <a:spAutoFit/>
+          </a:bodyPr>
+          <a:lstStyle/>
+          <a:p>
+            <a:pPr algn="l">
+              <a:lnSpc>
+                <a:spcPct val="100000"/>
+              </a:lnSpc>
+              <a:defRPr sz="3100" b="1">
+                <a:solidFill>
+                  <a:srgbClr val="000000"/>
+                </a:solidFill>
+                <a:latin typeface="Segoe UI"/>
+              </a:defRPr>
+            </a:pPr>
+            <a:r>
+              <a:t>What one request actually does</a:t>
+            </a:r>
+          </a:p>
+        </p:txBody>
+      </p:sp>
+      <p:cxnSp>
+        <p:nvCxnSpPr>
+          <p:cNvPr id="4" name="Connector 3"/>
+          <p:cNvCxnSpPr/>
+          <p:nvPr/>
+        </p:nvCxnSpPr>
+        <p:spPr>
+          <a:xfrm>
+            <a:off x="777240" y="1572768"/>
+            <a:ext cx="10607040" cy="0"/>
+          </a:xfrm>
+          <a:prstGeom prst="line">
+            <a:avLst/>
+          </a:prstGeom>
+          <a:ln w="12700">
             <a:solidFill>
-              <a:srgbClr val="FFFFFF"/>
+              <a:srgbClr val="E4E4E7"/>
             </a:solidFill>
           </a:ln>
         </p:spPr>
         <p:style>
-          <a:lnRef idx="1">
+          <a:lnRef idx="2">
             <a:schemeClr val="accent1"/>
           </a:lnRef>
-          <a:fillRef idx="3">
+          <a:fillRef idx="0">
             <a:schemeClr val="accent1"/>
           </a:fillRef>
-          <a:effectRef idx="2">
+          <a:effectRef idx="1">
             <a:schemeClr val="accent1"/>
           </a:effectRef>
           <a:fontRef idx="minor">
-            <a:schemeClr val="lt1"/>
+            <a:schemeClr val="tx1"/>
           </a:fontRef>
         </p:style>
-        <p:txBody>
-          <a:bodyPr wrap="square" lIns="274320" rIns="274320" rtlCol="0" anchor="ctr"/>
-          <a:lstStyle/>
-          <a:p>
-            <a:pPr algn="ctr">
-              <a:spcAft>
-                <a:spcPts val="1200"/>
-              </a:spcAft>
-              <a:defRPr sz="2200">
-                <a:solidFill>
-                  <a:srgbClr val="FFFFFF"/>
-                </a:solidFill>
-              </a:defRPr>
-            </a:pPr>
-            <a:r>
-              <a:t>Shared Memory</a:t>
-            </a:r>
-          </a:p>
-          <a:p>
-            <a:pPr algn="ctr">
-              <a:spcAft>
-                <a:spcPts val="1200"/>
-              </a:spcAft>
-              <a:defRPr sz="1700">
-                <a:solidFill>
-                  <a:srgbClr val="FFFFFF"/>
-                </a:solidFill>
-              </a:defRPr>
-            </a:pPr>
-            <a:r>
-              <a:t>Structured data + semantic retrieval</a:t>
-            </a:r>
-          </a:p>
-          <a:p>
-            <a:pPr algn="ctr">
-              <a:spcAft>
-                <a:spcPts val="1200"/>
-              </a:spcAft>
-              <a:defRPr sz="1700">
-                <a:solidFill>
-                  <a:srgbClr val="FFFFFF"/>
-                </a:solidFill>
-              </a:defRPr>
-            </a:pPr>
-            <a:r>
-              <a:t>Reliable coordination across agents</a:t>
+      </p:cxnSp>
+      <p:sp>
+        <p:nvSpPr>
+          <p:cNvPr id="5" name="TextBox 4"/>
+          <p:cNvSpPr txBox="1"/>
+          <p:nvPr/>
+        </p:nvSpPr>
+        <p:spPr>
+          <a:xfrm>
+            <a:off x="777240" y="1965960"/>
+            <a:ext cx="2103120" cy="320040"/>
+          </a:xfrm>
+          <a:prstGeom prst="rect">
+            <a:avLst/>
+          </a:prstGeom>
+          <a:noFill/>
+        </p:spPr>
+        <p:txBody>
+          <a:bodyPr wrap="square" lIns="0" rIns="0" tIns="0" bIns="0">
+            <a:spAutoFit/>
+          </a:bodyPr>
+          <a:lstStyle/>
+          <a:p>
+            <a:pPr algn="l">
+              <a:lnSpc>
+                <a:spcPct val="100000"/>
+              </a:lnSpc>
+              <a:defRPr sz="1300" b="1">
+                <a:solidFill>
+                  <a:srgbClr val="7B1E22"/>
+                </a:solidFill>
+                <a:latin typeface="Segoe UI"/>
+              </a:defRPr>
+            </a:pPr>
+            <a:r>
+              <a:t>Owner</a:t>
+            </a:r>
+          </a:p>
+        </p:txBody>
+      </p:sp>
+      <p:sp>
+        <p:nvSpPr>
+          <p:cNvPr id="6" name="TextBox 5"/>
+          <p:cNvSpPr txBox="1"/>
+          <p:nvPr/>
+        </p:nvSpPr>
+        <p:spPr>
+          <a:xfrm>
+            <a:off x="3063240" y="1965960"/>
+            <a:ext cx="8321040" cy="320040"/>
+          </a:xfrm>
+          <a:prstGeom prst="rect">
+            <a:avLst/>
+          </a:prstGeom>
+          <a:noFill/>
+        </p:spPr>
+        <p:txBody>
+          <a:bodyPr wrap="square" lIns="0" rIns="0" tIns="0" bIns="0">
+            <a:spAutoFit/>
+          </a:bodyPr>
+          <a:lstStyle/>
+          <a:p>
+            <a:pPr algn="l">
+              <a:lnSpc>
+                <a:spcPct val="100000"/>
+              </a:lnSpc>
+              <a:defRPr sz="1300" b="0">
+                <a:solidFill>
+                  <a:srgbClr val="3F3F46"/>
+                </a:solidFill>
+                <a:latin typeface="Segoe UI"/>
+              </a:defRPr>
+            </a:pPr>
+            <a:r>
+              <a:t>“Should I run an ad for the tote bags this week?”</a:t>
+            </a:r>
+          </a:p>
+        </p:txBody>
+      </p:sp>
+      <p:sp>
+        <p:nvSpPr>
+          <p:cNvPr id="7" name="TextBox 6"/>
+          <p:cNvSpPr txBox="1"/>
+          <p:nvPr/>
+        </p:nvSpPr>
+        <p:spPr>
+          <a:xfrm>
+            <a:off x="777240" y="2441448"/>
+            <a:ext cx="2103120" cy="320040"/>
+          </a:xfrm>
+          <a:prstGeom prst="rect">
+            <a:avLst/>
+          </a:prstGeom>
+          <a:noFill/>
+        </p:spPr>
+        <p:txBody>
+          <a:bodyPr wrap="square" lIns="0" rIns="0" tIns="0" bIns="0">
+            <a:spAutoFit/>
+          </a:bodyPr>
+          <a:lstStyle/>
+          <a:p>
+            <a:pPr algn="l">
+              <a:lnSpc>
+                <a:spcPct val="100000"/>
+              </a:lnSpc>
+              <a:defRPr sz="1300" b="1">
+                <a:solidFill>
+                  <a:srgbClr val="7B1E22"/>
+                </a:solidFill>
+                <a:latin typeface="Segoe UI"/>
+              </a:defRPr>
+            </a:pPr>
+            <a:r>
+              <a:t>Supervisor</a:t>
+            </a:r>
+          </a:p>
+        </p:txBody>
+      </p:sp>
+      <p:sp>
+        <p:nvSpPr>
+          <p:cNvPr id="8" name="TextBox 7"/>
+          <p:cNvSpPr txBox="1"/>
+          <p:nvPr/>
+        </p:nvSpPr>
+        <p:spPr>
+          <a:xfrm>
+            <a:off x="3063240" y="2441448"/>
+            <a:ext cx="8321040" cy="320040"/>
+          </a:xfrm>
+          <a:prstGeom prst="rect">
+            <a:avLst/>
+          </a:prstGeom>
+          <a:noFill/>
+        </p:spPr>
+        <p:txBody>
+          <a:bodyPr wrap="square" lIns="0" rIns="0" tIns="0" bIns="0">
+            <a:spAutoFit/>
+          </a:bodyPr>
+          <a:lstStyle/>
+          <a:p>
+            <a:pPr algn="l">
+              <a:lnSpc>
+                <a:spcPct val="100000"/>
+              </a:lnSpc>
+              <a:defRPr sz="1300" b="0">
+                <a:solidFill>
+                  <a:srgbClr val="3F3F46"/>
+                </a:solidFill>
+                <a:latin typeface="Segoe UI"/>
+              </a:defRPr>
+            </a:pPr>
+            <a:r>
+              <a:t>reads it, plans, routes — not a fixed sequence</a:t>
+            </a:r>
+          </a:p>
+        </p:txBody>
+      </p:sp>
+      <p:sp>
+        <p:nvSpPr>
+          <p:cNvPr id="9" name="TextBox 8"/>
+          <p:cNvSpPr txBox="1"/>
+          <p:nvPr/>
+        </p:nvSpPr>
+        <p:spPr>
+          <a:xfrm>
+            <a:off x="777240" y="2916936"/>
+            <a:ext cx="2103120" cy="320040"/>
+          </a:xfrm>
+          <a:prstGeom prst="rect">
+            <a:avLst/>
+          </a:prstGeom>
+          <a:noFill/>
+        </p:spPr>
+        <p:txBody>
+          <a:bodyPr wrap="square" lIns="0" rIns="0" tIns="0" bIns="0">
+            <a:spAutoFit/>
+          </a:bodyPr>
+          <a:lstStyle/>
+          <a:p>
+            <a:pPr algn="l">
+              <a:lnSpc>
+                <a:spcPct val="100000"/>
+              </a:lnSpc>
+              <a:defRPr sz="1300" b="1">
+                <a:solidFill>
+                  <a:srgbClr val="000000"/>
+                </a:solidFill>
+                <a:latin typeface="Segoe UI"/>
+              </a:defRPr>
+            </a:pPr>
+            <a:r>
+              <a:t>Market Research</a:t>
+            </a:r>
+          </a:p>
+        </p:txBody>
+      </p:sp>
+      <p:sp>
+        <p:nvSpPr>
+          <p:cNvPr id="10" name="TextBox 9"/>
+          <p:cNvSpPr txBox="1"/>
+          <p:nvPr/>
+        </p:nvSpPr>
+        <p:spPr>
+          <a:xfrm>
+            <a:off x="3063240" y="2916936"/>
+            <a:ext cx="8321040" cy="320040"/>
+          </a:xfrm>
+          <a:prstGeom prst="rect">
+            <a:avLst/>
+          </a:prstGeom>
+          <a:noFill/>
+        </p:spPr>
+        <p:txBody>
+          <a:bodyPr wrap="square" lIns="0" rIns="0" tIns="0" bIns="0">
+            <a:spAutoFit/>
+          </a:bodyPr>
+          <a:lstStyle/>
+          <a:p>
+            <a:pPr algn="l">
+              <a:lnSpc>
+                <a:spcPct val="100000"/>
+              </a:lnSpc>
+              <a:defRPr sz="1300" b="0">
+                <a:solidFill>
+                  <a:srgbClr val="3F3F46"/>
+                </a:solidFill>
+                <a:latin typeface="Segoe UI"/>
+              </a:defRPr>
+            </a:pPr>
+            <a:r>
+              <a:t>checks demand and what rivals charge → memory</a:t>
+            </a:r>
+          </a:p>
+        </p:txBody>
+      </p:sp>
+      <p:sp>
+        <p:nvSpPr>
+          <p:cNvPr id="11" name="TextBox 10"/>
+          <p:cNvSpPr txBox="1"/>
+          <p:nvPr/>
+        </p:nvSpPr>
+        <p:spPr>
+          <a:xfrm>
+            <a:off x="777240" y="3392424"/>
+            <a:ext cx="2103120" cy="320040"/>
+          </a:xfrm>
+          <a:prstGeom prst="rect">
+            <a:avLst/>
+          </a:prstGeom>
+          <a:noFill/>
+        </p:spPr>
+        <p:txBody>
+          <a:bodyPr wrap="square" lIns="0" rIns="0" tIns="0" bIns="0">
+            <a:spAutoFit/>
+          </a:bodyPr>
+          <a:lstStyle/>
+          <a:p>
+            <a:pPr algn="l">
+              <a:lnSpc>
+                <a:spcPct val="100000"/>
+              </a:lnSpc>
+              <a:defRPr sz="1300" b="1">
+                <a:solidFill>
+                  <a:srgbClr val="000000"/>
+                </a:solidFill>
+                <a:latin typeface="Segoe UI"/>
+              </a:defRPr>
+            </a:pPr>
+            <a:r>
+              <a:t>Pricing</a:t>
+            </a:r>
+          </a:p>
+        </p:txBody>
+      </p:sp>
+      <p:sp>
+        <p:nvSpPr>
+          <p:cNvPr id="12" name="TextBox 11"/>
+          <p:cNvSpPr txBox="1"/>
+          <p:nvPr/>
+        </p:nvSpPr>
+        <p:spPr>
+          <a:xfrm>
+            <a:off x="3063240" y="3392424"/>
+            <a:ext cx="8321040" cy="320040"/>
+          </a:xfrm>
+          <a:prstGeom prst="rect">
+            <a:avLst/>
+          </a:prstGeom>
+          <a:noFill/>
+        </p:spPr>
+        <p:txBody>
+          <a:bodyPr wrap="square" lIns="0" rIns="0" tIns="0" bIns="0">
+            <a:spAutoFit/>
+          </a:bodyPr>
+          <a:lstStyle/>
+          <a:p>
+            <a:pPr algn="l">
+              <a:lnSpc>
+                <a:spcPct val="100000"/>
+              </a:lnSpc>
+              <a:defRPr sz="1300" b="0">
+                <a:solidFill>
+                  <a:srgbClr val="3F3F46"/>
+                </a:solidFill>
+                <a:latin typeface="Segoe UI"/>
+              </a:defRPr>
+            </a:pPr>
+            <a:r>
+              <a:t>reads that, works margin at the current cost → memory</a:t>
+            </a:r>
+          </a:p>
+        </p:txBody>
+      </p:sp>
+      <p:sp>
+        <p:nvSpPr>
+          <p:cNvPr id="13" name="TextBox 12"/>
+          <p:cNvSpPr txBox="1"/>
+          <p:nvPr/>
+        </p:nvSpPr>
+        <p:spPr>
+          <a:xfrm>
+            <a:off x="777240" y="3867912"/>
+            <a:ext cx="2103120" cy="320040"/>
+          </a:xfrm>
+          <a:prstGeom prst="rect">
+            <a:avLst/>
+          </a:prstGeom>
+          <a:noFill/>
+        </p:spPr>
+        <p:txBody>
+          <a:bodyPr wrap="square" lIns="0" rIns="0" tIns="0" bIns="0">
+            <a:spAutoFit/>
+          </a:bodyPr>
+          <a:lstStyle/>
+          <a:p>
+            <a:pPr algn="l">
+              <a:lnSpc>
+                <a:spcPct val="100000"/>
+              </a:lnSpc>
+              <a:defRPr sz="1300" b="1">
+                <a:solidFill>
+                  <a:srgbClr val="000000"/>
+                </a:solidFill>
+                <a:latin typeface="Segoe UI"/>
+              </a:defRPr>
+            </a:pPr>
+            <a:r>
+              <a:t>Inventory</a:t>
+            </a:r>
+          </a:p>
+        </p:txBody>
+      </p:sp>
+      <p:sp>
+        <p:nvSpPr>
+          <p:cNvPr id="14" name="TextBox 13"/>
+          <p:cNvSpPr txBox="1"/>
+          <p:nvPr/>
+        </p:nvSpPr>
+        <p:spPr>
+          <a:xfrm>
+            <a:off x="3063240" y="3867912"/>
+            <a:ext cx="8321040" cy="320040"/>
+          </a:xfrm>
+          <a:prstGeom prst="rect">
+            <a:avLst/>
+          </a:prstGeom>
+          <a:noFill/>
+        </p:spPr>
+        <p:txBody>
+          <a:bodyPr wrap="square" lIns="0" rIns="0" tIns="0" bIns="0">
+            <a:spAutoFit/>
+          </a:bodyPr>
+          <a:lstStyle/>
+          <a:p>
+            <a:pPr algn="l">
+              <a:lnSpc>
+                <a:spcPct val="100000"/>
+              </a:lnSpc>
+              <a:defRPr sz="1300" b="0">
+                <a:solidFill>
+                  <a:srgbClr val="3F3F46"/>
+                </a:solidFill>
+                <a:latin typeface="Segoe UI"/>
+              </a:defRPr>
+            </a:pPr>
+            <a:r>
+              <a:t>how many are left, and how long they last</a:t>
+            </a:r>
+          </a:p>
+        </p:txBody>
+      </p:sp>
+      <p:sp>
+        <p:nvSpPr>
+          <p:cNvPr id="15" name="TextBox 14"/>
+          <p:cNvSpPr txBox="1"/>
+          <p:nvPr/>
+        </p:nvSpPr>
+        <p:spPr>
+          <a:xfrm>
+            <a:off x="777240" y="4343400"/>
+            <a:ext cx="2103120" cy="320040"/>
+          </a:xfrm>
+          <a:prstGeom prst="rect">
+            <a:avLst/>
+          </a:prstGeom>
+          <a:noFill/>
+        </p:spPr>
+        <p:txBody>
+          <a:bodyPr wrap="square" lIns="0" rIns="0" tIns="0" bIns="0">
+            <a:spAutoFit/>
+          </a:bodyPr>
+          <a:lstStyle/>
+          <a:p>
+            <a:pPr algn="l">
+              <a:lnSpc>
+                <a:spcPct val="100000"/>
+              </a:lnSpc>
+              <a:defRPr sz="1300" b="1">
+                <a:solidFill>
+                  <a:srgbClr val="000000"/>
+                </a:solidFill>
+                <a:latin typeface="Segoe UI"/>
+              </a:defRPr>
+            </a:pPr>
+            <a:r>
+              <a:t>Ad Creative</a:t>
+            </a:r>
+          </a:p>
+        </p:txBody>
+      </p:sp>
+      <p:sp>
+        <p:nvSpPr>
+          <p:cNvPr id="16" name="TextBox 15"/>
+          <p:cNvSpPr txBox="1"/>
+          <p:nvPr/>
+        </p:nvSpPr>
+        <p:spPr>
+          <a:xfrm>
+            <a:off x="3063240" y="4343400"/>
+            <a:ext cx="8321040" cy="320040"/>
+          </a:xfrm>
+          <a:prstGeom prst="rect">
+            <a:avLst/>
+          </a:prstGeom>
+          <a:noFill/>
+        </p:spPr>
+        <p:txBody>
+          <a:bodyPr wrap="square" lIns="0" rIns="0" tIns="0" bIns="0">
+            <a:spAutoFit/>
+          </a:bodyPr>
+          <a:lstStyle/>
+          <a:p>
+            <a:pPr algn="l">
+              <a:lnSpc>
+                <a:spcPct val="100000"/>
+              </a:lnSpc>
+              <a:defRPr sz="1300" b="0">
+                <a:solidFill>
+                  <a:srgbClr val="3F3F46"/>
+                </a:solidFill>
+                <a:latin typeface="Segoe UI"/>
+              </a:defRPr>
+            </a:pPr>
+            <a:r>
+              <a:t>writes the copy, then STOPS at an approval gate</a:t>
+            </a:r>
+          </a:p>
+        </p:txBody>
+      </p:sp>
+      <p:sp>
+        <p:nvSpPr>
+          <p:cNvPr id="17" name="TextBox 16"/>
+          <p:cNvSpPr txBox="1"/>
+          <p:nvPr/>
+        </p:nvSpPr>
+        <p:spPr>
+          <a:xfrm>
+            <a:off x="777240" y="4818888"/>
+            <a:ext cx="2103120" cy="320040"/>
+          </a:xfrm>
+          <a:prstGeom prst="rect">
+            <a:avLst/>
+          </a:prstGeom>
+          <a:noFill/>
+        </p:spPr>
+        <p:txBody>
+          <a:bodyPr wrap="square" lIns="0" rIns="0" tIns="0" bIns="0">
+            <a:spAutoFit/>
+          </a:bodyPr>
+          <a:lstStyle/>
+          <a:p>
+            <a:pPr algn="l">
+              <a:lnSpc>
+                <a:spcPct val="100000"/>
+              </a:lnSpc>
+              <a:defRPr sz="1300" b="1">
+                <a:solidFill>
+                  <a:srgbClr val="7B1E22"/>
+                </a:solidFill>
+                <a:latin typeface="Segoe UI"/>
+              </a:defRPr>
+            </a:pPr>
+            <a:r>
+              <a:t>Owner</a:t>
+            </a:r>
+          </a:p>
+        </p:txBody>
+      </p:sp>
+      <p:sp>
+        <p:nvSpPr>
+          <p:cNvPr id="18" name="TextBox 17"/>
+          <p:cNvSpPr txBox="1"/>
+          <p:nvPr/>
+        </p:nvSpPr>
+        <p:spPr>
+          <a:xfrm>
+            <a:off x="3063240" y="4818888"/>
+            <a:ext cx="8321040" cy="320040"/>
+          </a:xfrm>
+          <a:prstGeom prst="rect">
+            <a:avLst/>
+          </a:prstGeom>
+          <a:noFill/>
+        </p:spPr>
+        <p:txBody>
+          <a:bodyPr wrap="square" lIns="0" rIns="0" tIns="0" bIns="0">
+            <a:spAutoFit/>
+          </a:bodyPr>
+          <a:lstStyle/>
+          <a:p>
+            <a:pPr algn="l">
+              <a:lnSpc>
+                <a:spcPct val="100000"/>
+              </a:lnSpc>
+              <a:defRPr sz="1300" b="0">
+                <a:solidFill>
+                  <a:srgbClr val="3F3F46"/>
+                </a:solidFill>
+                <a:latin typeface="Segoe UI"/>
+              </a:defRPr>
+            </a:pPr>
+            <a:r>
+              <a:t>approves on Home — the graph resumes from that point</a:t>
+            </a:r>
+          </a:p>
+        </p:txBody>
+      </p:sp>
+      <p:sp>
+        <p:nvSpPr>
+          <p:cNvPr id="19" name="TextBox 18"/>
+          <p:cNvSpPr txBox="1"/>
+          <p:nvPr/>
+        </p:nvSpPr>
+        <p:spPr>
+          <a:xfrm>
+            <a:off x="777240" y="5294376"/>
+            <a:ext cx="2103120" cy="320040"/>
+          </a:xfrm>
+          <a:prstGeom prst="rect">
+            <a:avLst/>
+          </a:prstGeom>
+          <a:noFill/>
+        </p:spPr>
+        <p:txBody>
+          <a:bodyPr wrap="square" lIns="0" rIns="0" tIns="0" bIns="0">
+            <a:spAutoFit/>
+          </a:bodyPr>
+          <a:lstStyle/>
+          <a:p>
+            <a:pPr algn="l">
+              <a:lnSpc>
+                <a:spcPct val="100000"/>
+              </a:lnSpc>
+              <a:defRPr sz="1300" b="1">
+                <a:solidFill>
+                  <a:srgbClr val="7B1E22"/>
+                </a:solidFill>
+                <a:latin typeface="Segoe UI"/>
+              </a:defRPr>
+            </a:pPr>
+            <a:r>
+              <a:t>Supervisor</a:t>
+            </a:r>
+          </a:p>
+        </p:txBody>
+      </p:sp>
+      <p:sp>
+        <p:nvSpPr>
+          <p:cNvPr id="20" name="TextBox 19"/>
+          <p:cNvSpPr txBox="1"/>
+          <p:nvPr/>
+        </p:nvSpPr>
+        <p:spPr>
+          <a:xfrm>
+            <a:off x="3063240" y="5294376"/>
+            <a:ext cx="8321040" cy="320040"/>
+          </a:xfrm>
+          <a:prstGeom prst="rect">
+            <a:avLst/>
+          </a:prstGeom>
+          <a:noFill/>
+        </p:spPr>
+        <p:txBody>
+          <a:bodyPr wrap="square" lIns="0" rIns="0" tIns="0" bIns="0">
+            <a:spAutoFit/>
+          </a:bodyPr>
+          <a:lstStyle/>
+          <a:p>
+            <a:pPr algn="l">
+              <a:lnSpc>
+                <a:spcPct val="100000"/>
+              </a:lnSpc>
+              <a:defRPr sz="1300" b="0">
+                <a:solidFill>
+                  <a:srgbClr val="3F3F46"/>
+                </a:solidFill>
+                <a:latin typeface="Segoe UI"/>
+              </a:defRPr>
+            </a:pPr>
+            <a:r>
+              <a:t>aggregates what each returned into one answer</a:t>
+            </a:r>
+          </a:p>
+        </p:txBody>
+      </p:sp>
+      <p:sp>
+        <p:nvSpPr>
+          <p:cNvPr id="21" name="TextBox 20"/>
+          <p:cNvSpPr txBox="1"/>
+          <p:nvPr/>
+        </p:nvSpPr>
+        <p:spPr>
+          <a:xfrm>
+            <a:off x="777240" y="5870448"/>
+            <a:ext cx="10607040" cy="365760"/>
+          </a:xfrm>
+          <a:prstGeom prst="rect">
+            <a:avLst/>
+          </a:prstGeom>
+          <a:noFill/>
+        </p:spPr>
+        <p:txBody>
+          <a:bodyPr wrap="square" lIns="0" rIns="0" tIns="0" bIns="0">
+            <a:spAutoFit/>
+          </a:bodyPr>
+          <a:lstStyle/>
+          <a:p>
+            <a:pPr algn="l">
+              <a:lnSpc>
+                <a:spcPct val="100000"/>
+              </a:lnSpc>
+              <a:defRPr sz="1150" b="0">
+                <a:solidFill>
+                  <a:srgbClr val="71717A"/>
+                </a:solidFill>
+                <a:latin typeface="Segoe UI"/>
+              </a:defRPr>
+            </a:pPr>
+            <a:r>
+              <a:t>Each specialist writes what it learned to shared memory before returning, so the next one starts from it rather than asking again.</a:t>
+            </a:r>
+          </a:p>
+        </p:txBody>
+      </p:sp>
+      <p:sp>
+        <p:nvSpPr>
+          <p:cNvPr id="22" name="TextBox 21"/>
+          <p:cNvSpPr txBox="1"/>
+          <p:nvPr/>
+        </p:nvSpPr>
+        <p:spPr>
+          <a:xfrm>
+            <a:off x="777240" y="6327648"/>
+            <a:ext cx="2743200" cy="274320"/>
+          </a:xfrm>
+          <a:prstGeom prst="rect">
+            <a:avLst/>
+          </a:prstGeom>
+          <a:noFill/>
+        </p:spPr>
+        <p:txBody>
+          <a:bodyPr wrap="square" lIns="0" rIns="0" tIns="0" bIns="0">
+            <a:spAutoFit/>
+          </a:bodyPr>
+          <a:lstStyle/>
+          <a:p>
+            <a:pPr algn="l">
+              <a:lnSpc>
+                <a:spcPct val="100000"/>
+              </a:lnSpc>
+              <a:defRPr sz="1050" b="0">
+                <a:solidFill>
+                  <a:srgbClr val="A1A1AA"/>
+                </a:solidFill>
+                <a:latin typeface="Segoe UI"/>
+              </a:defRPr>
+            </a:pPr>
+            <a:r>
+              <a:t>Lucida</a:t>
+            </a:r>
+          </a:p>
+        </p:txBody>
+      </p:sp>
+      <p:sp>
+        <p:nvSpPr>
+          <p:cNvPr id="23" name="TextBox 22"/>
+          <p:cNvSpPr txBox="1"/>
+          <p:nvPr/>
+        </p:nvSpPr>
+        <p:spPr>
+          <a:xfrm>
+            <a:off x="11064240" y="6327648"/>
+            <a:ext cx="365760" cy="274320"/>
+          </a:xfrm>
+          <a:prstGeom prst="rect">
+            <a:avLst/>
+          </a:prstGeom>
+          <a:noFill/>
+        </p:spPr>
+        <p:txBody>
+          <a:bodyPr wrap="square" lIns="0" rIns="0" tIns="0" bIns="0">
+            <a:spAutoFit/>
+          </a:bodyPr>
+          <a:lstStyle/>
+          <a:p>
+            <a:pPr algn="r">
+              <a:lnSpc>
+                <a:spcPct val="100000"/>
+              </a:lnSpc>
+              <a:defRPr sz="1050" b="0">
+                <a:solidFill>
+                  <a:srgbClr val="A1A1AA"/>
+                </a:solidFill>
+                <a:latin typeface="Segoe UI"/>
+              </a:defRPr>
+            </a:pPr>
+            <a:r>
+              <a:t>5</a:t>
             </a:r>
           </a:p>
         </p:txBody>
@@ -5158,13 +7903,13 @@
 </p:sld>
 </file>
 
-<file path=ppt/slides/slide8.xml><?xml version="1.0" encoding="utf-8"?>
-<p:sld xmlns:a="http://schemas.openxmlformats.org/drawingml/2006/main" xmlns:r="http://schemas.openxmlformats.org/officeDocument/2006/relationships" xmlns:p="http://schemas.openxmlformats.org/presentationml/2006/main">
+<file path=ppt/slides/slide6.xml><?xml version="1.0" encoding="utf-8"?>
+<p:sld xmlns:a="http://schemas.openxmlformats.org/drawingml/2006/main" xmlns:p="http://schemas.openxmlformats.org/presentationml/2006/main" xmlns:r="http://schemas.openxmlformats.org/officeDocument/2006/relationships">
   <p:cSld>
     <p:bg>
       <p:bgPr>
         <a:solidFill>
-          <a:srgbClr val="F3F4F6"/>
+          <a:srgbClr val="FFFFFF"/>
         </a:solidFill>
         <a:effectLst/>
       </p:bgPr>
@@ -5175,14 +7920,7 @@
         <p:cNvGrpSpPr/>
         <p:nvPr/>
       </p:nvGrpSpPr>
-      <p:grpSpPr>
-        <a:xfrm>
-          <a:off x="0" y="0"/>
-          <a:ext cx="0" cy="0"/>
-          <a:chOff x="0" y="0"/>
-          <a:chExt cx="0" cy="0"/>
-        </a:xfrm>
-      </p:grpSpPr>
+      <p:grpSpPr/>
       <p:sp>
         <p:nvSpPr>
           <p:cNvPr id="2" name="TextBox 1"/>
@@ -5191,55 +7929,545 @@
         </p:nvSpPr>
         <p:spPr>
           <a:xfrm>
-            <a:off x="731520" y="548640"/>
-            <a:ext cx="7315200" cy="640080"/>
-          </a:xfrm>
-          <a:prstGeom prst="rect">
-            <a:avLst/>
-          </a:prstGeom>
-          <a:noFill/>
-        </p:spPr>
-        <p:txBody>
-          <a:bodyPr wrap="none">
-            <a:spAutoFit/>
-          </a:bodyPr>
-          <a:lstStyle/>
-          <a:p>
-            <a:pPr>
-              <a:defRPr sz="2800" b="1">
-                <a:solidFill>
-                  <a:srgbClr val="0F172A"/>
-                </a:solidFill>
-              </a:defRPr>
-            </a:pPr>
-            <a:r>
-              <a:t>Conclusion</a:t>
-            </a:r>
-          </a:p>
-        </p:txBody>
-      </p:sp>
-      <p:sp>
-        <p:nvSpPr>
-          <p:cNvPr id="3" name="Rectangle 2"/>
-          <p:cNvSpPr/>
-          <p:nvPr/>
-        </p:nvSpPr>
-        <p:spPr>
-          <a:xfrm>
-            <a:off x="914400" y="1371600"/>
-            <a:ext cx="10149840" cy="3749039"/>
-          </a:xfrm>
-          <a:prstGeom prst="rect">
-            <a:avLst/>
-          </a:prstGeom>
-          <a:solidFill>
-            <a:srgbClr val="FFFFFF"/>
-          </a:solidFill>
-          <a:ln w="15240">
+            <a:off x="777240" y="566928"/>
+            <a:ext cx="7315200" cy="274320"/>
+          </a:xfrm>
+          <a:prstGeom prst="rect">
+            <a:avLst/>
+          </a:prstGeom>
+          <a:noFill/>
+        </p:spPr>
+        <p:txBody>
+          <a:bodyPr wrap="square" lIns="0" rIns="0" tIns="0" bIns="0">
+            <a:spAutoFit/>
+          </a:bodyPr>
+          <a:lstStyle/>
+          <a:p>
+            <a:pPr algn="l">
+              <a:lnSpc>
+                <a:spcPct val="100000"/>
+              </a:lnSpc>
+              <a:defRPr sz="1150" b="1">
+                <a:solidFill>
+                  <a:srgbClr val="7B1E22"/>
+                </a:solidFill>
+                <a:latin typeface="Segoe UI"/>
+              </a:defRPr>
+            </a:pPr>
+            <a:r>
+              <a:t>HUMAN-IN-THE-LOOP</a:t>
+            </a:r>
+          </a:p>
+        </p:txBody>
+      </p:sp>
+      <p:sp>
+        <p:nvSpPr>
+          <p:cNvPr id="3" name="TextBox 2"/>
+          <p:cNvSpPr txBox="1"/>
+          <p:nvPr/>
+        </p:nvSpPr>
+        <p:spPr>
+          <a:xfrm>
+            <a:off x="777240" y="868680"/>
+            <a:ext cx="10607040" cy="731520"/>
+          </a:xfrm>
+          <a:prstGeom prst="rect">
+            <a:avLst/>
+          </a:prstGeom>
+          <a:noFill/>
+        </p:spPr>
+        <p:txBody>
+          <a:bodyPr wrap="square" lIns="0" rIns="0" tIns="0" bIns="0">
+            <a:spAutoFit/>
+          </a:bodyPr>
+          <a:lstStyle/>
+          <a:p>
+            <a:pPr algn="l">
+              <a:lnSpc>
+                <a:spcPct val="100000"/>
+              </a:lnSpc>
+              <a:defRPr sz="3100" b="1">
+                <a:solidFill>
+                  <a:srgbClr val="000000"/>
+                </a:solidFill>
+                <a:latin typeface="Segoe UI"/>
+              </a:defRPr>
+            </a:pPr>
+            <a:r>
+              <a:t>It stops before it spends your money</a:t>
+            </a:r>
+          </a:p>
+        </p:txBody>
+      </p:sp>
+      <p:cxnSp>
+        <p:nvCxnSpPr>
+          <p:cNvPr id="4" name="Connector 3"/>
+          <p:cNvCxnSpPr/>
+          <p:nvPr/>
+        </p:nvCxnSpPr>
+        <p:spPr>
+          <a:xfrm>
+            <a:off x="777240" y="1572768"/>
+            <a:ext cx="10607040" cy="0"/>
+          </a:xfrm>
+          <a:prstGeom prst="line">
+            <a:avLst/>
+          </a:prstGeom>
+          <a:ln w="12700">
             <a:solidFill>
-              <a:srgbClr val="94A3B8"/>
+              <a:srgbClr val="E4E4E7"/>
             </a:solidFill>
           </a:ln>
+        </p:spPr>
+        <p:style>
+          <a:lnRef idx="2">
+            <a:schemeClr val="accent1"/>
+          </a:lnRef>
+          <a:fillRef idx="0">
+            <a:schemeClr val="accent1"/>
+          </a:fillRef>
+          <a:effectRef idx="1">
+            <a:schemeClr val="accent1"/>
+          </a:effectRef>
+          <a:fontRef idx="minor">
+            <a:schemeClr val="tx1"/>
+          </a:fontRef>
+        </p:style>
+      </p:cxnSp>
+      <p:sp>
+        <p:nvSpPr>
+          <p:cNvPr id="5" name="TextBox 4"/>
+          <p:cNvSpPr txBox="1"/>
+          <p:nvPr/>
+        </p:nvSpPr>
+        <p:spPr>
+          <a:xfrm>
+            <a:off x="777240" y="2057400"/>
+            <a:ext cx="10607040" cy="896112"/>
+          </a:xfrm>
+          <a:prstGeom prst="rect">
+            <a:avLst/>
+          </a:prstGeom>
+          <a:noFill/>
+        </p:spPr>
+        <p:txBody>
+          <a:bodyPr wrap="square" lIns="0" tIns="0" bIns="0">
+            <a:spAutoFit/>
+          </a:bodyPr>
+          <a:lstStyle/>
+          <a:p>
+            <a:pPr>
+              <a:lnSpc>
+                <a:spcPct val="125000"/>
+              </a:lnSpc>
+            </a:pPr>
+            <a:r>
+              <a:rPr sz="1500" b="1">
+                <a:solidFill>
+                  <a:srgbClr val="000000"/>
+                </a:solidFill>
+                <a:latin typeface="Segoe UI"/>
+              </a:rPr>
+              <a:t>A real interrupt, not a confirm dialog</a:t>
+            </a:r>
+            <a:r>
+              <a:rPr sz="1500">
+                <a:solidFill>
+                  <a:srgbClr val="3F3F46"/>
+                </a:solidFill>
+                <a:latin typeface="Segoe UI"/>
+              </a:rPr>
+              <a:t> — publishing an ad or booking a courier calls LangGraph's interrupt(), which persists the whole graph to a SQLite checkpoint and suspends it.</a:t>
+            </a:r>
+          </a:p>
+        </p:txBody>
+      </p:sp>
+      <p:sp>
+        <p:nvSpPr>
+          <p:cNvPr id="6" name="TextBox 5"/>
+          <p:cNvSpPr txBox="1"/>
+          <p:nvPr/>
+        </p:nvSpPr>
+        <p:spPr>
+          <a:xfrm>
+            <a:off x="777240" y="2953512"/>
+            <a:ext cx="10607040" cy="896112"/>
+          </a:xfrm>
+          <a:prstGeom prst="rect">
+            <a:avLst/>
+          </a:prstGeom>
+          <a:noFill/>
+        </p:spPr>
+        <p:txBody>
+          <a:bodyPr wrap="square" lIns="0" tIns="0" bIns="0">
+            <a:spAutoFit/>
+          </a:bodyPr>
+          <a:lstStyle/>
+          <a:p>
+            <a:pPr>
+              <a:lnSpc>
+                <a:spcPct val="125000"/>
+              </a:lnSpc>
+            </a:pPr>
+            <a:r>
+              <a:rPr sz="1500" b="1">
+                <a:solidFill>
+                  <a:srgbClr val="000000"/>
+                </a:solidFill>
+                <a:latin typeface="Segoe UI"/>
+              </a:rPr>
+              <a:t>Approving resumes from exactly that point</a:t>
+            </a:r>
+            <a:r>
+              <a:rPr sz="1500">
+                <a:solidFill>
+                  <a:srgbClr val="3F3F46"/>
+                </a:solidFill>
+                <a:latin typeface="Segoe UI"/>
+              </a:rPr>
+              <a:t> — not from the start, so no agent runs twice and nothing is paid for twice.</a:t>
+            </a:r>
+          </a:p>
+        </p:txBody>
+      </p:sp>
+      <p:sp>
+        <p:nvSpPr>
+          <p:cNvPr id="7" name="TextBox 6"/>
+          <p:cNvSpPr txBox="1"/>
+          <p:nvPr/>
+        </p:nvSpPr>
+        <p:spPr>
+          <a:xfrm>
+            <a:off x="777240" y="3849624"/>
+            <a:ext cx="10607040" cy="896112"/>
+          </a:xfrm>
+          <a:prstGeom prst="rect">
+            <a:avLst/>
+          </a:prstGeom>
+          <a:noFill/>
+        </p:spPr>
+        <p:txBody>
+          <a:bodyPr wrap="square" lIns="0" tIns="0" bIns="0">
+            <a:spAutoFit/>
+          </a:bodyPr>
+          <a:lstStyle/>
+          <a:p>
+            <a:pPr>
+              <a:lnSpc>
+                <a:spcPct val="125000"/>
+              </a:lnSpc>
+            </a:pPr>
+            <a:r>
+              <a:rPr sz="1500" b="1">
+                <a:solidFill>
+                  <a:srgbClr val="000000"/>
+                </a:solidFill>
+                <a:latin typeface="Segoe UI"/>
+              </a:rPr>
+              <a:t>Pause, resume, retry</a:t>
+            </a:r>
+            <a:r>
+              <a:rPr sz="1500">
+                <a:solidFill>
+                  <a:srgbClr val="3F3F46"/>
+                </a:solidFill>
+                <a:latin typeface="Segoe UI"/>
+              </a:rPr>
+              <a:t> — pause is cooperative: the flag is read between nodes so the agent in flight finishes and checkpoints first.</a:t>
+            </a:r>
+          </a:p>
+        </p:txBody>
+      </p:sp>
+      <p:sp>
+        <p:nvSpPr>
+          <p:cNvPr id="8" name="TextBox 7"/>
+          <p:cNvSpPr txBox="1"/>
+          <p:nvPr/>
+        </p:nvSpPr>
+        <p:spPr>
+          <a:xfrm>
+            <a:off x="777240" y="4745736"/>
+            <a:ext cx="10607040" cy="896112"/>
+          </a:xfrm>
+          <a:prstGeom prst="rect">
+            <a:avLst/>
+          </a:prstGeom>
+          <a:noFill/>
+        </p:spPr>
+        <p:txBody>
+          <a:bodyPr wrap="square" lIns="0" tIns="0" bIns="0">
+            <a:spAutoFit/>
+          </a:bodyPr>
+          <a:lstStyle/>
+          <a:p>
+            <a:pPr>
+              <a:lnSpc>
+                <a:spcPct val="125000"/>
+              </a:lnSpc>
+            </a:pPr>
+            <a:r>
+              <a:rPr sz="1500" b="1">
+                <a:solidFill>
+                  <a:srgbClr val="000000"/>
+                </a:solidFill>
+                <a:latin typeface="Segoe UI"/>
+              </a:rPr>
+              <a:t>Enforced server-side</a:t>
+            </a:r>
+            <a:r>
+              <a:rPr sz="1500">
+                <a:solidFill>
+                  <a:srgbClr val="3F3F46"/>
+                </a:solidFill>
+                <a:latin typeface="Segoe UI"/>
+              </a:rPr>
+              <a:t> — the gate is checked on the server, so a stray click or a replayed request cannot book a courier.</a:t>
+            </a:r>
+          </a:p>
+        </p:txBody>
+      </p:sp>
+      <p:sp>
+        <p:nvSpPr>
+          <p:cNvPr id="9" name="TextBox 8"/>
+          <p:cNvSpPr txBox="1"/>
+          <p:nvPr/>
+        </p:nvSpPr>
+        <p:spPr>
+          <a:xfrm>
+            <a:off x="777240" y="6327648"/>
+            <a:ext cx="2743200" cy="274320"/>
+          </a:xfrm>
+          <a:prstGeom prst="rect">
+            <a:avLst/>
+          </a:prstGeom>
+          <a:noFill/>
+        </p:spPr>
+        <p:txBody>
+          <a:bodyPr wrap="square" lIns="0" rIns="0" tIns="0" bIns="0">
+            <a:spAutoFit/>
+          </a:bodyPr>
+          <a:lstStyle/>
+          <a:p>
+            <a:pPr algn="l">
+              <a:lnSpc>
+                <a:spcPct val="100000"/>
+              </a:lnSpc>
+              <a:defRPr sz="1050" b="0">
+                <a:solidFill>
+                  <a:srgbClr val="A1A1AA"/>
+                </a:solidFill>
+                <a:latin typeface="Segoe UI"/>
+              </a:defRPr>
+            </a:pPr>
+            <a:r>
+              <a:t>Lucida</a:t>
+            </a:r>
+          </a:p>
+        </p:txBody>
+      </p:sp>
+      <p:sp>
+        <p:nvSpPr>
+          <p:cNvPr id="10" name="TextBox 9"/>
+          <p:cNvSpPr txBox="1"/>
+          <p:nvPr/>
+        </p:nvSpPr>
+        <p:spPr>
+          <a:xfrm>
+            <a:off x="11064240" y="6327648"/>
+            <a:ext cx="365760" cy="274320"/>
+          </a:xfrm>
+          <a:prstGeom prst="rect">
+            <a:avLst/>
+          </a:prstGeom>
+          <a:noFill/>
+        </p:spPr>
+        <p:txBody>
+          <a:bodyPr wrap="square" lIns="0" rIns="0" tIns="0" bIns="0">
+            <a:spAutoFit/>
+          </a:bodyPr>
+          <a:lstStyle/>
+          <a:p>
+            <a:pPr algn="r">
+              <a:lnSpc>
+                <a:spcPct val="100000"/>
+              </a:lnSpc>
+              <a:defRPr sz="1050" b="0">
+                <a:solidFill>
+                  <a:srgbClr val="A1A1AA"/>
+                </a:solidFill>
+                <a:latin typeface="Segoe UI"/>
+              </a:defRPr>
+            </a:pPr>
+            <a:r>
+              <a:t>6</a:t>
+            </a:r>
+          </a:p>
+        </p:txBody>
+      </p:sp>
+    </p:spTree>
+  </p:cSld>
+  <p:clrMapOvr>
+    <a:masterClrMapping/>
+  </p:clrMapOvr>
+</p:sld>
+</file>
+
+<file path=ppt/slides/slide7.xml><?xml version="1.0" encoding="utf-8"?>
+<p:sld xmlns:a="http://schemas.openxmlformats.org/drawingml/2006/main" xmlns:p="http://schemas.openxmlformats.org/presentationml/2006/main" xmlns:r="http://schemas.openxmlformats.org/officeDocument/2006/relationships">
+  <p:cSld>
+    <p:bg>
+      <p:bgPr>
+        <a:solidFill>
+          <a:srgbClr val="FFFFFF"/>
+        </a:solidFill>
+        <a:effectLst/>
+      </p:bgPr>
+    </p:bg>
+    <p:spTree>
+      <p:nvGrpSpPr>
+        <p:cNvPr id="1" name=""/>
+        <p:cNvGrpSpPr/>
+        <p:nvPr/>
+      </p:nvGrpSpPr>
+      <p:grpSpPr/>
+      <p:sp>
+        <p:nvSpPr>
+          <p:cNvPr id="2" name="TextBox 1"/>
+          <p:cNvSpPr txBox="1"/>
+          <p:nvPr/>
+        </p:nvSpPr>
+        <p:spPr>
+          <a:xfrm>
+            <a:off x="777240" y="566928"/>
+            <a:ext cx="7315200" cy="274320"/>
+          </a:xfrm>
+          <a:prstGeom prst="rect">
+            <a:avLst/>
+          </a:prstGeom>
+          <a:noFill/>
+        </p:spPr>
+        <p:txBody>
+          <a:bodyPr wrap="square" lIns="0" rIns="0" tIns="0" bIns="0">
+            <a:spAutoFit/>
+          </a:bodyPr>
+          <a:lstStyle/>
+          <a:p>
+            <a:pPr algn="l">
+              <a:lnSpc>
+                <a:spcPct val="100000"/>
+              </a:lnSpc>
+              <a:defRPr sz="1150" b="1">
+                <a:solidFill>
+                  <a:srgbClr val="7B1E22"/>
+                </a:solidFill>
+                <a:latin typeface="Segoe UI"/>
+              </a:defRPr>
+            </a:pPr>
+            <a:r>
+              <a:t>SHARED MEMORY</a:t>
+            </a:r>
+          </a:p>
+        </p:txBody>
+      </p:sp>
+      <p:sp>
+        <p:nvSpPr>
+          <p:cNvPr id="3" name="TextBox 2"/>
+          <p:cNvSpPr txBox="1"/>
+          <p:nvPr/>
+        </p:nvSpPr>
+        <p:spPr>
+          <a:xfrm>
+            <a:off x="777240" y="868680"/>
+            <a:ext cx="10607040" cy="731520"/>
+          </a:xfrm>
+          <a:prstGeom prst="rect">
+            <a:avLst/>
+          </a:prstGeom>
+          <a:noFill/>
+        </p:spPr>
+        <p:txBody>
+          <a:bodyPr wrap="square" lIns="0" rIns="0" tIns="0" bIns="0">
+            <a:spAutoFit/>
+          </a:bodyPr>
+          <a:lstStyle/>
+          <a:p>
+            <a:pPr algn="l">
+              <a:lnSpc>
+                <a:spcPct val="100000"/>
+              </a:lnSpc>
+              <a:defRPr sz="3100" b="1">
+                <a:solidFill>
+                  <a:srgbClr val="000000"/>
+                </a:solidFill>
+                <a:latin typeface="Segoe UI"/>
+              </a:defRPr>
+            </a:pPr>
+            <a:r>
+              <a:t>One memory of the business</a:t>
+            </a:r>
+          </a:p>
+        </p:txBody>
+      </p:sp>
+      <p:cxnSp>
+        <p:nvCxnSpPr>
+          <p:cNvPr id="4" name="Connector 3"/>
+          <p:cNvCxnSpPr/>
+          <p:nvPr/>
+        </p:nvCxnSpPr>
+        <p:spPr>
+          <a:xfrm>
+            <a:off x="777240" y="1572768"/>
+            <a:ext cx="10607040" cy="0"/>
+          </a:xfrm>
+          <a:prstGeom prst="line">
+            <a:avLst/>
+          </a:prstGeom>
+          <a:ln w="12700">
+            <a:solidFill>
+              <a:srgbClr val="E4E4E7"/>
+            </a:solidFill>
+          </a:ln>
+        </p:spPr>
+        <p:style>
+          <a:lnRef idx="2">
+            <a:schemeClr val="accent1"/>
+          </a:lnRef>
+          <a:fillRef idx="0">
+            <a:schemeClr val="accent1"/>
+          </a:fillRef>
+          <a:effectRef idx="1">
+            <a:schemeClr val="accent1"/>
+          </a:effectRef>
+          <a:fontRef idx="minor">
+            <a:schemeClr val="tx1"/>
+          </a:fontRef>
+        </p:style>
+      </p:cxnSp>
+      <p:sp>
+        <p:nvSpPr>
+          <p:cNvPr id="5" name="Rounded Rectangle 4"/>
+          <p:cNvSpPr/>
+          <p:nvPr/>
+        </p:nvSpPr>
+        <p:spPr>
+          <a:xfrm>
+            <a:off x="777240" y="2057400"/>
+            <a:ext cx="5120640" cy="2286000"/>
+          </a:xfrm>
+          <a:prstGeom prst="roundRect">
+            <a:avLst>
+              <a:gd name="adj" fmla="val 8000"/>
+            </a:avLst>
+          </a:prstGeom>
+          <a:solidFill>
+            <a:srgbClr val="F4F4F5"/>
+          </a:solidFill>
+          <a:ln w="12700">
+            <a:solidFill>
+              <a:srgbClr val="E4E4E7"/>
+            </a:solidFill>
+          </a:ln>
+          <a:effectLst/>
         </p:spPr>
         <p:style>
           <a:lnRef idx="1">
@@ -5256,66 +8484,1966 @@
           </a:fontRef>
         </p:style>
         <p:txBody>
-          <a:bodyPr wrap="square" rtlCol="0" anchor="ctr"/>
-          <a:lstStyle/>
-          <a:p>
-            <a:pPr algn="ctr">
-              <a:spcAft>
-                <a:spcPts val="1200"/>
-              </a:spcAft>
-              <a:defRPr sz="2400" b="1">
-                <a:solidFill>
-                  <a:srgbClr val="0F172A"/>
-                </a:solidFill>
-              </a:defRPr>
-            </a:pPr>
-            <a:r>
-              <a:t>Lucida demonstrates a real multi-agent AI system, not a simple chatbot.</a:t>
-            </a:r>
-          </a:p>
+          <a:bodyPr rtlCol="0" anchor="ctr"/>
+          <a:lstStyle/>
+          <a:p/>
+        </p:txBody>
+      </p:sp>
+      <p:sp>
+        <p:nvSpPr>
+          <p:cNvPr id="6" name="TextBox 5"/>
+          <p:cNvSpPr txBox="1"/>
+          <p:nvPr/>
+        </p:nvSpPr>
+        <p:spPr>
+          <a:xfrm>
+            <a:off x="1051560" y="2286000"/>
+            <a:ext cx="4572000" cy="320040"/>
+          </a:xfrm>
+          <a:prstGeom prst="rect">
+            <a:avLst/>
+          </a:prstGeom>
+          <a:noFill/>
+        </p:spPr>
+        <p:txBody>
+          <a:bodyPr wrap="square" lIns="0" rIns="0" tIns="0" bIns="0">
+            <a:spAutoFit/>
+          </a:bodyPr>
+          <a:lstStyle/>
+          <a:p>
+            <a:pPr algn="l">
+              <a:lnSpc>
+                <a:spcPct val="100000"/>
+              </a:lnSpc>
+              <a:defRPr sz="1600" b="1">
+                <a:solidFill>
+                  <a:srgbClr val="000000"/>
+                </a:solidFill>
+                <a:latin typeface="Segoe UI"/>
+              </a:defRPr>
+            </a:pPr>
+            <a:r>
+              <a:t>Structured</a:t>
+            </a:r>
+          </a:p>
+        </p:txBody>
+      </p:sp>
+      <p:sp>
+        <p:nvSpPr>
+          <p:cNvPr id="7" name="TextBox 6"/>
+          <p:cNvSpPr txBox="1"/>
+          <p:nvPr/>
+        </p:nvSpPr>
+        <p:spPr>
+          <a:xfrm>
+            <a:off x="1051560" y="2697480"/>
+            <a:ext cx="4663440" cy="1371600"/>
+          </a:xfrm>
+          <a:prstGeom prst="rect">
+            <a:avLst/>
+          </a:prstGeom>
+          <a:noFill/>
+        </p:spPr>
+        <p:txBody>
+          <a:bodyPr wrap="square" lIns="0" rIns="0" tIns="0" bIns="0">
+            <a:spAutoFit/>
+          </a:bodyPr>
+          <a:lstStyle/>
+          <a:p>
+            <a:pPr algn="l">
+              <a:lnSpc>
+                <a:spcPct val="135000"/>
+              </a:lnSpc>
+              <a:defRPr sz="1250" b="0">
+                <a:solidFill>
+                  <a:srgbClr val="3F3F46"/>
+                </a:solidFill>
+                <a:latin typeface="Segoe UI"/>
+              </a:defRPr>
+            </a:pPr>
+            <a:r>
+              <a:t>SQLite, 22 tables — products, inventory, orders,</a:t>
+            </a:r>
+          </a:p>
+          <a:p>
+            <a:pPr algn="l">
+              <a:lnSpc>
+                <a:spcPct val="135000"/>
+              </a:lnSpc>
+              <a:defRPr sz="1250" b="0">
+                <a:solidFill>
+                  <a:srgbClr val="3F3F46"/>
+                </a:solidFill>
+                <a:latin typeface="Segoe UI"/>
+              </a:defRPr>
+            </a:pPr>
+            <a:r>
+              <a:t>pricing history, social messages, campaigns,</a:t>
+            </a:r>
+          </a:p>
+          <a:p>
+            <a:pPr algn="l">
+              <a:lnSpc>
+                <a:spcPct val="135000"/>
+              </a:lnSpc>
+              <a:defRPr sz="1250" b="0">
+                <a:solidFill>
+                  <a:srgbClr val="3F3F46"/>
+                </a:solidFill>
+                <a:latin typeface="Segoe UI"/>
+              </a:defRPr>
+            </a:pPr>
+            <a:r>
+              <a:t>deliveries, chat threads, competitors.</a:t>
+            </a:r>
+          </a:p>
+        </p:txBody>
+      </p:sp>
+      <p:sp>
+        <p:nvSpPr>
+          <p:cNvPr id="8" name="Rounded Rectangle 7"/>
+          <p:cNvSpPr/>
+          <p:nvPr/>
+        </p:nvSpPr>
+        <p:spPr>
+          <a:xfrm>
+            <a:off x="6263640" y="2057400"/>
+            <a:ext cx="5120640" cy="2286000"/>
+          </a:xfrm>
+          <a:prstGeom prst="roundRect">
+            <a:avLst>
+              <a:gd name="adj" fmla="val 8000"/>
+            </a:avLst>
+          </a:prstGeom>
+          <a:solidFill>
+            <a:srgbClr val="F4F4F5"/>
+          </a:solidFill>
+          <a:ln w="12700">
+            <a:solidFill>
+              <a:srgbClr val="E4E4E7"/>
+            </a:solidFill>
+          </a:ln>
+          <a:effectLst/>
+        </p:spPr>
+        <p:style>
+          <a:lnRef idx="1">
+            <a:schemeClr val="accent1"/>
+          </a:lnRef>
+          <a:fillRef idx="3">
+            <a:schemeClr val="accent1"/>
+          </a:fillRef>
+          <a:effectRef idx="2">
+            <a:schemeClr val="accent1"/>
+          </a:effectRef>
+          <a:fontRef idx="minor">
+            <a:schemeClr val="lt1"/>
+          </a:fontRef>
+        </p:style>
+        <p:txBody>
+          <a:bodyPr rtlCol="0" anchor="ctr"/>
+          <a:lstStyle/>
+          <a:p/>
+        </p:txBody>
+      </p:sp>
+      <p:sp>
+        <p:nvSpPr>
+          <p:cNvPr id="9" name="TextBox 8"/>
+          <p:cNvSpPr txBox="1"/>
+          <p:nvPr/>
+        </p:nvSpPr>
+        <p:spPr>
+          <a:xfrm>
+            <a:off x="6537960" y="2286000"/>
+            <a:ext cx="4572000" cy="320040"/>
+          </a:xfrm>
+          <a:prstGeom prst="rect">
+            <a:avLst/>
+          </a:prstGeom>
+          <a:noFill/>
+        </p:spPr>
+        <p:txBody>
+          <a:bodyPr wrap="square" lIns="0" rIns="0" tIns="0" bIns="0">
+            <a:spAutoFit/>
+          </a:bodyPr>
+          <a:lstStyle/>
+          <a:p>
+            <a:pPr algn="l">
+              <a:lnSpc>
+                <a:spcPct val="100000"/>
+              </a:lnSpc>
+              <a:defRPr sz="1600" b="1">
+                <a:solidFill>
+                  <a:srgbClr val="000000"/>
+                </a:solidFill>
+                <a:latin typeface="Segoe UI"/>
+              </a:defRPr>
+            </a:pPr>
+            <a:r>
+              <a:t>Semantic</a:t>
+            </a:r>
+          </a:p>
+        </p:txBody>
+      </p:sp>
+      <p:sp>
+        <p:nvSpPr>
+          <p:cNvPr id="10" name="TextBox 9"/>
+          <p:cNvSpPr txBox="1"/>
+          <p:nvPr/>
+        </p:nvSpPr>
+        <p:spPr>
+          <a:xfrm>
+            <a:off x="6537960" y="2697480"/>
+            <a:ext cx="4663440" cy="1371600"/>
+          </a:xfrm>
+          <a:prstGeom prst="rect">
+            <a:avLst/>
+          </a:prstGeom>
+          <a:noFill/>
+        </p:spPr>
+        <p:txBody>
+          <a:bodyPr wrap="square" lIns="0" rIns="0" tIns="0" bIns="0">
+            <a:spAutoFit/>
+          </a:bodyPr>
+          <a:lstStyle/>
+          <a:p>
+            <a:pPr algn="l">
+              <a:lnSpc>
+                <a:spcPct val="135000"/>
+              </a:lnSpc>
+              <a:defRPr sz="1250" b="0">
+                <a:solidFill>
+                  <a:srgbClr val="3F3F46"/>
+                </a:solidFill>
+                <a:latin typeface="Segoe UI"/>
+              </a:defRPr>
+            </a:pPr>
+            <a:r>
+              <a:t>A vector store of what agents concluded,</a:t>
+            </a:r>
+          </a:p>
+          <a:p>
+            <a:pPr algn="l">
+              <a:lnSpc>
+                <a:spcPct val="135000"/>
+              </a:lnSpc>
+              <a:defRPr sz="1250" b="0">
+                <a:solidFill>
+                  <a:srgbClr val="3F3F46"/>
+                </a:solidFill>
+                <a:latin typeface="Segoe UI"/>
+              </a:defRPr>
+            </a:pPr>
+            <a:r>
+              <a:t>so a later run recalls an earlier finding</a:t>
+            </a:r>
+          </a:p>
+          <a:p>
+            <a:pPr algn="l">
+              <a:lnSpc>
+                <a:spcPct val="135000"/>
+              </a:lnSpc>
+              <a:defRPr sz="1250" b="0">
+                <a:solidFill>
+                  <a:srgbClr val="3F3F46"/>
+                </a:solidFill>
+                <a:latin typeface="Segoe UI"/>
+              </a:defRPr>
+            </a:pPr>
+            <a:r>
+              <a:t>instead of paying to derive it again.</a:t>
+            </a:r>
+          </a:p>
+        </p:txBody>
+      </p:sp>
+      <p:sp>
+        <p:nvSpPr>
+          <p:cNvPr id="11" name="TextBox 10"/>
+          <p:cNvSpPr txBox="1"/>
+          <p:nvPr/>
+        </p:nvSpPr>
+        <p:spPr>
+          <a:xfrm>
+            <a:off x="777240" y="4709160"/>
+            <a:ext cx="10607040" cy="731520"/>
+          </a:xfrm>
+          <a:prstGeom prst="rect">
+            <a:avLst/>
+          </a:prstGeom>
+          <a:noFill/>
+        </p:spPr>
+        <p:txBody>
+          <a:bodyPr wrap="square" lIns="0" rIns="0" tIns="0" bIns="0">
+            <a:spAutoFit/>
+          </a:bodyPr>
+          <a:lstStyle/>
+          <a:p>
+            <a:pPr algn="l">
+              <a:lnSpc>
+                <a:spcPct val="140000"/>
+              </a:lnSpc>
+              <a:defRPr sz="1400" b="0">
+                <a:solidFill>
+                  <a:srgbClr val="3F3F46"/>
+                </a:solidFill>
+                <a:latin typeface="Segoe UI"/>
+              </a:defRPr>
+            </a:pPr>
+            <a:r>
+              <a:t>Both are per shop. Two owners on the same instance never see each other's data — the database is chosen by session, not by query.</a:t>
+            </a:r>
+          </a:p>
+        </p:txBody>
+      </p:sp>
+      <p:sp>
+        <p:nvSpPr>
+          <p:cNvPr id="12" name="TextBox 11"/>
+          <p:cNvSpPr txBox="1"/>
+          <p:nvPr/>
+        </p:nvSpPr>
+        <p:spPr>
+          <a:xfrm>
+            <a:off x="777240" y="6327648"/>
+            <a:ext cx="2743200" cy="274320"/>
+          </a:xfrm>
+          <a:prstGeom prst="rect">
+            <a:avLst/>
+          </a:prstGeom>
+          <a:noFill/>
+        </p:spPr>
+        <p:txBody>
+          <a:bodyPr wrap="square" lIns="0" rIns="0" tIns="0" bIns="0">
+            <a:spAutoFit/>
+          </a:bodyPr>
+          <a:lstStyle/>
+          <a:p>
+            <a:pPr algn="l">
+              <a:lnSpc>
+                <a:spcPct val="100000"/>
+              </a:lnSpc>
+              <a:defRPr sz="1050" b="0">
+                <a:solidFill>
+                  <a:srgbClr val="A1A1AA"/>
+                </a:solidFill>
+                <a:latin typeface="Segoe UI"/>
+              </a:defRPr>
+            </a:pPr>
+            <a:r>
+              <a:t>Lucida</a:t>
+            </a:r>
+          </a:p>
+        </p:txBody>
+      </p:sp>
+      <p:sp>
+        <p:nvSpPr>
+          <p:cNvPr id="13" name="TextBox 12"/>
+          <p:cNvSpPr txBox="1"/>
+          <p:nvPr/>
+        </p:nvSpPr>
+        <p:spPr>
+          <a:xfrm>
+            <a:off x="11064240" y="6327648"/>
+            <a:ext cx="365760" cy="274320"/>
+          </a:xfrm>
+          <a:prstGeom prst="rect">
+            <a:avLst/>
+          </a:prstGeom>
+          <a:noFill/>
+        </p:spPr>
+        <p:txBody>
+          <a:bodyPr wrap="square" lIns="0" rIns="0" tIns="0" bIns="0">
+            <a:spAutoFit/>
+          </a:bodyPr>
+          <a:lstStyle/>
+          <a:p>
+            <a:pPr algn="r">
+              <a:lnSpc>
+                <a:spcPct val="100000"/>
+              </a:lnSpc>
+              <a:defRPr sz="1050" b="0">
+                <a:solidFill>
+                  <a:srgbClr val="A1A1AA"/>
+                </a:solidFill>
+                <a:latin typeface="Segoe UI"/>
+              </a:defRPr>
+            </a:pPr>
+            <a:r>
+              <a:t>7</a:t>
+            </a:r>
+          </a:p>
+        </p:txBody>
+      </p:sp>
+    </p:spTree>
+  </p:cSld>
+  <p:clrMapOvr>
+    <a:masterClrMapping/>
+  </p:clrMapOvr>
+</p:sld>
+</file>
+
+<file path=ppt/slides/slide8.xml><?xml version="1.0" encoding="utf-8"?>
+<p:sld xmlns:a="http://schemas.openxmlformats.org/drawingml/2006/main" xmlns:p="http://schemas.openxmlformats.org/presentationml/2006/main" xmlns:r="http://schemas.openxmlformats.org/officeDocument/2006/relationships">
+  <p:cSld>
+    <p:bg>
+      <p:bgPr>
+        <a:solidFill>
+          <a:srgbClr val="FFFFFF"/>
+        </a:solidFill>
+        <a:effectLst/>
+      </p:bgPr>
+    </p:bg>
+    <p:spTree>
+      <p:nvGrpSpPr>
+        <p:cNvPr id="1" name=""/>
+        <p:cNvGrpSpPr/>
+        <p:nvPr/>
+      </p:nvGrpSpPr>
+      <p:grpSpPr/>
+      <p:sp>
+        <p:nvSpPr>
+          <p:cNvPr id="2" name="TextBox 1"/>
+          <p:cNvSpPr txBox="1"/>
+          <p:nvPr/>
+        </p:nvSpPr>
+        <p:spPr>
+          <a:xfrm>
+            <a:off x="777240" y="566928"/>
+            <a:ext cx="7315200" cy="274320"/>
+          </a:xfrm>
+          <a:prstGeom prst="rect">
+            <a:avLst/>
+          </a:prstGeom>
+          <a:noFill/>
+        </p:spPr>
+        <p:txBody>
+          <a:bodyPr wrap="square" lIns="0" rIns="0" tIns="0" bIns="0">
+            <a:spAutoFit/>
+          </a:bodyPr>
+          <a:lstStyle/>
+          <a:p>
+            <a:pPr algn="l">
+              <a:lnSpc>
+                <a:spcPct val="100000"/>
+              </a:lnSpc>
+              <a:defRPr sz="1150" b="1">
+                <a:solidFill>
+                  <a:srgbClr val="7B1E22"/>
+                </a:solidFill>
+                <a:latin typeface="Segoe UI"/>
+              </a:defRPr>
+            </a:pPr>
+            <a:r>
+              <a:t>TOOL INTEGRATION</a:t>
+            </a:r>
+          </a:p>
+        </p:txBody>
+      </p:sp>
+      <p:sp>
+        <p:nvSpPr>
+          <p:cNvPr id="3" name="TextBox 2"/>
+          <p:cNvSpPr txBox="1"/>
+          <p:nvPr/>
+        </p:nvSpPr>
+        <p:spPr>
+          <a:xfrm>
+            <a:off x="777240" y="868680"/>
+            <a:ext cx="10607040" cy="731520"/>
+          </a:xfrm>
+          <a:prstGeom prst="rect">
+            <a:avLst/>
+          </a:prstGeom>
+          <a:noFill/>
+        </p:spPr>
+        <p:txBody>
+          <a:bodyPr wrap="square" lIns="0" rIns="0" tIns="0" bIns="0">
+            <a:spAutoFit/>
+          </a:bodyPr>
+          <a:lstStyle/>
+          <a:p>
+            <a:pPr algn="l">
+              <a:lnSpc>
+                <a:spcPct val="100000"/>
+              </a:lnSpc>
+              <a:defRPr sz="3100" b="1">
+                <a:solidFill>
+                  <a:srgbClr val="000000"/>
+                </a:solidFill>
+                <a:latin typeface="Segoe UI"/>
+              </a:defRPr>
+            </a:pPr>
+            <a:r>
+              <a:t>It touches the real world</a:t>
+            </a:r>
+          </a:p>
+        </p:txBody>
+      </p:sp>
+      <p:cxnSp>
+        <p:nvCxnSpPr>
+          <p:cNvPr id="4" name="Connector 3"/>
+          <p:cNvCxnSpPr/>
+          <p:nvPr/>
+        </p:nvCxnSpPr>
+        <p:spPr>
+          <a:xfrm>
+            <a:off x="777240" y="1572768"/>
+            <a:ext cx="10607040" cy="0"/>
+          </a:xfrm>
+          <a:prstGeom prst="line">
+            <a:avLst/>
+          </a:prstGeom>
+          <a:ln w="12700">
+            <a:solidFill>
+              <a:srgbClr val="E4E4E7"/>
+            </a:solidFill>
+          </a:ln>
+        </p:spPr>
+        <p:style>
+          <a:lnRef idx="2">
+            <a:schemeClr val="accent1"/>
+          </a:lnRef>
+          <a:fillRef idx="0">
+            <a:schemeClr val="accent1"/>
+          </a:fillRef>
+          <a:effectRef idx="1">
+            <a:schemeClr val="accent1"/>
+          </a:effectRef>
+          <a:fontRef idx="minor">
+            <a:schemeClr val="tx1"/>
+          </a:fontRef>
+        </p:style>
+      </p:cxnSp>
+      <p:sp>
+        <p:nvSpPr>
+          <p:cNvPr id="5" name="TextBox 4"/>
+          <p:cNvSpPr txBox="1"/>
+          <p:nvPr/>
+        </p:nvSpPr>
+        <p:spPr>
+          <a:xfrm>
+            <a:off x="777240" y="2011680"/>
+            <a:ext cx="10607040" cy="777240"/>
+          </a:xfrm>
+          <a:prstGeom prst="rect">
+            <a:avLst/>
+          </a:prstGeom>
+          <a:noFill/>
+        </p:spPr>
+        <p:txBody>
+          <a:bodyPr wrap="square" lIns="0" tIns="0" bIns="0">
+            <a:spAutoFit/>
+          </a:bodyPr>
+          <a:lstStyle/>
           <a:p>
             <a:pPr>
-              <a:spcAft>
-                <a:spcPts val="1200"/>
-              </a:spcAft>
-              <a:defRPr sz="2000" b="0">
-                <a:solidFill>
-                  <a:srgbClr val="0F172A"/>
-                </a:solidFill>
-              </a:defRPr>
-            </a:pPr>
-            <a:r>
-              <a:t>A Supervisor agent coordinates specialists, shares memory, and routes work based on the actual business task.</a:t>
-            </a:r>
-          </a:p>
+              <a:lnSpc>
+                <a:spcPct val="125000"/>
+              </a:lnSpc>
+            </a:pPr>
+            <a:r>
+              <a:rPr sz="1450" b="1">
+                <a:solidFill>
+                  <a:srgbClr val="000000"/>
+                </a:solidFill>
+                <a:latin typeface="Segoe UI"/>
+              </a:rPr>
+              <a:t>Web search</a:t>
+            </a:r>
+            <a:r>
+              <a:rPr sz="1450">
+                <a:solidFill>
+                  <a:srgbClr val="3F3F46"/>
+                </a:solidFill>
+                <a:latin typeface="Segoe UI"/>
+              </a:rPr>
+              <a:t> — Tavily, falling back to DuckDuckGo when no key is set, with the sources cited back to the owner.</a:t>
+            </a:r>
+          </a:p>
+        </p:txBody>
+      </p:sp>
+      <p:sp>
+        <p:nvSpPr>
+          <p:cNvPr id="6" name="TextBox 5"/>
+          <p:cNvSpPr txBox="1"/>
+          <p:nvPr/>
+        </p:nvSpPr>
+        <p:spPr>
+          <a:xfrm>
+            <a:off x="777240" y="2788920"/>
+            <a:ext cx="10607040" cy="777240"/>
+          </a:xfrm>
+          <a:prstGeom prst="rect">
+            <a:avLst/>
+          </a:prstGeom>
+          <a:noFill/>
+        </p:spPr>
+        <p:txBody>
+          <a:bodyPr wrap="square" lIns="0" tIns="0" bIns="0">
+            <a:spAutoFit/>
+          </a:bodyPr>
+          <a:lstStyle/>
           <a:p>
             <a:pPr>
-              <a:spcAft>
-                <a:spcPts val="1200"/>
-              </a:spcAft>
-              <a:defRPr sz="2000" b="0">
-                <a:solidFill>
-                  <a:srgbClr val="0F172A"/>
-                </a:solidFill>
-              </a:defRPr>
-            </a:pPr>
-            <a:r>
-              <a:t>The system is interactive, explainable, and designed for business decision-making with human oversight.</a:t>
-            </a:r>
-          </a:p>
+              <a:lnSpc>
+                <a:spcPct val="125000"/>
+              </a:lnSpc>
+            </a:pPr>
+            <a:r>
+              <a:rPr sz="1450" b="1">
+                <a:solidFill>
+                  <a:srgbClr val="000000"/>
+                </a:solidFill>
+                <a:latin typeface="Segoe UI"/>
+              </a:rPr>
+              <a:t>Couriers</a:t>
+            </a:r>
+            <a:r>
+              <a:rPr sz="1450">
+                <a:solidFill>
+                  <a:srgbClr val="3F3F46"/>
+                </a:solidFill>
+                <a:latin typeface="Segoe UI"/>
+              </a:rPr>
+              <a:t> — Pathao and Steadfast, live: a real consignment id comes back, and weight-based pricing is quoted before booking.</a:t>
+            </a:r>
+          </a:p>
+        </p:txBody>
+      </p:sp>
+      <p:sp>
+        <p:nvSpPr>
+          <p:cNvPr id="7" name="TextBox 6"/>
+          <p:cNvSpPr txBox="1"/>
+          <p:nvPr/>
+        </p:nvSpPr>
+        <p:spPr>
+          <a:xfrm>
+            <a:off x="777240" y="3566160"/>
+            <a:ext cx="10607040" cy="777240"/>
+          </a:xfrm>
+          <a:prstGeom prst="rect">
+            <a:avLst/>
+          </a:prstGeom>
+          <a:noFill/>
+        </p:spPr>
+        <p:txBody>
+          <a:bodyPr wrap="square" lIns="0" tIns="0" bIns="0">
+            <a:spAutoFit/>
+          </a:bodyPr>
+          <a:lstStyle/>
           <a:p>
             <a:pPr>
-              <a:spcAft>
-                <a:spcPts val="1200"/>
-              </a:spcAft>
-              <a:defRPr sz="2000" b="1">
-                <a:solidFill>
-                  <a:srgbClr val="0F172A"/>
-                </a:solidFill>
-              </a:defRPr>
-            </a:pPr>
-            <a:r>
-              <a:t>Result: a practical AI workforce for small-business operations and workflow automation.</a:t>
+              <a:lnSpc>
+                <a:spcPct val="125000"/>
+              </a:lnSpc>
+            </a:pPr>
+            <a:r>
+              <a:rPr sz="1450" b="1">
+                <a:solidFill>
+                  <a:srgbClr val="000000"/>
+                </a:solidFill>
+                <a:latin typeface="Segoe UI"/>
+              </a:rPr>
+              <a:t>Channels</a:t>
+            </a:r>
+            <a:r>
+              <a:rPr sz="1450">
+                <a:solidFill>
+                  <a:srgbClr val="3F3F46"/>
+                </a:solidFill>
+                <a:latin typeface="Segoe UI"/>
+              </a:rPr>
+              <a:t> — Telegram for customer messages, Meta for Facebook and Instagram publishing.</a:t>
+            </a:r>
+          </a:p>
+        </p:txBody>
+      </p:sp>
+      <p:sp>
+        <p:nvSpPr>
+          <p:cNvPr id="8" name="TextBox 7"/>
+          <p:cNvSpPr txBox="1"/>
+          <p:nvPr/>
+        </p:nvSpPr>
+        <p:spPr>
+          <a:xfrm>
+            <a:off x="777240" y="4343400"/>
+            <a:ext cx="10607040" cy="777240"/>
+          </a:xfrm>
+          <a:prstGeom prst="rect">
+            <a:avLst/>
+          </a:prstGeom>
+          <a:noFill/>
+        </p:spPr>
+        <p:txBody>
+          <a:bodyPr wrap="square" lIns="0" tIns="0" bIns="0">
+            <a:spAutoFit/>
+          </a:bodyPr>
+          <a:lstStyle/>
+          <a:p>
+            <a:pPr>
+              <a:lnSpc>
+                <a:spcPct val="125000"/>
+              </a:lnSpc>
+            </a:pPr>
+            <a:r>
+              <a:rPr sz="1450" b="1">
+                <a:solidFill>
+                  <a:srgbClr val="000000"/>
+                </a:solidFill>
+                <a:latin typeface="Segoe UI"/>
+              </a:rPr>
+              <a:t>Vision and image generation</a:t>
+            </a:r>
+            <a:r>
+              <a:rPr sz="1450">
+                <a:solidFill>
+                  <a:srgbClr val="3F3F46"/>
+                </a:solidFill>
+                <a:latin typeface="Segoe UI"/>
+              </a:rPr>
+              <a:t> — reads a photo of a product; generates ad artwork.</a:t>
+            </a:r>
+          </a:p>
+        </p:txBody>
+      </p:sp>
+      <p:sp>
+        <p:nvSpPr>
+          <p:cNvPr id="9" name="TextBox 8"/>
+          <p:cNvSpPr txBox="1"/>
+          <p:nvPr/>
+        </p:nvSpPr>
+        <p:spPr>
+          <a:xfrm>
+            <a:off x="777240" y="5120640"/>
+            <a:ext cx="10607040" cy="777240"/>
+          </a:xfrm>
+          <a:prstGeom prst="rect">
+            <a:avLst/>
+          </a:prstGeom>
+          <a:noFill/>
+        </p:spPr>
+        <p:txBody>
+          <a:bodyPr wrap="square" lIns="0" tIns="0" bIns="0">
+            <a:spAutoFit/>
+          </a:bodyPr>
+          <a:lstStyle/>
+          <a:p>
+            <a:pPr>
+              <a:lnSpc>
+                <a:spcPct val="125000"/>
+              </a:lnSpc>
+            </a:pPr>
+            <a:r>
+              <a:rPr sz="1450" b="1">
+                <a:solidFill>
+                  <a:srgbClr val="000000"/>
+                </a:solidFill>
+                <a:latin typeface="Segoe UI"/>
+              </a:rPr>
+              <a:t>Python execution</a:t>
+            </a:r>
+            <a:r>
+              <a:rPr sz="1450">
+                <a:solidFill>
+                  <a:srgbClr val="3F3F46"/>
+                </a:solidFill>
+                <a:latin typeface="Segoe UI"/>
+              </a:rPr>
+              <a:t> — for the arithmetic the models should not be trusted to do in their heads.</a:t>
+            </a:r>
+          </a:p>
+        </p:txBody>
+      </p:sp>
+      <p:sp>
+        <p:nvSpPr>
+          <p:cNvPr id="10" name="TextBox 9"/>
+          <p:cNvSpPr txBox="1"/>
+          <p:nvPr/>
+        </p:nvSpPr>
+        <p:spPr>
+          <a:xfrm>
+            <a:off x="777240" y="5815584"/>
+            <a:ext cx="10607040" cy="411480"/>
+          </a:xfrm>
+          <a:prstGeom prst="rect">
+            <a:avLst/>
+          </a:prstGeom>
+          <a:noFill/>
+        </p:spPr>
+        <p:txBody>
+          <a:bodyPr wrap="square" lIns="0" rIns="0" tIns="0" bIns="0">
+            <a:spAutoFit/>
+          </a:bodyPr>
+          <a:lstStyle/>
+          <a:p>
+            <a:pPr algn="l">
+              <a:lnSpc>
+                <a:spcPct val="100000"/>
+              </a:lnSpc>
+              <a:defRPr sz="1150" b="0">
+                <a:solidFill>
+                  <a:srgbClr val="71717A"/>
+                </a:solidFill>
+                <a:latin typeface="Segoe UI"/>
+              </a:defRPr>
+            </a:pPr>
+            <a:r>
+              <a:t>13 tool modules. Without credentials each one returns a clearly labelled simulated result, so the flow is demonstrable without spending money.</a:t>
+            </a:r>
+          </a:p>
+        </p:txBody>
+      </p:sp>
+      <p:sp>
+        <p:nvSpPr>
+          <p:cNvPr id="11" name="TextBox 10"/>
+          <p:cNvSpPr txBox="1"/>
+          <p:nvPr/>
+        </p:nvSpPr>
+        <p:spPr>
+          <a:xfrm>
+            <a:off x="777240" y="6327648"/>
+            <a:ext cx="2743200" cy="274320"/>
+          </a:xfrm>
+          <a:prstGeom prst="rect">
+            <a:avLst/>
+          </a:prstGeom>
+          <a:noFill/>
+        </p:spPr>
+        <p:txBody>
+          <a:bodyPr wrap="square" lIns="0" rIns="0" tIns="0" bIns="0">
+            <a:spAutoFit/>
+          </a:bodyPr>
+          <a:lstStyle/>
+          <a:p>
+            <a:pPr algn="l">
+              <a:lnSpc>
+                <a:spcPct val="100000"/>
+              </a:lnSpc>
+              <a:defRPr sz="1050" b="0">
+                <a:solidFill>
+                  <a:srgbClr val="A1A1AA"/>
+                </a:solidFill>
+                <a:latin typeface="Segoe UI"/>
+              </a:defRPr>
+            </a:pPr>
+            <a:r>
+              <a:t>Lucida</a:t>
+            </a:r>
+          </a:p>
+        </p:txBody>
+      </p:sp>
+      <p:sp>
+        <p:nvSpPr>
+          <p:cNvPr id="12" name="TextBox 11"/>
+          <p:cNvSpPr txBox="1"/>
+          <p:nvPr/>
+        </p:nvSpPr>
+        <p:spPr>
+          <a:xfrm>
+            <a:off x="11064240" y="6327648"/>
+            <a:ext cx="365760" cy="274320"/>
+          </a:xfrm>
+          <a:prstGeom prst="rect">
+            <a:avLst/>
+          </a:prstGeom>
+          <a:noFill/>
+        </p:spPr>
+        <p:txBody>
+          <a:bodyPr wrap="square" lIns="0" rIns="0" tIns="0" bIns="0">
+            <a:spAutoFit/>
+          </a:bodyPr>
+          <a:lstStyle/>
+          <a:p>
+            <a:pPr algn="r">
+              <a:lnSpc>
+                <a:spcPct val="100000"/>
+              </a:lnSpc>
+              <a:defRPr sz="1050" b="0">
+                <a:solidFill>
+                  <a:srgbClr val="A1A1AA"/>
+                </a:solidFill>
+                <a:latin typeface="Segoe UI"/>
+              </a:defRPr>
+            </a:pPr>
+            <a:r>
+              <a:t>8</a:t>
+            </a:r>
+          </a:p>
+        </p:txBody>
+      </p:sp>
+    </p:spTree>
+  </p:cSld>
+  <p:clrMapOvr>
+    <a:masterClrMapping/>
+  </p:clrMapOvr>
+</p:sld>
+</file>
+
+<file path=ppt/slides/slide9.xml><?xml version="1.0" encoding="utf-8"?>
+<p:sld xmlns:a="http://schemas.openxmlformats.org/drawingml/2006/main" xmlns:p="http://schemas.openxmlformats.org/presentationml/2006/main" xmlns:r="http://schemas.openxmlformats.org/officeDocument/2006/relationships">
+  <p:cSld>
+    <p:bg>
+      <p:bgPr>
+        <a:solidFill>
+          <a:srgbClr val="FFFFFF"/>
+        </a:solidFill>
+        <a:effectLst/>
+      </p:bgPr>
+    </p:bg>
+    <p:spTree>
+      <p:nvGrpSpPr>
+        <p:cNvPr id="1" name=""/>
+        <p:cNvGrpSpPr/>
+        <p:nvPr/>
+      </p:nvGrpSpPr>
+      <p:grpSpPr/>
+      <p:sp>
+        <p:nvSpPr>
+          <p:cNvPr id="2" name="TextBox 1"/>
+          <p:cNvSpPr txBox="1"/>
+          <p:nvPr/>
+        </p:nvSpPr>
+        <p:spPr>
+          <a:xfrm>
+            <a:off x="777240" y="566928"/>
+            <a:ext cx="7315200" cy="274320"/>
+          </a:xfrm>
+          <a:prstGeom prst="rect">
+            <a:avLst/>
+          </a:prstGeom>
+          <a:noFill/>
+        </p:spPr>
+        <p:txBody>
+          <a:bodyPr wrap="square" lIns="0" rIns="0" tIns="0" bIns="0">
+            <a:spAutoFit/>
+          </a:bodyPr>
+          <a:lstStyle/>
+          <a:p>
+            <a:pPr algn="l">
+              <a:lnSpc>
+                <a:spcPct val="100000"/>
+              </a:lnSpc>
+              <a:defRPr sz="1150" b="1">
+                <a:solidFill>
+                  <a:srgbClr val="7B1E22"/>
+                </a:solidFill>
+                <a:latin typeface="Segoe UI"/>
+              </a:defRPr>
+            </a:pPr>
+            <a:r>
+              <a:t>LOGGING &amp; OBSERVABILITY</a:t>
+            </a:r>
+          </a:p>
+        </p:txBody>
+      </p:sp>
+      <p:sp>
+        <p:nvSpPr>
+          <p:cNvPr id="3" name="TextBox 2"/>
+          <p:cNvSpPr txBox="1"/>
+          <p:nvPr/>
+        </p:nvSpPr>
+        <p:spPr>
+          <a:xfrm>
+            <a:off x="777240" y="868680"/>
+            <a:ext cx="10607040" cy="731520"/>
+          </a:xfrm>
+          <a:prstGeom prst="rect">
+            <a:avLst/>
+          </a:prstGeom>
+          <a:noFill/>
+        </p:spPr>
+        <p:txBody>
+          <a:bodyPr wrap="square" lIns="0" rIns="0" tIns="0" bIns="0">
+            <a:spAutoFit/>
+          </a:bodyPr>
+          <a:lstStyle/>
+          <a:p>
+            <a:pPr algn="l">
+              <a:lnSpc>
+                <a:spcPct val="100000"/>
+              </a:lnSpc>
+              <a:defRPr sz="3100" b="1">
+                <a:solidFill>
+                  <a:srgbClr val="000000"/>
+                </a:solidFill>
+                <a:latin typeface="Segoe UI"/>
+              </a:defRPr>
+            </a:pPr>
+            <a:r>
+              <a:t>You can watch it think</a:t>
+            </a:r>
+          </a:p>
+        </p:txBody>
+      </p:sp>
+      <p:cxnSp>
+        <p:nvCxnSpPr>
+          <p:cNvPr id="4" name="Connector 3"/>
+          <p:cNvCxnSpPr/>
+          <p:nvPr/>
+        </p:nvCxnSpPr>
+        <p:spPr>
+          <a:xfrm>
+            <a:off x="777240" y="1572768"/>
+            <a:ext cx="10607040" cy="0"/>
+          </a:xfrm>
+          <a:prstGeom prst="line">
+            <a:avLst/>
+          </a:prstGeom>
+          <a:ln w="12700">
+            <a:solidFill>
+              <a:srgbClr val="E4E4E7"/>
+            </a:solidFill>
+          </a:ln>
+        </p:spPr>
+        <p:style>
+          <a:lnRef idx="2">
+            <a:schemeClr val="accent1"/>
+          </a:lnRef>
+          <a:fillRef idx="0">
+            <a:schemeClr val="accent1"/>
+          </a:fillRef>
+          <a:effectRef idx="1">
+            <a:schemeClr val="accent1"/>
+          </a:effectRef>
+          <a:fontRef idx="minor">
+            <a:schemeClr val="tx1"/>
+          </a:fontRef>
+        </p:style>
+      </p:cxnSp>
+      <p:sp>
+        <p:nvSpPr>
+          <p:cNvPr id="5" name="Rounded Rectangle 4"/>
+          <p:cNvSpPr/>
+          <p:nvPr/>
+        </p:nvSpPr>
+        <p:spPr>
+          <a:xfrm>
+            <a:off x="777240" y="2057400"/>
+            <a:ext cx="2514600" cy="1691640"/>
+          </a:xfrm>
+          <a:prstGeom prst="roundRect">
+            <a:avLst>
+              <a:gd name="adj" fmla="val 8000"/>
+            </a:avLst>
+          </a:prstGeom>
+          <a:solidFill>
+            <a:srgbClr val="F4F4F5"/>
+          </a:solidFill>
+          <a:ln w="12700">
+            <a:solidFill>
+              <a:srgbClr val="E4E4E7"/>
+            </a:solidFill>
+          </a:ln>
+          <a:effectLst/>
+        </p:spPr>
+        <p:style>
+          <a:lnRef idx="1">
+            <a:schemeClr val="accent1"/>
+          </a:lnRef>
+          <a:fillRef idx="3">
+            <a:schemeClr val="accent1"/>
+          </a:fillRef>
+          <a:effectRef idx="2">
+            <a:schemeClr val="accent1"/>
+          </a:effectRef>
+          <a:fontRef idx="minor">
+            <a:schemeClr val="lt1"/>
+          </a:fontRef>
+        </p:style>
+        <p:txBody>
+          <a:bodyPr rtlCol="0" anchor="ctr"/>
+          <a:lstStyle/>
+          <a:p/>
+        </p:txBody>
+      </p:sp>
+      <p:sp>
+        <p:nvSpPr>
+          <p:cNvPr id="6" name="TextBox 5"/>
+          <p:cNvSpPr txBox="1"/>
+          <p:nvPr/>
+        </p:nvSpPr>
+        <p:spPr>
+          <a:xfrm>
+            <a:off x="1005840" y="2286000"/>
+            <a:ext cx="2103120" cy="274320"/>
+          </a:xfrm>
+          <a:prstGeom prst="rect">
+            <a:avLst/>
+          </a:prstGeom>
+          <a:noFill/>
+        </p:spPr>
+        <p:txBody>
+          <a:bodyPr wrap="square" lIns="0" rIns="0" tIns="0" bIns="0">
+            <a:spAutoFit/>
+          </a:bodyPr>
+          <a:lstStyle/>
+          <a:p>
+            <a:pPr algn="l">
+              <a:lnSpc>
+                <a:spcPct val="100000"/>
+              </a:lnSpc>
+              <a:defRPr sz="1350" b="1">
+                <a:solidFill>
+                  <a:srgbClr val="000000"/>
+                </a:solidFill>
+                <a:latin typeface="Segoe UI"/>
+              </a:defRPr>
+            </a:pPr>
+            <a:r>
+              <a:t>Live trace</a:t>
+            </a:r>
+          </a:p>
+        </p:txBody>
+      </p:sp>
+      <p:sp>
+        <p:nvSpPr>
+          <p:cNvPr id="7" name="TextBox 6"/>
+          <p:cNvSpPr txBox="1"/>
+          <p:nvPr/>
+        </p:nvSpPr>
+        <p:spPr>
+          <a:xfrm>
+            <a:off x="1005840" y="2670048"/>
+            <a:ext cx="2103120" cy="914400"/>
+          </a:xfrm>
+          <a:prstGeom prst="rect">
+            <a:avLst/>
+          </a:prstGeom>
+          <a:noFill/>
+        </p:spPr>
+        <p:txBody>
+          <a:bodyPr wrap="square" lIns="0" rIns="0" tIns="0" bIns="0">
+            <a:spAutoFit/>
+          </a:bodyPr>
+          <a:lstStyle/>
+          <a:p>
+            <a:pPr algn="l">
+              <a:lnSpc>
+                <a:spcPct val="130000"/>
+              </a:lnSpc>
+              <a:defRPr sz="1150" b="0">
+                <a:solidFill>
+                  <a:srgbClr val="71717A"/>
+                </a:solidFill>
+                <a:latin typeface="Segoe UI"/>
+              </a:defRPr>
+            </a:pPr>
+            <a:r>
+              <a:t>Every step over SSE as it happens</a:t>
+            </a:r>
+          </a:p>
+        </p:txBody>
+      </p:sp>
+      <p:sp>
+        <p:nvSpPr>
+          <p:cNvPr id="8" name="Rounded Rectangle 7"/>
+          <p:cNvSpPr/>
+          <p:nvPr/>
+        </p:nvSpPr>
+        <p:spPr>
+          <a:xfrm>
+            <a:off x="3520440" y="2057400"/>
+            <a:ext cx="2514600" cy="1691640"/>
+          </a:xfrm>
+          <a:prstGeom prst="roundRect">
+            <a:avLst>
+              <a:gd name="adj" fmla="val 8000"/>
+            </a:avLst>
+          </a:prstGeom>
+          <a:solidFill>
+            <a:srgbClr val="F4F4F5"/>
+          </a:solidFill>
+          <a:ln w="12700">
+            <a:solidFill>
+              <a:srgbClr val="E4E4E7"/>
+            </a:solidFill>
+          </a:ln>
+          <a:effectLst/>
+        </p:spPr>
+        <p:style>
+          <a:lnRef idx="1">
+            <a:schemeClr val="accent1"/>
+          </a:lnRef>
+          <a:fillRef idx="3">
+            <a:schemeClr val="accent1"/>
+          </a:fillRef>
+          <a:effectRef idx="2">
+            <a:schemeClr val="accent1"/>
+          </a:effectRef>
+          <a:fontRef idx="minor">
+            <a:schemeClr val="lt1"/>
+          </a:fontRef>
+        </p:style>
+        <p:txBody>
+          <a:bodyPr rtlCol="0" anchor="ctr"/>
+          <a:lstStyle/>
+          <a:p/>
+        </p:txBody>
+      </p:sp>
+      <p:sp>
+        <p:nvSpPr>
+          <p:cNvPr id="9" name="TextBox 8"/>
+          <p:cNvSpPr txBox="1"/>
+          <p:nvPr/>
+        </p:nvSpPr>
+        <p:spPr>
+          <a:xfrm>
+            <a:off x="3749039" y="2286000"/>
+            <a:ext cx="2103120" cy="274320"/>
+          </a:xfrm>
+          <a:prstGeom prst="rect">
+            <a:avLst/>
+          </a:prstGeom>
+          <a:noFill/>
+        </p:spPr>
+        <p:txBody>
+          <a:bodyPr wrap="square" lIns="0" rIns="0" tIns="0" bIns="0">
+            <a:spAutoFit/>
+          </a:bodyPr>
+          <a:lstStyle/>
+          <a:p>
+            <a:pPr algn="l">
+              <a:lnSpc>
+                <a:spcPct val="100000"/>
+              </a:lnSpc>
+              <a:defRPr sz="1350" b="1">
+                <a:solidFill>
+                  <a:srgbClr val="000000"/>
+                </a:solidFill>
+                <a:latin typeface="Segoe UI"/>
+              </a:defRPr>
+            </a:pPr>
+            <a:r>
+              <a:t>Execution graph</a:t>
+            </a:r>
+          </a:p>
+        </p:txBody>
+      </p:sp>
+      <p:sp>
+        <p:nvSpPr>
+          <p:cNvPr id="10" name="TextBox 9"/>
+          <p:cNvSpPr txBox="1"/>
+          <p:nvPr/>
+        </p:nvSpPr>
+        <p:spPr>
+          <a:xfrm>
+            <a:off x="3749039" y="2670048"/>
+            <a:ext cx="2103120" cy="914400"/>
+          </a:xfrm>
+          <a:prstGeom prst="rect">
+            <a:avLst/>
+          </a:prstGeom>
+          <a:noFill/>
+        </p:spPr>
+        <p:txBody>
+          <a:bodyPr wrap="square" lIns="0" rIns="0" tIns="0" bIns="0">
+            <a:spAutoFit/>
+          </a:bodyPr>
+          <a:lstStyle/>
+          <a:p>
+            <a:pPr algn="l">
+              <a:lnSpc>
+                <a:spcPct val="130000"/>
+              </a:lnSpc>
+              <a:defRPr sz="1150" b="0">
+                <a:solidFill>
+                  <a:srgbClr val="71717A"/>
+                </a:solidFill>
+                <a:latin typeface="Segoe UI"/>
+              </a:defRPr>
+            </a:pPr>
+            <a:r>
+              <a:t>Drawn from the compiled graph</a:t>
+            </a:r>
+          </a:p>
+        </p:txBody>
+      </p:sp>
+      <p:sp>
+        <p:nvSpPr>
+          <p:cNvPr id="11" name="Rounded Rectangle 10"/>
+          <p:cNvSpPr/>
+          <p:nvPr/>
+        </p:nvSpPr>
+        <p:spPr>
+          <a:xfrm>
+            <a:off x="6263640" y="2057400"/>
+            <a:ext cx="2514600" cy="1691640"/>
+          </a:xfrm>
+          <a:prstGeom prst="roundRect">
+            <a:avLst>
+              <a:gd name="adj" fmla="val 8000"/>
+            </a:avLst>
+          </a:prstGeom>
+          <a:solidFill>
+            <a:srgbClr val="F4F4F5"/>
+          </a:solidFill>
+          <a:ln w="12700">
+            <a:solidFill>
+              <a:srgbClr val="E4E4E7"/>
+            </a:solidFill>
+          </a:ln>
+          <a:effectLst/>
+        </p:spPr>
+        <p:style>
+          <a:lnRef idx="1">
+            <a:schemeClr val="accent1"/>
+          </a:lnRef>
+          <a:fillRef idx="3">
+            <a:schemeClr val="accent1"/>
+          </a:fillRef>
+          <a:effectRef idx="2">
+            <a:schemeClr val="accent1"/>
+          </a:effectRef>
+          <a:fontRef idx="minor">
+            <a:schemeClr val="lt1"/>
+          </a:fontRef>
+        </p:style>
+        <p:txBody>
+          <a:bodyPr rtlCol="0" anchor="ctr"/>
+          <a:lstStyle/>
+          <a:p/>
+        </p:txBody>
+      </p:sp>
+      <p:sp>
+        <p:nvSpPr>
+          <p:cNvPr id="12" name="TextBox 11"/>
+          <p:cNvSpPr txBox="1"/>
+          <p:nvPr/>
+        </p:nvSpPr>
+        <p:spPr>
+          <a:xfrm>
+            <a:off x="6492240" y="2286000"/>
+            <a:ext cx="2103120" cy="274320"/>
+          </a:xfrm>
+          <a:prstGeom prst="rect">
+            <a:avLst/>
+          </a:prstGeom>
+          <a:noFill/>
+        </p:spPr>
+        <p:txBody>
+          <a:bodyPr wrap="square" lIns="0" rIns="0" tIns="0" bIns="0">
+            <a:spAutoFit/>
+          </a:bodyPr>
+          <a:lstStyle/>
+          <a:p>
+            <a:pPr algn="l">
+              <a:lnSpc>
+                <a:spcPct val="100000"/>
+              </a:lnSpc>
+              <a:defRPr sz="1350" b="1">
+                <a:solidFill>
+                  <a:srgbClr val="000000"/>
+                </a:solidFill>
+                <a:latin typeface="Segoe UI"/>
+              </a:defRPr>
+            </a:pPr>
+            <a:r>
+              <a:t>Token &amp; cost</a:t>
+            </a:r>
+          </a:p>
+        </p:txBody>
+      </p:sp>
+      <p:sp>
+        <p:nvSpPr>
+          <p:cNvPr id="13" name="TextBox 12"/>
+          <p:cNvSpPr txBox="1"/>
+          <p:nvPr/>
+        </p:nvSpPr>
+        <p:spPr>
+          <a:xfrm>
+            <a:off x="6492240" y="2670048"/>
+            <a:ext cx="2103120" cy="914400"/>
+          </a:xfrm>
+          <a:prstGeom prst="rect">
+            <a:avLst/>
+          </a:prstGeom>
+          <a:noFill/>
+        </p:spPr>
+        <p:txBody>
+          <a:bodyPr wrap="square" lIns="0" rIns="0" tIns="0" bIns="0">
+            <a:spAutoFit/>
+          </a:bodyPr>
+          <a:lstStyle/>
+          <a:p>
+            <a:pPr algn="l">
+              <a:lnSpc>
+                <a:spcPct val="130000"/>
+              </a:lnSpc>
+              <a:defRPr sz="1150" b="0">
+                <a:solidFill>
+                  <a:srgbClr val="71717A"/>
+                </a:solidFill>
+                <a:latin typeface="Segoe UI"/>
+              </a:defRPr>
+            </a:pPr>
+            <a:r>
+              <a:t>Per agent, per run, in USD</a:t>
+            </a:r>
+          </a:p>
+        </p:txBody>
+      </p:sp>
+      <p:sp>
+        <p:nvSpPr>
+          <p:cNvPr id="14" name="Rounded Rectangle 13"/>
+          <p:cNvSpPr/>
+          <p:nvPr/>
+        </p:nvSpPr>
+        <p:spPr>
+          <a:xfrm>
+            <a:off x="9006840" y="2057400"/>
+            <a:ext cx="2514600" cy="1691640"/>
+          </a:xfrm>
+          <a:prstGeom prst="roundRect">
+            <a:avLst>
+              <a:gd name="adj" fmla="val 8000"/>
+            </a:avLst>
+          </a:prstGeom>
+          <a:solidFill>
+            <a:srgbClr val="F4F4F5"/>
+          </a:solidFill>
+          <a:ln w="12700">
+            <a:solidFill>
+              <a:srgbClr val="E4E4E7"/>
+            </a:solidFill>
+          </a:ln>
+          <a:effectLst/>
+        </p:spPr>
+        <p:style>
+          <a:lnRef idx="1">
+            <a:schemeClr val="accent1"/>
+          </a:lnRef>
+          <a:fillRef idx="3">
+            <a:schemeClr val="accent1"/>
+          </a:fillRef>
+          <a:effectRef idx="2">
+            <a:schemeClr val="accent1"/>
+          </a:effectRef>
+          <a:fontRef idx="minor">
+            <a:schemeClr val="lt1"/>
+          </a:fontRef>
+        </p:style>
+        <p:txBody>
+          <a:bodyPr rtlCol="0" anchor="ctr"/>
+          <a:lstStyle/>
+          <a:p/>
+        </p:txBody>
+      </p:sp>
+      <p:sp>
+        <p:nvSpPr>
+          <p:cNvPr id="15" name="TextBox 14"/>
+          <p:cNvSpPr txBox="1"/>
+          <p:nvPr/>
+        </p:nvSpPr>
+        <p:spPr>
+          <a:xfrm>
+            <a:off x="9235440" y="2286000"/>
+            <a:ext cx="2103120" cy="274320"/>
+          </a:xfrm>
+          <a:prstGeom prst="rect">
+            <a:avLst/>
+          </a:prstGeom>
+          <a:noFill/>
+        </p:spPr>
+        <p:txBody>
+          <a:bodyPr wrap="square" lIns="0" rIns="0" tIns="0" bIns="0">
+            <a:spAutoFit/>
+          </a:bodyPr>
+          <a:lstStyle/>
+          <a:p>
+            <a:pPr algn="l">
+              <a:lnSpc>
+                <a:spcPct val="100000"/>
+              </a:lnSpc>
+              <a:defRPr sz="1350" b="1">
+                <a:solidFill>
+                  <a:srgbClr val="000000"/>
+                </a:solidFill>
+                <a:latin typeface="Segoe UI"/>
+              </a:defRPr>
+            </a:pPr>
+            <a:r>
+              <a:t>Errors</a:t>
+            </a:r>
+          </a:p>
+        </p:txBody>
+      </p:sp>
+      <p:sp>
+        <p:nvSpPr>
+          <p:cNvPr id="16" name="TextBox 15"/>
+          <p:cNvSpPr txBox="1"/>
+          <p:nvPr/>
+        </p:nvSpPr>
+        <p:spPr>
+          <a:xfrm>
+            <a:off x="9235440" y="2670048"/>
+            <a:ext cx="2103120" cy="914400"/>
+          </a:xfrm>
+          <a:prstGeom prst="rect">
+            <a:avLst/>
+          </a:prstGeom>
+          <a:noFill/>
+        </p:spPr>
+        <p:txBody>
+          <a:bodyPr wrap="square" lIns="0" rIns="0" tIns="0" bIns="0">
+            <a:spAutoFit/>
+          </a:bodyPr>
+          <a:lstStyle/>
+          <a:p>
+            <a:pPr algn="l">
+              <a:lnSpc>
+                <a:spcPct val="130000"/>
+              </a:lnSpc>
+              <a:defRPr sz="1150" b="0">
+                <a:solidFill>
+                  <a:srgbClr val="71717A"/>
+                </a:solidFill>
+                <a:latin typeface="Segoe UI"/>
+              </a:defRPr>
+            </a:pPr>
+            <a:r>
+              <a:t>Each failure, and how it recovered</a:t>
+            </a:r>
+          </a:p>
+        </p:txBody>
+      </p:sp>
+      <p:sp>
+        <p:nvSpPr>
+          <p:cNvPr id="17" name="TextBox 16"/>
+          <p:cNvSpPr txBox="1"/>
+          <p:nvPr/>
+        </p:nvSpPr>
+        <p:spPr>
+          <a:xfrm>
+            <a:off x="777240" y="4114800"/>
+            <a:ext cx="10607040" cy="914400"/>
+          </a:xfrm>
+          <a:prstGeom prst="rect">
+            <a:avLst/>
+          </a:prstGeom>
+          <a:noFill/>
+        </p:spPr>
+        <p:txBody>
+          <a:bodyPr wrap="square" lIns="0" rIns="0" tIns="0" bIns="0">
+            <a:spAutoFit/>
+          </a:bodyPr>
+          <a:lstStyle/>
+          <a:p>
+            <a:pPr algn="l">
+              <a:lnSpc>
+                <a:spcPct val="140000"/>
+              </a:lnSpc>
+              <a:defRPr sz="1400" b="0">
+                <a:solidFill>
+                  <a:srgbClr val="3F3F46"/>
+                </a:solidFill>
+                <a:latin typeface="Segoe UI"/>
+              </a:defRPr>
+            </a:pPr>
+            <a:r>
+              <a:t>Every agent call is retried once, then dropped — one specialist failing degrades the answer rather than ending the run. The</a:t>
+            </a:r>
+          </a:p>
+          <a:p>
+            <a:pPr algn="l">
+              <a:lnSpc>
+                <a:spcPct val="140000"/>
+              </a:lnSpc>
+              <a:defRPr sz="1400" b="0">
+                <a:solidFill>
+                  <a:srgbClr val="3F3F46"/>
+                </a:solidFill>
+                <a:latin typeface="Segoe UI"/>
+              </a:defRPr>
+            </a:pPr>
+            <a:r>
+              <a:t>failure is recorded with what the graph did about it, because a run that half-failed and a run that succeeded are not the same run.</a:t>
+            </a:r>
+          </a:p>
+        </p:txBody>
+      </p:sp>
+      <p:sp>
+        <p:nvSpPr>
+          <p:cNvPr id="18" name="TextBox 17"/>
+          <p:cNvSpPr txBox="1"/>
+          <p:nvPr/>
+        </p:nvSpPr>
+        <p:spPr>
+          <a:xfrm>
+            <a:off x="777240" y="5166360"/>
+            <a:ext cx="2194560" cy="548640"/>
+          </a:xfrm>
+          <a:prstGeom prst="rect">
+            <a:avLst/>
+          </a:prstGeom>
+          <a:noFill/>
+        </p:spPr>
+        <p:txBody>
+          <a:bodyPr wrap="square" lIns="0" rIns="0" tIns="0" bIns="0">
+            <a:spAutoFit/>
+          </a:bodyPr>
+          <a:lstStyle/>
+          <a:p>
+            <a:pPr algn="l">
+              <a:lnSpc>
+                <a:spcPct val="100000"/>
+              </a:lnSpc>
+              <a:defRPr sz="3400" b="1">
+                <a:solidFill>
+                  <a:srgbClr val="7B1E22"/>
+                </a:solidFill>
+                <a:latin typeface="Segoe UI"/>
+              </a:defRPr>
+            </a:pPr>
+            <a:r>
+              <a:t>51</a:t>
+            </a:r>
+          </a:p>
+        </p:txBody>
+      </p:sp>
+      <p:sp>
+        <p:nvSpPr>
+          <p:cNvPr id="19" name="TextBox 18"/>
+          <p:cNvSpPr txBox="1"/>
+          <p:nvPr/>
+        </p:nvSpPr>
+        <p:spPr>
+          <a:xfrm>
+            <a:off x="777240" y="5733288"/>
+            <a:ext cx="2194560" cy="457200"/>
+          </a:xfrm>
+          <a:prstGeom prst="rect">
+            <a:avLst/>
+          </a:prstGeom>
+          <a:noFill/>
+        </p:spPr>
+        <p:txBody>
+          <a:bodyPr wrap="square" lIns="0" rIns="0" tIns="0" bIns="0">
+            <a:spAutoFit/>
+          </a:bodyPr>
+          <a:lstStyle/>
+          <a:p>
+            <a:pPr algn="l">
+              <a:lnSpc>
+                <a:spcPct val="100000"/>
+              </a:lnSpc>
+              <a:defRPr sz="1200" b="0">
+                <a:solidFill>
+                  <a:srgbClr val="71717A"/>
+                </a:solidFill>
+                <a:latin typeface="Segoe UI"/>
+              </a:defRPr>
+            </a:pPr>
+            <a:r>
+              <a:t>Python files</a:t>
+            </a:r>
+          </a:p>
+        </p:txBody>
+      </p:sp>
+      <p:sp>
+        <p:nvSpPr>
+          <p:cNvPr id="20" name="TextBox 19"/>
+          <p:cNvSpPr txBox="1"/>
+          <p:nvPr/>
+        </p:nvSpPr>
+        <p:spPr>
+          <a:xfrm>
+            <a:off x="3520440" y="5166360"/>
+            <a:ext cx="2194560" cy="548640"/>
+          </a:xfrm>
+          <a:prstGeom prst="rect">
+            <a:avLst/>
+          </a:prstGeom>
+          <a:noFill/>
+        </p:spPr>
+        <p:txBody>
+          <a:bodyPr wrap="square" lIns="0" rIns="0" tIns="0" bIns="0">
+            <a:spAutoFit/>
+          </a:bodyPr>
+          <a:lstStyle/>
+          <a:p>
+            <a:pPr algn="l">
+              <a:lnSpc>
+                <a:spcPct val="100000"/>
+              </a:lnSpc>
+              <a:defRPr sz="3400" b="1">
+                <a:solidFill>
+                  <a:srgbClr val="7B1E22"/>
+                </a:solidFill>
+                <a:latin typeface="Segoe UI"/>
+              </a:defRPr>
+            </a:pPr>
+            <a:r>
+              <a:t>21,592</a:t>
+            </a:r>
+          </a:p>
+        </p:txBody>
+      </p:sp>
+      <p:sp>
+        <p:nvSpPr>
+          <p:cNvPr id="21" name="TextBox 20"/>
+          <p:cNvSpPr txBox="1"/>
+          <p:nvPr/>
+        </p:nvSpPr>
+        <p:spPr>
+          <a:xfrm>
+            <a:off x="3520440" y="5733288"/>
+            <a:ext cx="2194560" cy="457200"/>
+          </a:xfrm>
+          <a:prstGeom prst="rect">
+            <a:avLst/>
+          </a:prstGeom>
+          <a:noFill/>
+        </p:spPr>
+        <p:txBody>
+          <a:bodyPr wrap="square" lIns="0" rIns="0" tIns="0" bIns="0">
+            <a:spAutoFit/>
+          </a:bodyPr>
+          <a:lstStyle/>
+          <a:p>
+            <a:pPr algn="l">
+              <a:lnSpc>
+                <a:spcPct val="100000"/>
+              </a:lnSpc>
+              <a:defRPr sz="1200" b="0">
+                <a:solidFill>
+                  <a:srgbClr val="71717A"/>
+                </a:solidFill>
+                <a:latin typeface="Segoe UI"/>
+              </a:defRPr>
+            </a:pPr>
+            <a:r>
+              <a:t>lines</a:t>
+            </a:r>
+          </a:p>
+        </p:txBody>
+      </p:sp>
+      <p:sp>
+        <p:nvSpPr>
+          <p:cNvPr id="22" name="TextBox 21"/>
+          <p:cNvSpPr txBox="1"/>
+          <p:nvPr/>
+        </p:nvSpPr>
+        <p:spPr>
+          <a:xfrm>
+            <a:off x="6263640" y="5166360"/>
+            <a:ext cx="2194560" cy="548640"/>
+          </a:xfrm>
+          <a:prstGeom prst="rect">
+            <a:avLst/>
+          </a:prstGeom>
+          <a:noFill/>
+        </p:spPr>
+        <p:txBody>
+          <a:bodyPr wrap="square" lIns="0" rIns="0" tIns="0" bIns="0">
+            <a:spAutoFit/>
+          </a:bodyPr>
+          <a:lstStyle/>
+          <a:p>
+            <a:pPr algn="l">
+              <a:lnSpc>
+                <a:spcPct val="100000"/>
+              </a:lnSpc>
+              <a:defRPr sz="3400" b="1">
+                <a:solidFill>
+                  <a:srgbClr val="7B1E22"/>
+                </a:solidFill>
+                <a:latin typeface="Segoe UI"/>
+              </a:defRPr>
+            </a:pPr>
+            <a:r>
+              <a:t>87</a:t>
+            </a:r>
+          </a:p>
+        </p:txBody>
+      </p:sp>
+      <p:sp>
+        <p:nvSpPr>
+          <p:cNvPr id="23" name="TextBox 22"/>
+          <p:cNvSpPr txBox="1"/>
+          <p:nvPr/>
+        </p:nvSpPr>
+        <p:spPr>
+          <a:xfrm>
+            <a:off x="6263640" y="5733288"/>
+            <a:ext cx="2194560" cy="457200"/>
+          </a:xfrm>
+          <a:prstGeom prst="rect">
+            <a:avLst/>
+          </a:prstGeom>
+          <a:noFill/>
+        </p:spPr>
+        <p:txBody>
+          <a:bodyPr wrap="square" lIns="0" rIns="0" tIns="0" bIns="0">
+            <a:spAutoFit/>
+          </a:bodyPr>
+          <a:lstStyle/>
+          <a:p>
+            <a:pPr algn="l">
+              <a:lnSpc>
+                <a:spcPct val="100000"/>
+              </a:lnSpc>
+              <a:defRPr sz="1200" b="0">
+                <a:solidFill>
+                  <a:srgbClr val="71717A"/>
+                </a:solidFill>
+                <a:latin typeface="Segoe UI"/>
+              </a:defRPr>
+            </a:pPr>
+            <a:r>
+              <a:t>tests, all passing</a:t>
+            </a:r>
+          </a:p>
+        </p:txBody>
+      </p:sp>
+      <p:sp>
+        <p:nvSpPr>
+          <p:cNvPr id="24" name="TextBox 23"/>
+          <p:cNvSpPr txBox="1"/>
+          <p:nvPr/>
+        </p:nvSpPr>
+        <p:spPr>
+          <a:xfrm>
+            <a:off x="9006840" y="5166360"/>
+            <a:ext cx="2194560" cy="548640"/>
+          </a:xfrm>
+          <a:prstGeom prst="rect">
+            <a:avLst/>
+          </a:prstGeom>
+          <a:noFill/>
+        </p:spPr>
+        <p:txBody>
+          <a:bodyPr wrap="square" lIns="0" rIns="0" tIns="0" bIns="0">
+            <a:spAutoFit/>
+          </a:bodyPr>
+          <a:lstStyle/>
+          <a:p>
+            <a:pPr algn="l">
+              <a:lnSpc>
+                <a:spcPct val="100000"/>
+              </a:lnSpc>
+              <a:defRPr sz="3400" b="1">
+                <a:solidFill>
+                  <a:srgbClr val="7B1E22"/>
+                </a:solidFill>
+                <a:latin typeface="Segoe UI"/>
+              </a:defRPr>
+            </a:pPr>
+            <a:r>
+              <a:t>100</a:t>
+            </a:r>
+          </a:p>
+        </p:txBody>
+      </p:sp>
+      <p:sp>
+        <p:nvSpPr>
+          <p:cNvPr id="25" name="TextBox 24"/>
+          <p:cNvSpPr txBox="1"/>
+          <p:nvPr/>
+        </p:nvSpPr>
+        <p:spPr>
+          <a:xfrm>
+            <a:off x="9006840" y="5733288"/>
+            <a:ext cx="2194560" cy="457200"/>
+          </a:xfrm>
+          <a:prstGeom prst="rect">
+            <a:avLst/>
+          </a:prstGeom>
+          <a:noFill/>
+        </p:spPr>
+        <p:txBody>
+          <a:bodyPr wrap="square" lIns="0" rIns="0" tIns="0" bIns="0">
+            <a:spAutoFit/>
+          </a:bodyPr>
+          <a:lstStyle/>
+          <a:p>
+            <a:pPr algn="l">
+              <a:lnSpc>
+                <a:spcPct val="100000"/>
+              </a:lnSpc>
+              <a:defRPr sz="1200" b="0">
+                <a:solidFill>
+                  <a:srgbClr val="71717A"/>
+                </a:solidFill>
+                <a:latin typeface="Segoe UI"/>
+              </a:defRPr>
+            </a:pPr>
+            <a:r>
+              <a:t>commits, one author</a:t>
+            </a:r>
+          </a:p>
+        </p:txBody>
+      </p:sp>
+      <p:sp>
+        <p:nvSpPr>
+          <p:cNvPr id="26" name="TextBox 25"/>
+          <p:cNvSpPr txBox="1"/>
+          <p:nvPr/>
+        </p:nvSpPr>
+        <p:spPr>
+          <a:xfrm>
+            <a:off x="777240" y="6327648"/>
+            <a:ext cx="2743200" cy="274320"/>
+          </a:xfrm>
+          <a:prstGeom prst="rect">
+            <a:avLst/>
+          </a:prstGeom>
+          <a:noFill/>
+        </p:spPr>
+        <p:txBody>
+          <a:bodyPr wrap="square" lIns="0" rIns="0" tIns="0" bIns="0">
+            <a:spAutoFit/>
+          </a:bodyPr>
+          <a:lstStyle/>
+          <a:p>
+            <a:pPr algn="l">
+              <a:lnSpc>
+                <a:spcPct val="100000"/>
+              </a:lnSpc>
+              <a:defRPr sz="1050" b="0">
+                <a:solidFill>
+                  <a:srgbClr val="A1A1AA"/>
+                </a:solidFill>
+                <a:latin typeface="Segoe UI"/>
+              </a:defRPr>
+            </a:pPr>
+            <a:r>
+              <a:t>Lucida</a:t>
+            </a:r>
+          </a:p>
+        </p:txBody>
+      </p:sp>
+      <p:sp>
+        <p:nvSpPr>
+          <p:cNvPr id="27" name="TextBox 26"/>
+          <p:cNvSpPr txBox="1"/>
+          <p:nvPr/>
+        </p:nvSpPr>
+        <p:spPr>
+          <a:xfrm>
+            <a:off x="11064240" y="6327648"/>
+            <a:ext cx="365760" cy="274320"/>
+          </a:xfrm>
+          <a:prstGeom prst="rect">
+            <a:avLst/>
+          </a:prstGeom>
+          <a:noFill/>
+        </p:spPr>
+        <p:txBody>
+          <a:bodyPr wrap="square" lIns="0" rIns="0" tIns="0" bIns="0">
+            <a:spAutoFit/>
+          </a:bodyPr>
+          <a:lstStyle/>
+          <a:p>
+            <a:pPr algn="r">
+              <a:lnSpc>
+                <a:spcPct val="100000"/>
+              </a:lnSpc>
+              <a:defRPr sz="1050" b="0">
+                <a:solidFill>
+                  <a:srgbClr val="A1A1AA"/>
+                </a:solidFill>
+                <a:latin typeface="Segoe UI"/>
+              </a:defRPr>
+            </a:pPr>
+            <a:r>
+              <a:t>9</a:t>
             </a:r>
           </a:p>
         </p:txBody>
